--- a/digismart/presentation-en.pptx
+++ b/digismart/presentation-en.pptx
@@ -4,6 +4,9 @@
   <p:sldMasterIdLst>
     <p:sldMasterId id="2147483648" r:id="rId1"/>
   </p:sldMasterIdLst>
+  <p:notesMasterIdLst>
+    <p:notesMasterId r:id="rId31"/>
+  </p:notesMasterIdLst>
   <p:sldIdLst>
     <p:sldId id="256" r:id="rId2"/>
     <p:sldId id="257" r:id="rId3"/>
@@ -23,21 +26,19 @@
     <p:sldId id="271" r:id="rId17"/>
     <p:sldId id="272" r:id="rId18"/>
     <p:sldId id="273" r:id="rId19"/>
-    <p:sldId id="274" r:id="rId20"/>
+    <p:sldId id="284" r:id="rId20"/>
     <p:sldId id="275" r:id="rId21"/>
-    <p:sldId id="276" r:id="rId22"/>
-    <p:sldId id="277" r:id="rId23"/>
+    <p:sldId id="274" r:id="rId22"/>
+    <p:sldId id="276" r:id="rId23"/>
     <p:sldId id="278" r:id="rId24"/>
     <p:sldId id="279" r:id="rId25"/>
-    <p:sldId id="280" r:id="rId26"/>
-    <p:sldId id="281" r:id="rId27"/>
-    <p:sldId id="282" r:id="rId28"/>
-    <p:sldId id="283" r:id="rId29"/>
+    <p:sldId id="277" r:id="rId26"/>
+    <p:sldId id="280" r:id="rId27"/>
+    <p:sldId id="281" r:id="rId28"/>
+    <p:sldId id="282" r:id="rId29"/>
+    <p:sldId id="283" r:id="rId30"/>
   </p:sldIdLst>
-  <p:notesMasterIdLst>
-    <p:notesMasterId r:id="rId30"/>
-  </p:notesMasterIdLst>
-  <p:sldSz cx="9144000" cy="5143500"/>
+  <p:sldSz cx="9144000" cy="5143500" type="screen16x9"/>
   <p:notesSz cx="5143500" cy="9144000"/>
   <p:defaultTextStyle>
     <a:lvl1pPr marL="0" algn="l" defTabSz="914400" rtl="0" eaLnBrk="1" latinLnBrk="0" hangingPunct="1">
@@ -131,6 +132,11 @@
       </a:defRPr>
     </a:lvl9pPr>
   </p:defaultTextStyle>
+  <p:extLst>
+    <p:ext uri="{EFAFB233-063F-42B5-8137-9DF3F51BA10A}">
+      <p15:sldGuideLst xmlns:p15="http://schemas.microsoft.com/office/powerpoint/2012/main"/>
+    </p:ext>
+  </p:extLst>
 </p:presentation>
 </file>
 
@@ -156,234 +162,10 @@
           <a:chExt cx="0" cy="0"/>
         </a:xfrm>
       </p:grpSpPr>
-      <p:sp>
-        <p:nvSpPr>
-          <p:cNvPr id="2" name="Header Placeholder 1"/>
-          <p:cNvSpPr>
-            <a:spLocks noGrp="1"/>
-          </p:cNvSpPr>
-          <p:nvPr>
-            <p:ph type="hdr" sz="quarter"/>
-          </p:nvPr>
-        </p:nvSpPr>
-        <p:spPr>
-          <a:xfrm>
-            <a:off x="0" y="0"/>
-            <a:ext cx="2971800" cy="458788"/>
-          </a:xfrm>
-          <a:prstGeom prst="rect">
-            <a:avLst/>
-          </a:prstGeom>
-        </p:spPr>
-        <p:txBody>
-          <a:bodyPr vert="horz" lIns="91440" tIns="45720" rIns="91440" bIns="45720" rtlCol="0"/>
-          <a:lstStyle>
-            <a:lvl1pPr algn="l">
-              <a:defRPr sz="1200"/>
-            </a:lvl1pPr>
-          </a:lstStyle>
-          <a:p>
-            <a:endParaRPr lang="en-US"/>
-          </a:p>
-        </p:txBody>
-      </p:sp>
-      <p:sp>
-        <p:nvSpPr>
-          <p:cNvPr id="3" name="Date Placeholder 2"/>
-          <p:cNvSpPr>
-            <a:spLocks noGrp="1"/>
-          </p:cNvSpPr>
-          <p:nvPr>
-            <p:ph type="dt" idx="1"/>
-          </p:nvPr>
-        </p:nvSpPr>
-        <p:spPr>
-          <a:xfrm>
-            <a:off x="3884613" y="0"/>
-            <a:ext cx="2971800" cy="458788"/>
-          </a:xfrm>
-          <a:prstGeom prst="rect">
-            <a:avLst/>
-          </a:prstGeom>
-        </p:spPr>
-        <p:txBody>
-          <a:bodyPr vert="horz" lIns="91440" tIns="45720" rIns="91440" bIns="45720" rtlCol="0"/>
-          <a:lstStyle>
-            <a:lvl1pPr algn="r">
-              <a:defRPr sz="1200"/>
-            </a:lvl1pPr>
-          </a:lstStyle>
-          <a:p>
-            <a:fld id="{5282F153-3F37-0F45-9E97-73ACFA13230C}" type="datetimeFigureOut">
-              <a:rPr lang="en-US"/>
-              <a:t>7/23/19</a:t>
-            </a:fld>
-            <a:endParaRPr lang="en-US"/>
-          </a:p>
-        </p:txBody>
-      </p:sp>
-      <p:sp>
-        <p:nvSpPr>
-          <p:cNvPr id="4" name="Slide Image Placeholder 3"/>
-          <p:cNvSpPr>
-            <a:spLocks noGrp="1" noRot="1" noChangeAspect="1"/>
-          </p:cNvSpPr>
-          <p:nvPr>
-            <p:ph type="sldImg" idx="2"/>
-          </p:nvPr>
-        </p:nvSpPr>
-        <p:spPr>
-          <a:xfrm>
-            <a:off x="685800" y="1143000"/>
-            <a:ext cx="5486400" cy="3086100"/>
-          </a:xfrm>
-          <a:prstGeom prst="rect">
-            <a:avLst/>
-          </a:prstGeom>
-          <a:noFill/>
-          <a:ln w="12700">
-            <a:solidFill>
-              <a:prstClr val="black"/>
-            </a:solidFill>
-          </a:ln>
-        </p:spPr>
-        <p:txBody>
-          <a:bodyPr vert="horz" lIns="91440" tIns="45720" rIns="91440" bIns="45720" rtlCol="0" anchor="ctr"/>
-          <a:lstStyle/>
-          <a:p>
-            <a:endParaRPr lang="en-US"/>
-          </a:p>
-        </p:txBody>
-      </p:sp>
-      <p:sp>
-        <p:nvSpPr>
-          <p:cNvPr id="5" name="Notes Placeholder 4"/>
-          <p:cNvSpPr>
-            <a:spLocks noGrp="1"/>
-          </p:cNvSpPr>
-          <p:nvPr>
-            <p:ph type="body" sz="quarter" idx="3"/>
-          </p:nvPr>
-        </p:nvSpPr>
-        <p:spPr>
-          <a:xfrm>
-            <a:off x="685800" y="4400550"/>
-            <a:ext cx="5486400" cy="3600450"/>
-          </a:xfrm>
-          <a:prstGeom prst="rect">
-            <a:avLst/>
-          </a:prstGeom>
-        </p:spPr>
-        <p:txBody>
-          <a:bodyPr vert="horz" lIns="91440" tIns="45720" rIns="91440" bIns="45720" rtlCol="0"/>
-          <a:lstStyle/>
-          <a:p>
-            <a:pPr lvl="0"/>
-            <a:r>
-              <a:rPr lang="en-US"/>
-              <a:t>Click to edit Master text styles</a:t>
-            </a:r>
-          </a:p>
-          <a:p>
-            <a:pPr lvl="1"/>
-            <a:r>
-              <a:rPr lang="en-US"/>
-              <a:t>Second level</a:t>
-            </a:r>
-          </a:p>
-          <a:p>
-            <a:pPr lvl="2"/>
-            <a:r>
-              <a:rPr lang="en-US"/>
-              <a:t>Third level</a:t>
-            </a:r>
-          </a:p>
-          <a:p>
-            <a:pPr lvl="3"/>
-            <a:r>
-              <a:rPr lang="en-US"/>
-              <a:t>Fourth level</a:t>
-            </a:r>
-          </a:p>
-          <a:p>
-            <a:pPr lvl="4"/>
-            <a:r>
-              <a:rPr lang="en-US"/>
-              <a:t>Fifth level</a:t>
-            </a:r>
-          </a:p>
-        </p:txBody>
-      </p:sp>
-      <p:sp>
-        <p:nvSpPr>
-          <p:cNvPr id="6" name="Footer Placeholder 5"/>
-          <p:cNvSpPr>
-            <a:spLocks noGrp="1"/>
-          </p:cNvSpPr>
-          <p:nvPr>
-            <p:ph type="ftr" sz="quarter" idx="4"/>
-          </p:nvPr>
-        </p:nvSpPr>
-        <p:spPr>
-          <a:xfrm>
-            <a:off x="0" y="8685213"/>
-            <a:ext cx="2971800" cy="458787"/>
-          </a:xfrm>
-          <a:prstGeom prst="rect">
-            <a:avLst/>
-          </a:prstGeom>
-        </p:spPr>
-        <p:txBody>
-          <a:bodyPr vert="horz" lIns="91440" tIns="45720" rIns="91440" bIns="45720" rtlCol="0" anchor="b"/>
-          <a:lstStyle>
-            <a:lvl1pPr algn="l">
-              <a:defRPr sz="1200"/>
-            </a:lvl1pPr>
-          </a:lstStyle>
-          <a:p>
-            <a:endParaRPr lang="en-US"/>
-          </a:p>
-        </p:txBody>
-      </p:sp>
-      <p:sp>
-        <p:nvSpPr>
-          <p:cNvPr id="7" name="Slide Number Placeholder 6"/>
-          <p:cNvSpPr>
-            <a:spLocks noGrp="1"/>
-          </p:cNvSpPr>
-          <p:nvPr>
-            <p:ph type="sldNum" sz="quarter" idx="5"/>
-          </p:nvPr>
-        </p:nvSpPr>
-        <p:spPr>
-          <a:xfrm>
-            <a:off x="3884613" y="8685213"/>
-            <a:ext cx="2971800" cy="458787"/>
-          </a:xfrm>
-          <a:prstGeom prst="rect">
-            <a:avLst/>
-          </a:prstGeom>
-        </p:spPr>
-        <p:txBody>
-          <a:bodyPr vert="horz" lIns="91440" tIns="45720" rIns="91440" bIns="45720" rtlCol="0" anchor="b"/>
-          <a:lstStyle>
-            <a:lvl1pPr algn="r">
-              <a:defRPr sz="1200"/>
-            </a:lvl1pPr>
-          </a:lstStyle>
-          <a:p>
-            <a:fld id="{CE5E9CC1-C706-0F49-92D6-E571CC5EEA8F}" type="slidenum">
-              <a:rPr lang="en-US"/>
-              <a:t>‹#›</a:t>
-            </a:fld>
-            <a:endParaRPr lang="en-US"/>
-          </a:p>
-        </p:txBody>
-      </p:sp>
     </p:spTree>
     <p:extLst>
       <p:ext uri="{BB962C8B-B14F-4D97-AF65-F5344CB8AC3E}">
-        <p14:creationId xmlns:p14="http://schemas.microsoft.com/office/powerpoint/2010/main" val="1024086991"/>
+        <p14:creationId xmlns:p14="http://schemas.microsoft.com/office/powerpoint/2010/main" val="2011650568"/>
       </p:ext>
     </p:extLst>
   </p:cSld>
@@ -527,10 +309,6 @@
           <a:bodyPr/>
           <a:lstStyle/>
           <a:p>
-            <a:r>
-              <a:rPr lang="en-US" dirty="0"/>
-              <a:t/>
-            </a:r>
             <a:endParaRPr lang="en-US" dirty="0"/>
           </a:p>
         </p:txBody>
@@ -615,10 +393,6 @@
           <a:bodyPr/>
           <a:lstStyle/>
           <a:p>
-            <a:r>
-              <a:rPr lang="en-US" dirty="0"/>
-              <a:t/>
-            </a:r>
             <a:endParaRPr lang="en-US" dirty="0"/>
           </a:p>
         </p:txBody>
@@ -703,10 +477,6 @@
           <a:bodyPr/>
           <a:lstStyle/>
           <a:p>
-            <a:r>
-              <a:rPr lang="en-US" dirty="0"/>
-              <a:t/>
-            </a:r>
             <a:endParaRPr lang="en-US" dirty="0"/>
           </a:p>
         </p:txBody>
@@ -791,10 +561,6 @@
           <a:bodyPr/>
           <a:lstStyle/>
           <a:p>
-            <a:r>
-              <a:rPr lang="en-US" dirty="0"/>
-              <a:t/>
-            </a:r>
             <a:endParaRPr lang="en-US" dirty="0"/>
           </a:p>
         </p:txBody>
@@ -879,10 +645,6 @@
           <a:bodyPr/>
           <a:lstStyle/>
           <a:p>
-            <a:r>
-              <a:rPr lang="en-US" dirty="0"/>
-              <a:t/>
-            </a:r>
             <a:endParaRPr lang="en-US" dirty="0"/>
           </a:p>
         </p:txBody>
@@ -967,10 +729,6 @@
           <a:bodyPr/>
           <a:lstStyle/>
           <a:p>
-            <a:r>
-              <a:rPr lang="en-US" dirty="0"/>
-              <a:t/>
-            </a:r>
             <a:endParaRPr lang="en-US" dirty="0"/>
           </a:p>
         </p:txBody>
@@ -1055,10 +813,6 @@
           <a:bodyPr/>
           <a:lstStyle/>
           <a:p>
-            <a:r>
-              <a:rPr lang="en-US" dirty="0"/>
-              <a:t/>
-            </a:r>
             <a:endParaRPr lang="en-US" dirty="0"/>
           </a:p>
         </p:txBody>
@@ -1143,10 +897,6 @@
           <a:bodyPr/>
           <a:lstStyle/>
           <a:p>
-            <a:r>
-              <a:rPr lang="en-US" dirty="0"/>
-              <a:t/>
-            </a:r>
             <a:endParaRPr lang="en-US" dirty="0"/>
           </a:p>
         </p:txBody>
@@ -1231,10 +981,6 @@
           <a:bodyPr/>
           <a:lstStyle/>
           <a:p>
-            <a:r>
-              <a:rPr lang="en-US" dirty="0"/>
-              <a:t/>
-            </a:r>
             <a:endParaRPr lang="en-US" dirty="0"/>
           </a:p>
         </p:txBody>
@@ -1319,10 +1065,6 @@
           <a:bodyPr/>
           <a:lstStyle/>
           <a:p>
-            <a:r>
-              <a:rPr lang="en-US" dirty="0"/>
-              <a:t/>
-            </a:r>
             <a:endParaRPr lang="en-US" dirty="0"/>
           </a:p>
         </p:txBody>
@@ -1368,7 +1110,13 @@
   <p:cSld>
     <p:spTree>
       <p:nvGrpSpPr>
-        <p:cNvPr id="1" name=""/>
+        <p:cNvPr id="1" name="">
+          <a:extLst>
+            <a:ext uri="{FF2B5EF4-FFF2-40B4-BE49-F238E27FC236}">
+              <a16:creationId xmlns:a16="http://schemas.microsoft.com/office/drawing/2014/main" id="{0E1BB1EE-90DE-9E2B-52DE-316F088A5CF7}"/>
+            </a:ext>
+          </a:extLst>
+        </p:cNvPr>
         <p:cNvGrpSpPr/>
         <p:nvPr/>
       </p:nvGrpSpPr>
@@ -1382,7 +1130,13 @@
       </p:grpSpPr>
       <p:sp>
         <p:nvSpPr>
-          <p:cNvPr id="2" name="Slide Image Placeholder 1"/>
+          <p:cNvPr id="2" name="Slide Image Placeholder 1">
+            <a:extLst>
+              <a:ext uri="{FF2B5EF4-FFF2-40B4-BE49-F238E27FC236}">
+                <a16:creationId xmlns:a16="http://schemas.microsoft.com/office/drawing/2014/main" id="{526C6597-A844-4934-7C82-3476B58EE1AB}"/>
+              </a:ext>
+            </a:extLst>
+          </p:cNvPr>
           <p:cNvSpPr>
             <a:spLocks noGrp="1" noRot="1" noChangeAspect="1"/>
           </p:cNvSpPr>
@@ -1394,7 +1148,13 @@
       </p:sp>
       <p:sp>
         <p:nvSpPr>
-          <p:cNvPr id="3" name="Notes Placeholder 2"/>
+          <p:cNvPr id="3" name="Notes Placeholder 2">
+            <a:extLst>
+              <a:ext uri="{FF2B5EF4-FFF2-40B4-BE49-F238E27FC236}">
+                <a16:creationId xmlns:a16="http://schemas.microsoft.com/office/drawing/2014/main" id="{BFC1D1CA-641A-1F80-28CE-74733AEEC3B7}"/>
+              </a:ext>
+            </a:extLst>
+          </p:cNvPr>
           <p:cNvSpPr>
             <a:spLocks noGrp="1"/>
           </p:cNvSpPr>
@@ -1407,17 +1167,19 @@
           <a:bodyPr/>
           <a:lstStyle/>
           <a:p>
-            <a:r>
-              <a:rPr lang="en-US" dirty="0"/>
-              <a:t/>
-            </a:r>
             <a:endParaRPr lang="en-US" dirty="0"/>
           </a:p>
         </p:txBody>
       </p:sp>
       <p:sp>
         <p:nvSpPr>
-          <p:cNvPr id="4" name="Slide Number Placeholder 3"/>
+          <p:cNvPr id="4" name="Slide Number Placeholder 3">
+            <a:extLst>
+              <a:ext uri="{FF2B5EF4-FFF2-40B4-BE49-F238E27FC236}">
+                <a16:creationId xmlns:a16="http://schemas.microsoft.com/office/drawing/2014/main" id="{65952258-B80E-D93C-426B-46841476ACBE}"/>
+              </a:ext>
+            </a:extLst>
+          </p:cNvPr>
           <p:cNvSpPr>
             <a:spLocks noGrp="1"/>
           </p:cNvSpPr>
@@ -1441,7 +1203,7 @@
     </p:spTree>
     <p:extLst>
       <p:ext uri="{BB962C8B-B14F-4D97-AF65-F5344CB8AC3E}">
-        <p14:creationId xmlns:p14="http://schemas.microsoft.com/office/powerpoint/2010/main" val="1024086991"/>
+        <p14:creationId xmlns:p14="http://schemas.microsoft.com/office/powerpoint/2010/main" val="880610229"/>
       </p:ext>
     </p:extLst>
   </p:cSld>
@@ -1495,10 +1257,6 @@
           <a:bodyPr/>
           <a:lstStyle/>
           <a:p>
-            <a:r>
-              <a:rPr lang="en-US" dirty="0"/>
-              <a:t/>
-            </a:r>
             <a:endParaRPr lang="en-US" dirty="0"/>
           </a:p>
         </p:txBody>
@@ -1583,10 +1341,6 @@
           <a:bodyPr/>
           <a:lstStyle/>
           <a:p>
-            <a:r>
-              <a:rPr lang="en-US" dirty="0"/>
-              <a:t/>
-            </a:r>
             <a:endParaRPr lang="en-US" dirty="0"/>
           </a:p>
         </p:txBody>
@@ -1671,10 +1425,6 @@
           <a:bodyPr/>
           <a:lstStyle/>
           <a:p>
-            <a:r>
-              <a:rPr lang="en-US" dirty="0"/>
-              <a:t/>
-            </a:r>
             <a:endParaRPr lang="en-US" dirty="0"/>
           </a:p>
         </p:txBody>
@@ -1759,10 +1509,6 @@
           <a:bodyPr/>
           <a:lstStyle/>
           <a:p>
-            <a:r>
-              <a:rPr lang="en-US" dirty="0"/>
-              <a:t/>
-            </a:r>
             <a:endParaRPr lang="en-US" dirty="0"/>
           </a:p>
         </p:txBody>
@@ -1847,10 +1593,6 @@
           <a:bodyPr/>
           <a:lstStyle/>
           <a:p>
-            <a:r>
-              <a:rPr lang="en-US" dirty="0"/>
-              <a:t/>
-            </a:r>
             <a:endParaRPr lang="en-US" dirty="0"/>
           </a:p>
         </p:txBody>
@@ -1935,10 +1677,6 @@
           <a:bodyPr/>
           <a:lstStyle/>
           <a:p>
-            <a:r>
-              <a:rPr lang="en-US" dirty="0"/>
-              <a:t/>
-            </a:r>
             <a:endParaRPr lang="en-US" dirty="0"/>
           </a:p>
         </p:txBody>
@@ -2023,10 +1761,6 @@
           <a:bodyPr/>
           <a:lstStyle/>
           <a:p>
-            <a:r>
-              <a:rPr lang="en-US" dirty="0"/>
-              <a:t/>
-            </a:r>
             <a:endParaRPr lang="en-US" dirty="0"/>
           </a:p>
         </p:txBody>
@@ -2111,10 +1845,6 @@
           <a:bodyPr/>
           <a:lstStyle/>
           <a:p>
-            <a:r>
-              <a:rPr lang="en-US" dirty="0"/>
-              <a:t/>
-            </a:r>
             <a:endParaRPr lang="en-US" dirty="0"/>
           </a:p>
         </p:txBody>
@@ -2199,10 +1929,6 @@
           <a:bodyPr/>
           <a:lstStyle/>
           <a:p>
-            <a:r>
-              <a:rPr lang="en-US" dirty="0"/>
-              <a:t/>
-            </a:r>
             <a:endParaRPr lang="en-US" dirty="0"/>
           </a:p>
         </p:txBody>
@@ -2287,10 +2013,6 @@
           <a:bodyPr/>
           <a:lstStyle/>
           <a:p>
-            <a:r>
-              <a:rPr lang="en-US" dirty="0"/>
-              <a:t/>
-            </a:r>
             <a:endParaRPr lang="en-US" dirty="0"/>
           </a:p>
         </p:txBody>
@@ -2313,6 +2035,90 @@
             <a:fld id="{F7021451-1387-4CA6-816F-3879F97B5CBC}" type="slidenum">
               <a:rPr lang="en-US"/>
               <a:t>28</a:t>
+            </a:fld>
+            <a:endParaRPr lang="en-US"/>
+          </a:p>
+        </p:txBody>
+      </p:sp>
+    </p:spTree>
+    <p:extLst>
+      <p:ext uri="{BB962C8B-B14F-4D97-AF65-F5344CB8AC3E}">
+        <p14:creationId xmlns:p14="http://schemas.microsoft.com/office/powerpoint/2010/main" val="1024086991"/>
+      </p:ext>
+    </p:extLst>
+  </p:cSld>
+  <p:clrMapOvr>
+    <a:masterClrMapping/>
+  </p:clrMapOvr>
+</p:notes>
+</file>
+
+<file path=ppt/notesSlides/notesSlide29.xml><?xml version="1.0" encoding="utf-8"?>
+<p:notes xmlns:a="http://schemas.openxmlformats.org/drawingml/2006/main" xmlns:r="http://schemas.openxmlformats.org/officeDocument/2006/relationships" xmlns:p="http://schemas.openxmlformats.org/presentationml/2006/main">
+  <p:cSld>
+    <p:spTree>
+      <p:nvGrpSpPr>
+        <p:cNvPr id="1" name=""/>
+        <p:cNvGrpSpPr/>
+        <p:nvPr/>
+      </p:nvGrpSpPr>
+      <p:grpSpPr>
+        <a:xfrm>
+          <a:off x="0" y="0"/>
+          <a:ext cx="0" cy="0"/>
+          <a:chOff x="0" y="0"/>
+          <a:chExt cx="0" cy="0"/>
+        </a:xfrm>
+      </p:grpSpPr>
+      <p:sp>
+        <p:nvSpPr>
+          <p:cNvPr id="2" name="Slide Image Placeholder 1"/>
+          <p:cNvSpPr>
+            <a:spLocks noGrp="1" noRot="1" noChangeAspect="1"/>
+          </p:cNvSpPr>
+          <p:nvPr>
+            <p:ph type="sldImg"/>
+          </p:nvPr>
+        </p:nvSpPr>
+        <p:spPr/>
+      </p:sp>
+      <p:sp>
+        <p:nvSpPr>
+          <p:cNvPr id="3" name="Notes Placeholder 2"/>
+          <p:cNvSpPr>
+            <a:spLocks noGrp="1"/>
+          </p:cNvSpPr>
+          <p:nvPr>
+            <p:ph type="body" idx="1"/>
+          </p:nvPr>
+        </p:nvSpPr>
+        <p:spPr/>
+        <p:txBody>
+          <a:bodyPr/>
+          <a:lstStyle/>
+          <a:p>
+            <a:endParaRPr lang="en-US" dirty="0"/>
+          </a:p>
+        </p:txBody>
+      </p:sp>
+      <p:sp>
+        <p:nvSpPr>
+          <p:cNvPr id="4" name="Slide Number Placeholder 3"/>
+          <p:cNvSpPr>
+            <a:spLocks noGrp="1"/>
+          </p:cNvSpPr>
+          <p:nvPr>
+            <p:ph type="sldNum" sz="quarter" idx="10"/>
+          </p:nvPr>
+        </p:nvSpPr>
+        <p:spPr/>
+        <p:txBody>
+          <a:bodyPr/>
+          <a:lstStyle/>
+          <a:p>
+            <a:fld id="{F7021451-1387-4CA6-816F-3879F97B5CBC}" type="slidenum">
+              <a:rPr lang="en-US"/>
+              <a:t>29</a:t>
             </a:fld>
             <a:endParaRPr lang="en-US"/>
           </a:p>
@@ -2375,10 +2181,6 @@
           <a:bodyPr/>
           <a:lstStyle/>
           <a:p>
-            <a:r>
-              <a:rPr lang="en-US" dirty="0"/>
-              <a:t/>
-            </a:r>
             <a:endParaRPr lang="en-US" dirty="0"/>
           </a:p>
         </p:txBody>
@@ -2463,10 +2265,6 @@
           <a:bodyPr/>
           <a:lstStyle/>
           <a:p>
-            <a:r>
-              <a:rPr lang="en-US" dirty="0"/>
-              <a:t/>
-            </a:r>
             <a:endParaRPr lang="en-US" dirty="0"/>
           </a:p>
         </p:txBody>
@@ -2551,10 +2349,6 @@
           <a:bodyPr/>
           <a:lstStyle/>
           <a:p>
-            <a:r>
-              <a:rPr lang="en-US" dirty="0"/>
-              <a:t/>
-            </a:r>
             <a:endParaRPr lang="en-US" dirty="0"/>
           </a:p>
         </p:txBody>
@@ -2639,10 +2433,6 @@
           <a:bodyPr/>
           <a:lstStyle/>
           <a:p>
-            <a:r>
-              <a:rPr lang="en-US" dirty="0"/>
-              <a:t/>
-            </a:r>
             <a:endParaRPr lang="en-US" dirty="0"/>
           </a:p>
         </p:txBody>
@@ -2727,10 +2517,6 @@
           <a:bodyPr/>
           <a:lstStyle/>
           <a:p>
-            <a:r>
-              <a:rPr lang="en-US" dirty="0"/>
-              <a:t/>
-            </a:r>
             <a:endParaRPr lang="en-US" dirty="0"/>
           </a:p>
         </p:txBody>
@@ -2815,10 +2601,6 @@
           <a:bodyPr/>
           <a:lstStyle/>
           <a:p>
-            <a:r>
-              <a:rPr lang="en-US" dirty="0"/>
-              <a:t/>
-            </a:r>
             <a:endParaRPr lang="en-US" dirty="0"/>
           </a:p>
         </p:txBody>
@@ -2903,10 +2685,6 @@
           <a:bodyPr/>
           <a:lstStyle/>
           <a:p>
-            <a:r>
-              <a:rPr lang="en-US" dirty="0"/>
-              <a:t/>
-            </a:r>
             <a:endParaRPr lang="en-US" dirty="0"/>
           </a:p>
         </p:txBody>
@@ -2980,6 +2758,11 @@
 <file path=ppt/slideMasters/slideMaster1.xml><?xml version="1.0" encoding="utf-8"?>
 <p:sldMaster xmlns:a="http://schemas.openxmlformats.org/drawingml/2006/main" xmlns:r="http://schemas.openxmlformats.org/officeDocument/2006/relationships" xmlns:p="http://schemas.openxmlformats.org/presentationml/2006/main">
   <p:cSld>
+    <p:bg>
+      <p:bgRef idx="1001">
+        <a:schemeClr val="bg1"/>
+      </p:bgRef>
+    </p:bg>
     <p:spTree>
       <p:nvGrpSpPr>
         <p:cNvPr id="1" name=""/>
@@ -3292,7 +3075,7 @@
           <a:bodyPr wrap="square" rtlCol="0" anchor="ctr"/>
           <a:lstStyle/>
           <a:p>
-            <a:pPr algn="ctr" indent="0" marL="0">
+            <a:pPr marL="0" indent="0" algn="ctr">
               <a:buNone/>
             </a:pPr>
             <a:r>
@@ -3328,7 +3111,7 @@
           <a:bodyPr wrap="square" rtlCol="0" anchor="ctr"/>
           <a:lstStyle/>
           <a:p>
-            <a:pPr algn="ctr" indent="0" marL="0">
+            <a:pPr marL="0" indent="0" algn="ctr">
               <a:buNone/>
             </a:pPr>
             <a:r>
@@ -3364,7 +3147,7 @@
           <a:bodyPr wrap="square" rtlCol="0" anchor="ctr"/>
           <a:lstStyle/>
           <a:p>
-            <a:pPr algn="ctr" indent="0" marL="0">
+            <a:pPr marL="0" indent="0" algn="ctr">
               <a:buNone/>
             </a:pPr>
             <a:r>
@@ -3425,7 +3208,7 @@
           <a:bodyPr wrap="square" rtlCol="0" anchor="ctr"/>
           <a:lstStyle/>
           <a:p>
-            <a:pPr indent="0" marL="0">
+            <a:pPr marL="0" indent="0">
               <a:buNone/>
             </a:pPr>
             <a:r>
@@ -3461,7 +3244,7 @@
           <a:bodyPr wrap="square" rtlCol="0" anchor="ctr"/>
           <a:lstStyle/>
           <a:p>
-            <a:pPr indent="0" marL="0">
+            <a:pPr marL="0" indent="0">
               <a:buNone/>
             </a:pPr>
             <a:r>
@@ -3497,7 +3280,7 @@
           <a:bodyPr wrap="square" rtlCol="0" anchor="t"/>
           <a:lstStyle/>
           <a:p>
-            <a:pPr indent="0" marL="0">
+            <a:pPr marL="0" indent="0">
               <a:buNone/>
             </a:pPr>
             <a:r>
@@ -3511,7 +3294,7 @@
             <a:endParaRPr lang="en-US" sz="1600" dirty="0"/>
           </a:p>
           <a:p>
-            <a:pPr indent="0" marL="0">
+            <a:pPr marL="0" indent="0">
               <a:buNone/>
             </a:pPr>
             <a:r>
@@ -3525,7 +3308,7 @@
             <a:endParaRPr lang="en-US" sz="1600" dirty="0"/>
           </a:p>
           <a:p>
-            <a:pPr indent="0" marL="0">
+            <a:pPr marL="0" indent="0">
               <a:buNone/>
             </a:pPr>
             <a:r>
@@ -3581,7 +3364,7 @@
         </p:nvSpPr>
         <p:spPr>
           <a:xfrm>
-            <a:off x="457200" y="1828800"/>
+            <a:off x="5301253" y="708660"/>
             <a:ext cx="8229600" cy="365760"/>
           </a:xfrm>
           <a:prstGeom prst="rect">
@@ -3594,7 +3377,7 @@
           <a:bodyPr wrap="square" rtlCol="0" anchor="ctr"/>
           <a:lstStyle/>
           <a:p>
-            <a:pPr indent="0" marL="0">
+            <a:pPr marL="0" indent="0">
               <a:buNone/>
             </a:pPr>
             <a:r>
@@ -3617,7 +3400,7 @@
         </p:nvSpPr>
         <p:spPr>
           <a:xfrm>
-            <a:off x="457200" y="2286000"/>
+            <a:off x="5686662" y="3429000"/>
             <a:ext cx="8229600" cy="3200400"/>
           </a:xfrm>
           <a:prstGeom prst="rect">
@@ -3630,7 +3413,7 @@
           <a:bodyPr wrap="square" rtlCol="0" anchor="t"/>
           <a:lstStyle/>
           <a:p>
-            <a:pPr indent="0" marL="0">
+            <a:pPr marL="0" indent="0">
               <a:buNone/>
             </a:pPr>
             <a:r>
@@ -3644,7 +3427,7 @@
             <a:endParaRPr lang="en-US" sz="1600" dirty="0"/>
           </a:p>
           <a:p>
-            <a:pPr indent="0" marL="0">
+            <a:pPr marL="0" indent="0">
               <a:buNone/>
             </a:pPr>
             <a:r>
@@ -3658,7 +3441,7 @@
             <a:endParaRPr lang="en-US" sz="1600" dirty="0"/>
           </a:p>
           <a:p>
-            <a:pPr indent="0" marL="0">
+            <a:pPr marL="0" indent="0">
               <a:buNone/>
             </a:pPr>
             <a:r>
@@ -3727,7 +3510,7 @@
           <a:bodyPr wrap="square" rtlCol="0" anchor="ctr"/>
           <a:lstStyle/>
           <a:p>
-            <a:pPr algn="r" indent="0" marL="0">
+            <a:pPr marL="0" indent="0" algn="r">
               <a:buNone/>
             </a:pPr>
             <a:r>
@@ -3788,7 +3571,7 @@
           <a:bodyPr wrap="square" rtlCol="0" anchor="ctr"/>
           <a:lstStyle/>
           <a:p>
-            <a:pPr indent="0" marL="0">
+            <a:pPr marL="0" indent="0">
               <a:buNone/>
             </a:pPr>
             <a:r>
@@ -3824,7 +3607,7 @@
           <a:bodyPr wrap="square" rtlCol="0" anchor="ctr"/>
           <a:lstStyle/>
           <a:p>
-            <a:pPr indent="0" marL="0">
+            <a:pPr marL="0" indent="0">
               <a:buNone/>
             </a:pPr>
             <a:r>
@@ -3860,7 +3643,7 @@
           <a:bodyPr wrap="square" rtlCol="0" anchor="t"/>
           <a:lstStyle/>
           <a:p>
-            <a:pPr indent="0" marL="0">
+            <a:pPr marL="0" indent="0">
               <a:buNone/>
             </a:pPr>
             <a:r>
@@ -3874,7 +3657,7 @@
             <a:endParaRPr lang="en-US" sz="1600" dirty="0"/>
           </a:p>
           <a:p>
-            <a:pPr indent="0" marL="0">
+            <a:pPr marL="0" indent="0">
               <a:buNone/>
             </a:pPr>
             <a:r>
@@ -3888,7 +3671,7 @@
             <a:endParaRPr lang="en-US" sz="1600" dirty="0"/>
           </a:p>
           <a:p>
-            <a:pPr indent="0" marL="0">
+            <a:pPr marL="0" indent="0">
               <a:buNone/>
             </a:pPr>
             <a:r>
@@ -3902,7 +3685,7 @@
             <a:endParaRPr lang="en-US" sz="1600" dirty="0"/>
           </a:p>
           <a:p>
-            <a:pPr indent="0" marL="0">
+            <a:pPr marL="0" indent="0">
               <a:buNone/>
             </a:pPr>
             <a:r>
@@ -3916,7 +3699,7 @@
             <a:endParaRPr lang="en-US" sz="1600" dirty="0"/>
           </a:p>
           <a:p>
-            <a:pPr indent="0" marL="0">
+            <a:pPr marL="0" indent="0">
               <a:buNone/>
             </a:pPr>
             <a:r>
@@ -3930,7 +3713,7 @@
             <a:endParaRPr lang="en-US" sz="1600" dirty="0"/>
           </a:p>
           <a:p>
-            <a:pPr indent="0" marL="0">
+            <a:pPr marL="0" indent="0">
               <a:buNone/>
             </a:pPr>
             <a:r>
@@ -3944,7 +3727,7 @@
             <a:endParaRPr lang="en-US" sz="1600" dirty="0"/>
           </a:p>
           <a:p>
-            <a:pPr indent="0" marL="0">
+            <a:pPr marL="0" indent="0">
               <a:buNone/>
             </a:pPr>
             <a:r>
@@ -3967,7 +3750,7 @@
         </p:nvSpPr>
         <p:spPr>
           <a:xfrm>
-            <a:off x="457200" y="1828800"/>
+            <a:off x="4885617" y="764795"/>
             <a:ext cx="8229600" cy="365760"/>
           </a:xfrm>
           <a:prstGeom prst="rect">
@@ -3980,7 +3763,7 @@
           <a:bodyPr wrap="square" rtlCol="0" anchor="ctr"/>
           <a:lstStyle/>
           <a:p>
-            <a:pPr indent="0" marL="0">
+            <a:pPr marL="0" indent="0">
               <a:buNone/>
             </a:pPr>
             <a:r>
@@ -4003,7 +3786,7 @@
         </p:nvSpPr>
         <p:spPr>
           <a:xfrm>
-            <a:off x="457200" y="2286000"/>
+            <a:off x="5512850" y="1438150"/>
             <a:ext cx="8229600" cy="3200400"/>
           </a:xfrm>
           <a:prstGeom prst="rect">
@@ -4016,7 +3799,7 @@
           <a:bodyPr wrap="square" rtlCol="0" anchor="t"/>
           <a:lstStyle/>
           <a:p>
-            <a:pPr indent="0" marL="0">
+            <a:pPr marL="0" indent="0">
               <a:buNone/>
             </a:pPr>
             <a:r>
@@ -4063,7 +3846,7 @@
             <a:endParaRPr lang="en-US" sz="1600" dirty="0"/>
           </a:p>
           <a:p>
-            <a:pPr indent="0" marL="0">
+            <a:pPr marL="0" indent="0">
               <a:buNone/>
             </a:pPr>
             <a:r>
@@ -4099,7 +3882,7 @@
           <a:bodyPr wrap="square" rtlCol="0" anchor="ctr"/>
           <a:lstStyle/>
           <a:p>
-            <a:pPr algn="r" indent="0" marL="0">
+            <a:pPr marL="0" indent="0" algn="r">
               <a:buNone/>
             </a:pPr>
             <a:r>
@@ -4160,7 +3943,7 @@
           <a:bodyPr wrap="square" rtlCol="0" anchor="ctr"/>
           <a:lstStyle/>
           <a:p>
-            <a:pPr indent="0" marL="0">
+            <a:pPr marL="0" indent="0">
               <a:buNone/>
             </a:pPr>
             <a:r>
@@ -4196,7 +3979,7 @@
           <a:bodyPr wrap="square" rtlCol="0" anchor="ctr"/>
           <a:lstStyle/>
           <a:p>
-            <a:pPr indent="0" marL="0">
+            <a:pPr marL="0" indent="0">
               <a:buNone/>
             </a:pPr>
             <a:r>
@@ -4219,7 +4002,7 @@
         </p:nvSpPr>
         <p:spPr>
           <a:xfrm>
-            <a:off x="457200" y="1828800"/>
+            <a:off x="4953630" y="1234440"/>
             <a:ext cx="8229600" cy="3200400"/>
           </a:xfrm>
           <a:prstGeom prst="rect">
@@ -4232,7 +4015,7 @@
           <a:bodyPr wrap="square" rtlCol="0" anchor="t"/>
           <a:lstStyle/>
           <a:p>
-            <a:pPr indent="0" marL="0">
+            <a:pPr marL="0" indent="0">
               <a:buNone/>
             </a:pPr>
             <a:r>
@@ -4312,7 +4095,7 @@
           <a:bodyPr wrap="square" rtlCol="0" anchor="ctr"/>
           <a:lstStyle/>
           <a:p>
-            <a:pPr indent="0" marL="0">
+            <a:pPr marL="0" indent="0">
               <a:buNone/>
             </a:pPr>
             <a:r>
@@ -4348,7 +4131,7 @@
           <a:bodyPr wrap="square" rtlCol="0" anchor="t"/>
           <a:lstStyle/>
           <a:p>
-            <a:pPr indent="0" marL="0">
+            <a:pPr marL="0" indent="0">
               <a:buNone/>
             </a:pPr>
             <a:r>
@@ -4406,7 +4189,7 @@
             <a:endParaRPr lang="en-US" sz="1600" dirty="0"/>
           </a:p>
           <a:p>
-            <a:pPr indent="0" marL="0">
+            <a:pPr marL="0" indent="0">
               <a:buNone/>
             </a:pPr>
             <a:r>
@@ -4486,7 +4269,7 @@
           <a:bodyPr wrap="square" rtlCol="0" anchor="ctr"/>
           <a:lstStyle/>
           <a:p>
-            <a:pPr algn="r" indent="0" marL="0">
+            <a:pPr marL="0" indent="0" algn="r">
               <a:buNone/>
             </a:pPr>
             <a:r>
@@ -4547,7 +4330,7 @@
           <a:bodyPr wrap="square" rtlCol="0" anchor="ctr"/>
           <a:lstStyle/>
           <a:p>
-            <a:pPr indent="0" marL="0">
+            <a:pPr marL="0" indent="0">
               <a:buNone/>
             </a:pPr>
             <a:r>
@@ -4583,7 +4366,7 @@
           <a:bodyPr wrap="square" rtlCol="0" anchor="ctr"/>
           <a:lstStyle/>
           <a:p>
-            <a:pPr indent="0" marL="0">
+            <a:pPr marL="0" indent="0">
               <a:buNone/>
             </a:pPr>
             <a:r>
@@ -4619,7 +4402,7 @@
           <a:bodyPr wrap="square" rtlCol="0" anchor="t"/>
           <a:lstStyle/>
           <a:p>
-            <a:pPr indent="0" marL="0">
+            <a:pPr marL="0" indent="0">
               <a:buNone/>
             </a:pPr>
             <a:r>
@@ -4633,7 +4416,7 @@
             <a:endParaRPr lang="en-US" sz="1600" dirty="0"/>
           </a:p>
           <a:p>
-            <a:pPr indent="0" marL="0">
+            <a:pPr marL="0" indent="0">
               <a:buNone/>
             </a:pPr>
             <a:r>
@@ -4647,7 +4430,7 @@
             <a:endParaRPr lang="en-US" sz="1600" dirty="0"/>
           </a:p>
           <a:p>
-            <a:pPr indent="0" marL="0">
+            <a:pPr marL="0" indent="0">
               <a:buNone/>
             </a:pPr>
             <a:r>
@@ -4661,7 +4444,7 @@
             <a:endParaRPr lang="en-US" sz="1600" dirty="0"/>
           </a:p>
           <a:p>
-            <a:pPr indent="0" marL="0">
+            <a:pPr marL="0" indent="0">
               <a:buNone/>
             </a:pPr>
             <a:r>
@@ -4675,7 +4458,7 @@
             <a:endParaRPr lang="en-US" sz="1600" dirty="0"/>
           </a:p>
           <a:p>
-            <a:pPr indent="0" marL="0">
+            <a:pPr marL="0" indent="0">
               <a:buNone/>
             </a:pPr>
             <a:r>
@@ -4689,7 +4472,7 @@
             <a:endParaRPr lang="en-US" sz="1600" dirty="0"/>
           </a:p>
           <a:p>
-            <a:pPr indent="0" marL="0">
+            <a:pPr marL="0" indent="0">
               <a:buNone/>
             </a:pPr>
             <a:r>
@@ -4703,7 +4486,7 @@
             <a:endParaRPr lang="en-US" sz="1600" dirty="0"/>
           </a:p>
           <a:p>
-            <a:pPr indent="0" marL="0">
+            <a:pPr marL="0" indent="0">
               <a:buNone/>
             </a:pPr>
             <a:r>
@@ -4726,7 +4509,7 @@
         </p:nvSpPr>
         <p:spPr>
           <a:xfrm>
-            <a:off x="457200" y="1828800"/>
+            <a:off x="5323924" y="1203834"/>
             <a:ext cx="8229600" cy="365760"/>
           </a:xfrm>
           <a:prstGeom prst="rect">
@@ -4739,7 +4522,7 @@
           <a:bodyPr wrap="square" rtlCol="0" anchor="ctr"/>
           <a:lstStyle/>
           <a:p>
-            <a:pPr indent="0" marL="0">
+            <a:pPr marL="0" indent="0">
               <a:buNone/>
             </a:pPr>
             <a:r>
@@ -4762,7 +4545,7 @@
         </p:nvSpPr>
         <p:spPr>
           <a:xfrm>
-            <a:off x="457200" y="2286000"/>
+            <a:off x="5573306" y="2761148"/>
             <a:ext cx="8229600" cy="3200400"/>
           </a:xfrm>
           <a:prstGeom prst="rect">
@@ -4775,7 +4558,7 @@
           <a:bodyPr wrap="square" rtlCol="0" anchor="t"/>
           <a:lstStyle/>
           <a:p>
-            <a:pPr indent="0" marL="0">
+            <a:pPr marL="0" indent="0">
               <a:buNone/>
             </a:pPr>
             <a:r>
@@ -4789,7 +4572,7 @@
             <a:endParaRPr lang="en-US" sz="1600" dirty="0"/>
           </a:p>
           <a:p>
-            <a:pPr indent="0" marL="0">
+            <a:pPr marL="0" indent="0">
               <a:buNone/>
             </a:pPr>
             <a:r>
@@ -4803,7 +4586,7 @@
             <a:endParaRPr lang="en-US" sz="1600" dirty="0"/>
           </a:p>
           <a:p>
-            <a:pPr indent="0" marL="0">
+            <a:pPr marL="0" indent="0">
               <a:buNone/>
             </a:pPr>
             <a:r>
@@ -4817,7 +4600,7 @@
             <a:endParaRPr lang="en-US" sz="1600" dirty="0"/>
           </a:p>
           <a:p>
-            <a:pPr indent="0" marL="0">
+            <a:pPr marL="0" indent="0">
               <a:buNone/>
             </a:pPr>
             <a:r>
@@ -4831,7 +4614,7 @@
             <a:endParaRPr lang="en-US" sz="1600" dirty="0"/>
           </a:p>
           <a:p>
-            <a:pPr indent="0" marL="0">
+            <a:pPr marL="0" indent="0">
               <a:buNone/>
             </a:pPr>
             <a:r>
@@ -4845,7 +4628,7 @@
             <a:endParaRPr lang="en-US" sz="1600" dirty="0"/>
           </a:p>
           <a:p>
-            <a:pPr indent="0" marL="0">
+            <a:pPr marL="0" indent="0">
               <a:buNone/>
             </a:pPr>
             <a:r>
@@ -4881,7 +4664,7 @@
           <a:bodyPr wrap="square" rtlCol="0" anchor="ctr"/>
           <a:lstStyle/>
           <a:p>
-            <a:pPr algn="r" indent="0" marL="0">
+            <a:pPr marL="0" indent="0" algn="r">
               <a:buNone/>
             </a:pPr>
             <a:r>
@@ -4942,7 +4725,7 @@
           <a:bodyPr wrap="square" rtlCol="0" anchor="ctr"/>
           <a:lstStyle/>
           <a:p>
-            <a:pPr indent="0" marL="0">
+            <a:pPr marL="0" indent="0">
               <a:buNone/>
             </a:pPr>
             <a:r>
@@ -4978,7 +4761,7 @@
           <a:bodyPr wrap="square" rtlCol="0" anchor="ctr"/>
           <a:lstStyle/>
           <a:p>
-            <a:pPr indent="0" marL="0">
+            <a:pPr marL="0" indent="0">
               <a:buNone/>
             </a:pPr>
             <a:r>
@@ -5001,7 +4784,7 @@
         </p:nvSpPr>
         <p:spPr>
           <a:xfrm>
-            <a:off x="457200" y="1828800"/>
+            <a:off x="5475065" y="914400"/>
             <a:ext cx="8229600" cy="3200400"/>
           </a:xfrm>
           <a:prstGeom prst="rect">
@@ -5014,7 +4797,7 @@
           <a:bodyPr wrap="square" rtlCol="0" anchor="t"/>
           <a:lstStyle/>
           <a:p>
-            <a:pPr indent="0" marL="0">
+            <a:pPr marL="0" indent="0">
               <a:buNone/>
             </a:pPr>
             <a:r>
@@ -5094,7 +4877,7 @@
           <a:bodyPr wrap="square" rtlCol="0" anchor="ctr"/>
           <a:lstStyle/>
           <a:p>
-            <a:pPr indent="0" marL="0">
+            <a:pPr marL="0" indent="0">
               <a:buNone/>
             </a:pPr>
             <a:r>
@@ -5130,7 +4913,7 @@
           <a:bodyPr wrap="square" rtlCol="0" anchor="t"/>
           <a:lstStyle/>
           <a:p>
-            <a:pPr indent="0" marL="0">
+            <a:pPr marL="0" indent="0">
               <a:buNone/>
             </a:pPr>
             <a:r>
@@ -5210,7 +4993,7 @@
           <a:bodyPr wrap="square" rtlCol="0" anchor="ctr"/>
           <a:lstStyle/>
           <a:p>
-            <a:pPr algn="r" indent="0" marL="0">
+            <a:pPr marL="0" indent="0" algn="r">
               <a:buNone/>
             </a:pPr>
             <a:r>
@@ -5271,7 +5054,7 @@
           <a:bodyPr wrap="square" rtlCol="0" anchor="ctr"/>
           <a:lstStyle/>
           <a:p>
-            <a:pPr indent="0" marL="0">
+            <a:pPr marL="0" indent="0">
               <a:buNone/>
             </a:pPr>
             <a:r>
@@ -5307,7 +5090,7 @@
           <a:bodyPr wrap="square" rtlCol="0" anchor="ctr"/>
           <a:lstStyle/>
           <a:p>
-            <a:pPr indent="0" marL="0">
+            <a:pPr marL="0" indent="0">
               <a:buNone/>
             </a:pPr>
             <a:r>
@@ -5343,7 +5126,7 @@
           <a:bodyPr wrap="square" rtlCol="0" anchor="t"/>
           <a:lstStyle/>
           <a:p>
-            <a:pPr indent="0" marL="0">
+            <a:pPr marL="0" indent="0">
               <a:buNone/>
             </a:pPr>
             <a:r>
@@ -5357,7 +5140,7 @@
             <a:endParaRPr lang="en-US" sz="1600" dirty="0"/>
           </a:p>
           <a:p>
-            <a:pPr indent="0" marL="0">
+            <a:pPr marL="0" indent="0">
               <a:buNone/>
             </a:pPr>
             <a:r>
@@ -5371,7 +5154,7 @@
             <a:endParaRPr lang="en-US" sz="1600" dirty="0"/>
           </a:p>
           <a:p>
-            <a:pPr indent="0" marL="0">
+            <a:pPr marL="0" indent="0">
               <a:buNone/>
             </a:pPr>
             <a:r>
@@ -5385,7 +5168,7 @@
             <a:endParaRPr lang="en-US" sz="1600" dirty="0"/>
           </a:p>
           <a:p>
-            <a:pPr indent="0" marL="0">
+            <a:pPr marL="0" indent="0">
               <a:buNone/>
             </a:pPr>
             <a:r>
@@ -5399,7 +5182,7 @@
             <a:endParaRPr lang="en-US" sz="1600" dirty="0"/>
           </a:p>
           <a:p>
-            <a:pPr indent="0" marL="0">
+            <a:pPr marL="0" indent="0">
               <a:buNone/>
             </a:pPr>
             <a:r>
@@ -5413,7 +5196,7 @@
             <a:endParaRPr lang="en-US" sz="1600" dirty="0"/>
           </a:p>
           <a:p>
-            <a:pPr indent="0" marL="0">
+            <a:pPr marL="0" indent="0">
               <a:buNone/>
             </a:pPr>
             <a:r>
@@ -5436,7 +5219,7 @@
         </p:nvSpPr>
         <p:spPr>
           <a:xfrm>
-            <a:off x="457200" y="1828800"/>
+            <a:off x="6449921" y="1280160"/>
             <a:ext cx="8229600" cy="365760"/>
           </a:xfrm>
           <a:prstGeom prst="rect">
@@ -5449,7 +5232,7 @@
           <a:bodyPr wrap="square" rtlCol="0" anchor="ctr"/>
           <a:lstStyle/>
           <a:p>
-            <a:pPr indent="0" marL="0">
+            <a:pPr marL="0" indent="0">
               <a:buNone/>
             </a:pPr>
             <a:r>
@@ -5472,7 +5255,7 @@
         </p:nvSpPr>
         <p:spPr>
           <a:xfrm>
-            <a:off x="457200" y="2286000"/>
+            <a:off x="5958714" y="3543300"/>
             <a:ext cx="8229600" cy="3200400"/>
           </a:xfrm>
           <a:prstGeom prst="rect">
@@ -5485,7 +5268,7 @@
           <a:bodyPr wrap="square" rtlCol="0" anchor="t"/>
           <a:lstStyle/>
           <a:p>
-            <a:pPr indent="0" marL="0">
+            <a:pPr marL="0" indent="0">
               <a:buNone/>
             </a:pPr>
             <a:r>
@@ -5543,7 +5326,7 @@
             <a:endParaRPr lang="en-US" sz="1600" dirty="0"/>
           </a:p>
           <a:p>
-            <a:pPr indent="0" marL="0">
+            <a:pPr marL="0" indent="0">
               <a:buNone/>
             </a:pPr>
             <a:r>
@@ -5579,7 +5362,7 @@
           <a:bodyPr wrap="square" rtlCol="0" anchor="ctr"/>
           <a:lstStyle/>
           <a:p>
-            <a:pPr algn="r" indent="0" marL="0">
+            <a:pPr marL="0" indent="0" algn="r">
               <a:buNone/>
             </a:pPr>
             <a:r>
@@ -5640,7 +5423,7 @@
           <a:bodyPr wrap="square" rtlCol="0" anchor="ctr"/>
           <a:lstStyle/>
           <a:p>
-            <a:pPr indent="0" marL="0">
+            <a:pPr marL="0" indent="0">
               <a:buNone/>
             </a:pPr>
             <a:r>
@@ -5676,7 +5459,7 @@
           <a:bodyPr wrap="square" rtlCol="0" anchor="ctr"/>
           <a:lstStyle/>
           <a:p>
-            <a:pPr indent="0" marL="0">
+            <a:pPr marL="0" indent="0">
               <a:buNone/>
             </a:pPr>
             <a:r>
@@ -5712,7 +5495,7 @@
           <a:bodyPr wrap="square" rtlCol="0" anchor="t"/>
           <a:lstStyle/>
           <a:p>
-            <a:pPr indent="0" marL="0">
+            <a:pPr marL="0" indent="0">
               <a:buNone/>
             </a:pPr>
             <a:r>
@@ -5726,7 +5509,7 @@
             <a:endParaRPr lang="en-US" sz="1600" dirty="0"/>
           </a:p>
           <a:p>
-            <a:pPr indent="0" marL="0">
+            <a:pPr marL="0" indent="0">
               <a:buNone/>
             </a:pPr>
             <a:r>
@@ -5740,7 +5523,7 @@
             <a:endParaRPr lang="en-US" sz="1600" dirty="0"/>
           </a:p>
           <a:p>
-            <a:pPr indent="0" marL="0">
+            <a:pPr marL="0" indent="0">
               <a:buNone/>
             </a:pPr>
             <a:r>
@@ -5754,7 +5537,7 @@
             <a:endParaRPr lang="en-US" sz="1600" dirty="0"/>
           </a:p>
           <a:p>
-            <a:pPr indent="0" marL="0">
+            <a:pPr marL="0" indent="0">
               <a:buNone/>
             </a:pPr>
             <a:r>
@@ -5768,7 +5551,7 @@
             <a:endParaRPr lang="en-US" sz="1600" dirty="0"/>
           </a:p>
           <a:p>
-            <a:pPr indent="0" marL="0">
+            <a:pPr marL="0" indent="0">
               <a:buNone/>
             </a:pPr>
             <a:r>
@@ -5848,7 +5631,7 @@
           <a:bodyPr wrap="square" rtlCol="0" anchor="ctr"/>
           <a:lstStyle/>
           <a:p>
-            <a:pPr indent="0" marL="0">
+            <a:pPr marL="0" indent="0">
               <a:buNone/>
             </a:pPr>
             <a:r>
@@ -5884,7 +5667,7 @@
           <a:bodyPr wrap="square" rtlCol="0" anchor="t"/>
           <a:lstStyle/>
           <a:p>
-            <a:pPr indent="0" marL="0">
+            <a:pPr marL="0" indent="0">
               <a:buNone/>
             </a:pPr>
             <a:r>
@@ -5920,7 +5703,7 @@
             <a:endParaRPr lang="en-US" sz="1600" dirty="0"/>
           </a:p>
           <a:p>
-            <a:pPr indent="0" marL="0">
+            <a:pPr marL="0" indent="0">
               <a:buNone/>
             </a:pPr>
             <a:r>
@@ -5989,7 +5772,7 @@
           <a:bodyPr wrap="square" rtlCol="0" anchor="ctr"/>
           <a:lstStyle/>
           <a:p>
-            <a:pPr algn="r" indent="0" marL="0">
+            <a:pPr marL="0" indent="0" algn="r">
               <a:buNone/>
             </a:pPr>
             <a:r>
@@ -6050,7 +5833,7 @@
           <a:bodyPr wrap="square" rtlCol="0" anchor="ctr"/>
           <a:lstStyle/>
           <a:p>
-            <a:pPr indent="0" marL="0">
+            <a:pPr marL="0" indent="0">
               <a:buNone/>
             </a:pPr>
             <a:r>
@@ -6086,7 +5869,7 @@
           <a:bodyPr wrap="square" rtlCol="0" anchor="ctr"/>
           <a:lstStyle/>
           <a:p>
-            <a:pPr indent="0" marL="0">
+            <a:pPr marL="0" indent="0">
               <a:buNone/>
             </a:pPr>
             <a:r>
@@ -6122,7 +5905,7 @@
           <a:bodyPr wrap="square" rtlCol="0" anchor="t"/>
           <a:lstStyle/>
           <a:p>
-            <a:pPr indent="0" marL="0">
+            <a:pPr marL="0" indent="0">
               <a:buNone/>
             </a:pPr>
             <a:r>
@@ -6136,7 +5919,7 @@
             <a:endParaRPr lang="en-US" sz="1600" dirty="0"/>
           </a:p>
           <a:p>
-            <a:pPr indent="0" marL="0">
+            <a:pPr marL="0" indent="0">
               <a:buNone/>
             </a:pPr>
             <a:r>
@@ -6150,7 +5933,7 @@
             <a:endParaRPr lang="en-US" sz="1600" dirty="0"/>
           </a:p>
           <a:p>
-            <a:pPr indent="0" marL="0">
+            <a:pPr marL="0" indent="0">
               <a:buNone/>
             </a:pPr>
             <a:r>
@@ -6164,7 +5947,7 @@
             <a:endParaRPr lang="en-US" sz="1600" dirty="0"/>
           </a:p>
           <a:p>
-            <a:pPr indent="0" marL="0">
+            <a:pPr marL="0" indent="0">
               <a:buNone/>
             </a:pPr>
             <a:r>
@@ -6178,7 +5961,7 @@
             <a:endParaRPr lang="en-US" sz="1600" dirty="0"/>
           </a:p>
           <a:p>
-            <a:pPr indent="0" marL="0">
+            <a:pPr marL="0" indent="0">
               <a:buNone/>
             </a:pPr>
             <a:r>
@@ -6192,7 +5975,7 @@
             <a:endParaRPr lang="en-US" sz="1600" dirty="0"/>
           </a:p>
           <a:p>
-            <a:pPr indent="0" marL="0">
+            <a:pPr marL="0" indent="0">
               <a:buNone/>
             </a:pPr>
             <a:r>
@@ -6206,7 +5989,7 @@
             <a:endParaRPr lang="en-US" sz="1600" dirty="0"/>
           </a:p>
           <a:p>
-            <a:pPr indent="0" marL="0">
+            <a:pPr marL="0" indent="0">
               <a:buNone/>
             </a:pPr>
             <a:r>
@@ -6229,7 +6012,7 @@
         </p:nvSpPr>
         <p:spPr>
           <a:xfrm>
-            <a:off x="457200" y="1828800"/>
+            <a:off x="5611091" y="1143000"/>
             <a:ext cx="8229600" cy="365760"/>
           </a:xfrm>
           <a:prstGeom prst="rect">
@@ -6242,7 +6025,7 @@
           <a:bodyPr wrap="square" rtlCol="0" anchor="ctr"/>
           <a:lstStyle/>
           <a:p>
-            <a:pPr indent="0" marL="0">
+            <a:pPr marL="0" indent="0">
               <a:buNone/>
             </a:pPr>
             <a:r>
@@ -6265,7 +6048,7 @@
         </p:nvSpPr>
         <p:spPr>
           <a:xfrm>
-            <a:off x="457200" y="2286000"/>
+            <a:off x="5860473" y="3429000"/>
             <a:ext cx="8229600" cy="3200400"/>
           </a:xfrm>
           <a:prstGeom prst="rect">
@@ -6278,7 +6061,7 @@
           <a:bodyPr wrap="square" rtlCol="0" anchor="t"/>
           <a:lstStyle/>
           <a:p>
-            <a:pPr indent="0" marL="0">
+            <a:pPr marL="0" indent="0">
               <a:buNone/>
             </a:pPr>
             <a:r>
@@ -6336,7 +6119,7 @@
             <a:endParaRPr lang="en-US" sz="1600" dirty="0"/>
           </a:p>
           <a:p>
-            <a:pPr indent="0" marL="0">
+            <a:pPr marL="0" indent="0">
               <a:buNone/>
             </a:pPr>
             <a:r>
@@ -6372,7 +6155,7 @@
           <a:bodyPr wrap="square" rtlCol="0" anchor="ctr"/>
           <a:lstStyle/>
           <a:p>
-            <a:pPr algn="r" indent="0" marL="0">
+            <a:pPr marL="0" indent="0" algn="r">
               <a:buNone/>
             </a:pPr>
             <a:r>
@@ -6433,7 +6216,7 @@
           <a:bodyPr wrap="square" rtlCol="0" anchor="ctr"/>
           <a:lstStyle/>
           <a:p>
-            <a:pPr indent="0" marL="0">
+            <a:pPr marL="0" indent="0">
               <a:buNone/>
             </a:pPr>
             <a:r>
@@ -6469,7 +6252,7 @@
           <a:bodyPr wrap="square" rtlCol="0" anchor="ctr"/>
           <a:lstStyle/>
           <a:p>
-            <a:pPr indent="0" marL="0">
+            <a:pPr marL="0" indent="0">
               <a:buNone/>
             </a:pPr>
             <a:r>
@@ -6492,7 +6275,7 @@
         </p:nvSpPr>
         <p:spPr>
           <a:xfrm>
-            <a:off x="457200" y="1828800"/>
+            <a:off x="5512850" y="2286000"/>
             <a:ext cx="8229600" cy="3200400"/>
           </a:xfrm>
           <a:prstGeom prst="rect">
@@ -6505,7 +6288,7 @@
           <a:bodyPr wrap="square" rtlCol="0" anchor="t"/>
           <a:lstStyle/>
           <a:p>
-            <a:pPr indent="0" marL="0">
+            <a:pPr marL="0" indent="0">
               <a:buNone/>
             </a:pPr>
             <a:r>
@@ -6519,7 +6302,7 @@
             <a:endParaRPr lang="en-US" sz="1600" dirty="0"/>
           </a:p>
           <a:p>
-            <a:pPr indent="0" marL="0">
+            <a:pPr marL="0" indent="0">
               <a:buNone/>
             </a:pPr>
             <a:r>
@@ -6533,7 +6316,7 @@
             <a:endParaRPr lang="en-US" sz="1600" dirty="0"/>
           </a:p>
           <a:p>
-            <a:pPr indent="0" marL="0">
+            <a:pPr marL="0" indent="0">
               <a:buNone/>
             </a:pPr>
             <a:r>
@@ -6556,7 +6339,7 @@
         </p:nvSpPr>
         <p:spPr>
           <a:xfrm>
-            <a:off x="457200" y="1828800"/>
+            <a:off x="5429722" y="1320165"/>
             <a:ext cx="8229600" cy="365760"/>
           </a:xfrm>
           <a:prstGeom prst="rect">
@@ -6569,7 +6352,7 @@
           <a:bodyPr wrap="square" rtlCol="0" anchor="ctr"/>
           <a:lstStyle/>
           <a:p>
-            <a:pPr indent="0" marL="0">
+            <a:pPr marL="0" indent="0">
               <a:buNone/>
             </a:pPr>
             <a:r>
@@ -6605,7 +6388,7 @@
           <a:bodyPr wrap="square" rtlCol="0" anchor="t"/>
           <a:lstStyle/>
           <a:p>
-            <a:pPr indent="0" marL="0">
+            <a:pPr marL="0" indent="0">
               <a:buNone/>
             </a:pPr>
             <a:r>
@@ -6619,7 +6402,7 @@
             <a:endParaRPr lang="en-US" sz="1600" dirty="0"/>
           </a:p>
           <a:p>
-            <a:pPr indent="0" marL="0">
+            <a:pPr marL="0" indent="0">
               <a:buNone/>
             </a:pPr>
             <a:r>
@@ -6633,7 +6416,7 @@
             <a:endParaRPr lang="en-US" sz="1600" dirty="0"/>
           </a:p>
           <a:p>
-            <a:pPr indent="0" marL="0">
+            <a:pPr marL="0" indent="0">
               <a:buNone/>
             </a:pPr>
             <a:r>
@@ -6656,7 +6439,7 @@
         </p:nvSpPr>
         <p:spPr>
           <a:xfrm>
-            <a:off x="457200" y="2286000"/>
+            <a:off x="4908287" y="4191031"/>
             <a:ext cx="8229600" cy="365760"/>
           </a:xfrm>
           <a:prstGeom prst="rect">
@@ -6669,7 +6452,7 @@
           <a:bodyPr wrap="square" rtlCol="0" anchor="ctr"/>
           <a:lstStyle/>
           <a:p>
-            <a:pPr indent="0" marL="0">
+            <a:pPr marL="0" indent="0">
               <a:buNone/>
             </a:pPr>
             <a:r>
@@ -6692,7 +6475,7 @@
         </p:nvSpPr>
         <p:spPr>
           <a:xfrm>
-            <a:off x="457200" y="2743200"/>
+            <a:off x="188924" y="3786069"/>
             <a:ext cx="8229600" cy="3200400"/>
           </a:xfrm>
           <a:prstGeom prst="rect">
@@ -6705,7 +6488,7 @@
           <a:bodyPr wrap="square" rtlCol="0" anchor="t"/>
           <a:lstStyle/>
           <a:p>
-            <a:pPr indent="0" marL="0">
+            <a:pPr marL="0" indent="0">
               <a:buNone/>
             </a:pPr>
             <a:r>
@@ -6719,7 +6502,7 @@
             <a:endParaRPr lang="en-US" sz="1600" dirty="0"/>
           </a:p>
           <a:p>
-            <a:pPr indent="0" marL="0">
+            <a:pPr marL="0" indent="0">
               <a:buNone/>
             </a:pPr>
             <a:r>
@@ -6733,7 +6516,7 @@
             <a:endParaRPr lang="en-US" sz="1600" dirty="0"/>
           </a:p>
           <a:p>
-            <a:pPr indent="0" marL="0">
+            <a:pPr marL="0" indent="0">
               <a:buNone/>
             </a:pPr>
             <a:r>
@@ -6769,7 +6552,7 @@
           <a:bodyPr wrap="square" rtlCol="0" anchor="ctr"/>
           <a:lstStyle/>
           <a:p>
-            <a:pPr algn="r" indent="0" marL="0">
+            <a:pPr marL="0" indent="0" algn="r">
               <a:buNone/>
             </a:pPr>
             <a:r>
@@ -6794,10 +6577,16 @@
 
 <file path=ppt/slides/slide19.xml><?xml version="1.0" encoding="utf-8"?>
 <p:sld xmlns:a="http://schemas.openxmlformats.org/drawingml/2006/main" xmlns:r="http://schemas.openxmlformats.org/officeDocument/2006/relationships" xmlns:p="http://schemas.openxmlformats.org/presentationml/2006/main">
-  <p:cSld name="Slide 19">
+  <p:cSld>
     <p:spTree>
       <p:nvGrpSpPr>
-        <p:cNvPr id="1" name=""/>
+        <p:cNvPr id="1" name="">
+          <a:extLst>
+            <a:ext uri="{FF2B5EF4-FFF2-40B4-BE49-F238E27FC236}">
+              <a16:creationId xmlns:a16="http://schemas.microsoft.com/office/drawing/2014/main" id="{E331FFBC-9CD9-3039-59CE-9870E47BA43F}"/>
+            </a:ext>
+          </a:extLst>
+        </p:cNvPr>
         <p:cNvGrpSpPr/>
         <p:nvPr/>
       </p:nvGrpSpPr>
@@ -6811,7 +6600,13 @@
       </p:grpSpPr>
       <p:sp>
         <p:nvSpPr>
-          <p:cNvPr id="2" name="Text 0"/>
+          <p:cNvPr id="2" name="Text 0">
+            <a:extLst>
+              <a:ext uri="{FF2B5EF4-FFF2-40B4-BE49-F238E27FC236}">
+                <a16:creationId xmlns:a16="http://schemas.microsoft.com/office/drawing/2014/main" id="{9032F3F7-A2D9-144B-8105-0473CBA18C07}"/>
+              </a:ext>
+            </a:extLst>
+          </p:cNvPr>
           <p:cNvSpPr/>
           <p:nvPr/>
         </p:nvSpPr>
@@ -6830,7 +6625,7 @@
           <a:bodyPr wrap="square" rtlCol="0" anchor="ctr"/>
           <a:lstStyle/>
           <a:p>
-            <a:pPr indent="0" marL="0">
+            <a:pPr marL="0" indent="0">
               <a:buNone/>
             </a:pPr>
             <a:r>
@@ -6839,7 +6634,7 @@
                   <a:srgbClr val="363636"/>
                 </a:solidFill>
               </a:rPr>
-              <a:t>Advanced Protection</a:t>
+              <a:t>AI Deepfakes - The New Threat</a:t>
             </a:r>
             <a:endParaRPr lang="en-US" sz="2800" dirty="0"/>
           </a:p>
@@ -6847,7 +6642,13 @@
       </p:sp>
       <p:sp>
         <p:nvSpPr>
-          <p:cNvPr id="3" name="Text 1"/>
+          <p:cNvPr id="3" name="Text 1">
+            <a:extLst>
+              <a:ext uri="{FF2B5EF4-FFF2-40B4-BE49-F238E27FC236}">
+                <a16:creationId xmlns:a16="http://schemas.microsoft.com/office/drawing/2014/main" id="{7AB99C93-4709-6846-AC8B-3AAE914A62F6}"/>
+              </a:ext>
+            </a:extLst>
+          </p:cNvPr>
           <p:cNvSpPr/>
           <p:nvPr/>
         </p:nvSpPr>
@@ -6866,7 +6667,7 @@
           <a:bodyPr wrap="square" rtlCol="0" anchor="ctr"/>
           <a:lstStyle/>
           <a:p>
-            <a:pPr indent="0" marL="0">
+            <a:pPr marL="0" indent="0">
               <a:buNone/>
             </a:pPr>
             <a:r>
@@ -6875,7 +6676,7 @@
                   <a:srgbClr val="444444"/>
                 </a:solidFill>
               </a:rPr>
-              <a:t>Separate Bank Accounts</a:t>
+              <a:t>What Are Deepfakes?</a:t>
             </a:r>
             <a:endParaRPr lang="en-US" sz="2000" dirty="0"/>
           </a:p>
@@ -6883,7 +6684,13 @@
       </p:sp>
       <p:sp>
         <p:nvSpPr>
-          <p:cNvPr id="4" name="Text 2"/>
+          <p:cNvPr id="4" name="Text 2">
+            <a:extLst>
+              <a:ext uri="{FF2B5EF4-FFF2-40B4-BE49-F238E27FC236}">
+                <a16:creationId xmlns:a16="http://schemas.microsoft.com/office/drawing/2014/main" id="{468AF69D-840A-8ECE-0FF9-D221518BFFCA}"/>
+              </a:ext>
+            </a:extLst>
+          </p:cNvPr>
           <p:cNvSpPr/>
           <p:nvPr/>
         </p:nvSpPr>
@@ -6902,58 +6709,50 @@
           <a:bodyPr wrap="square" rtlCol="0" anchor="t"/>
           <a:lstStyle/>
           <a:p>
-            <a:pPr indent="0" marL="0">
-              <a:buNone/>
-            </a:pPr>
-            <a:r>
-              <a:rPr lang="en-US" sz="1600" dirty="0">
-                <a:solidFill>
-                  <a:srgbClr val="555555"/>
-                </a:solidFill>
-              </a:rPr>
-              <a:t>Strategy:</a:t>
-            </a:r>
-            <a:endParaRPr lang="en-US" sz="1600" dirty="0"/>
-          </a:p>
-          <a:p>
-            <a:pPr indent="0" marL="0">
-              <a:buNone/>
-            </a:pPr>
-            <a:r>
-              <a:rPr lang="en-US" sz="1600" dirty="0">
-                <a:solidFill>
-                  <a:srgbClr val="555555"/>
-                </a:solidFill>
-              </a:rPr>
-              <a:t>Main (₹5L) - minimal activity | Secondary (₹20K) - UPI/shopping</a:t>
-            </a:r>
-            <a:endParaRPr lang="en-US" sz="1600" dirty="0"/>
-          </a:p>
-          <a:p>
-            <a:pPr indent="0" marL="0">
-              <a:buNone/>
-            </a:pPr>
-            <a:r>
-              <a:rPr lang="en-US" sz="1600" dirty="0">
-                <a:solidFill>
-                  <a:srgbClr val="555555"/>
-                </a:solidFill>
-              </a:rPr>
-              <a:t>Benefit: If compromised, only ₹20K at risk</a:t>
-            </a:r>
-            <a:endParaRPr lang="en-US" sz="1600" dirty="0"/>
-          </a:p>
-        </p:txBody>
-      </p:sp>
-      <p:sp>
-        <p:nvSpPr>
-          <p:cNvPr id="5" name="Text 3"/>
-          <p:cNvSpPr/>
-          <p:nvPr/>
-        </p:nvSpPr>
-        <p:spPr>
-          <a:xfrm>
-            <a:off x="457200" y="1828800"/>
+            <a:pPr marL="0" indent="0">
+              <a:buNone/>
+            </a:pPr>
+            <a:r>
+              <a:rPr lang="en-US" sz="1600" dirty="0">
+                <a:solidFill>
+                  <a:srgbClr val="555555"/>
+                </a:solidFill>
+              </a:rPr>
+              <a:t>AI-generated fake video/audio that looks/sounds 100% real</a:t>
+            </a:r>
+            <a:endParaRPr lang="en-US" sz="1600" dirty="0"/>
+          </a:p>
+          <a:p>
+            <a:pPr marL="0" indent="0">
+              <a:buNone/>
+            </a:pPr>
+            <a:r>
+              <a:rPr lang="en-US" sz="1600" dirty="0">
+                <a:solidFill>
+                  <a:srgbClr val="555555"/>
+                </a:solidFill>
+              </a:rPr>
+              <a:t>Only 30 seconds of voice needed to clone perfectly</a:t>
+            </a:r>
+            <a:endParaRPr lang="en-US" sz="1600" dirty="0"/>
+          </a:p>
+        </p:txBody>
+      </p:sp>
+      <p:sp>
+        <p:nvSpPr>
+          <p:cNvPr id="5" name="Text 3">
+            <a:extLst>
+              <a:ext uri="{FF2B5EF4-FFF2-40B4-BE49-F238E27FC236}">
+                <a16:creationId xmlns:a16="http://schemas.microsoft.com/office/drawing/2014/main" id="{14B3D89E-30DD-4A60-6212-8D2A0EF5A4EA}"/>
+              </a:ext>
+            </a:extLst>
+          </p:cNvPr>
+          <p:cNvSpPr/>
+          <p:nvPr/>
+        </p:nvSpPr>
+        <p:spPr>
+          <a:xfrm>
+            <a:off x="6631289" y="1074420"/>
             <a:ext cx="8229600" cy="365760"/>
           </a:xfrm>
           <a:prstGeom prst="rect">
@@ -6966,7 +6765,7 @@
           <a:bodyPr wrap="square" rtlCol="0" anchor="ctr"/>
           <a:lstStyle/>
           <a:p>
-            <a:pPr indent="0" marL="0">
+            <a:pPr marL="0" indent="0">
               <a:buNone/>
             </a:pPr>
             <a:r>
@@ -6975,7 +6774,7 @@
                   <a:srgbClr val="444444"/>
                 </a:solidFill>
               </a:rPr>
-              <a:t>Set Transaction Limits</a:t>
+              <a:t>Real Indian Cases (2024)</a:t>
             </a:r>
             <a:endParaRPr lang="en-US" sz="2000" dirty="0"/>
           </a:p>
@@ -6983,7 +6782,13 @@
       </p:sp>
       <p:sp>
         <p:nvSpPr>
-          <p:cNvPr id="6" name="Text 4"/>
+          <p:cNvPr id="6" name="Text 4">
+            <a:extLst>
+              <a:ext uri="{FF2B5EF4-FFF2-40B4-BE49-F238E27FC236}">
+                <a16:creationId xmlns:a16="http://schemas.microsoft.com/office/drawing/2014/main" id="{A6FC7EB0-1FEA-4781-BF6C-328A1BB8ADD1}"/>
+              </a:ext>
+            </a:extLst>
+          </p:cNvPr>
           <p:cNvSpPr/>
           <p:nvPr/>
         </p:nvSpPr>
@@ -7002,271 +6807,114 @@
           <a:bodyPr wrap="square" rtlCol="0" anchor="t"/>
           <a:lstStyle/>
           <a:p>
-            <a:pPr indent="0" marL="0">
-              <a:buNone/>
-            </a:pPr>
-            <a:r>
-              <a:rPr lang="en-US" sz="1600" dirty="0">
-                <a:solidFill>
-                  <a:srgbClr val="555555"/>
-                </a:solidFill>
-              </a:rPr>
-              <a:t>Settings:</a:t>
-            </a:r>
-            <a:endParaRPr lang="en-US" sz="1600" dirty="0"/>
-          </a:p>
-          <a:p>
-            <a:pPr indent="0" marL="0">
-              <a:buNone/>
-            </a:pPr>
-            <a:r>
-              <a:rPr lang="en-US" sz="1600" dirty="0">
-                <a:solidFill>
-                  <a:srgbClr val="555555"/>
-                </a:solidFill>
-              </a:rPr>
-              <a:t>UPI limit: ₹5-10K (not ₹1L) | Card: ₹10-20K</a:t>
-            </a:r>
-            <a:endParaRPr lang="en-US" sz="1600" dirty="0"/>
-          </a:p>
-          <a:p>
-            <a:pPr indent="0" marL="0">
-              <a:buNone/>
-            </a:pPr>
-            <a:r>
-              <a:rPr lang="en-US" sz="1600" dirty="0">
-                <a:solidFill>
-                  <a:srgbClr val="555555"/>
-                </a:solidFill>
-              </a:rPr>
-              <a:t>How: Banking app → Settings → Limits</a:t>
-            </a:r>
-            <a:endParaRPr lang="en-US" sz="1600" dirty="0"/>
-          </a:p>
-        </p:txBody>
-      </p:sp>
-      <p:sp>
-        <p:nvSpPr>
-          <p:cNvPr id="7" name="Text 5"/>
-          <p:cNvSpPr/>
-          <p:nvPr/>
-        </p:nvSpPr>
-        <p:spPr>
-          <a:xfrm>
-            <a:off x="457200" y="2286000"/>
-            <a:ext cx="8229600" cy="365760"/>
-          </a:xfrm>
-          <a:prstGeom prst="rect">
-            <a:avLst/>
-          </a:prstGeom>
-          <a:noFill/>
-          <a:ln/>
-        </p:spPr>
-        <p:txBody>
-          <a:bodyPr wrap="square" rtlCol="0" anchor="ctr"/>
-          <a:lstStyle/>
-          <a:p>
-            <a:pPr indent="0" marL="0">
-              <a:buNone/>
-            </a:pPr>
-            <a:r>
-              <a:rPr lang="en-US" sz="2000" b="1" dirty="0">
-                <a:solidFill>
-                  <a:srgbClr val="444444"/>
-                </a:solidFill>
-              </a:rPr>
-              <a:t>Family Secret Phrase</a:t>
-            </a:r>
-            <a:endParaRPr lang="en-US" sz="2000" dirty="0"/>
-          </a:p>
-        </p:txBody>
-      </p:sp>
-      <p:sp>
-        <p:nvSpPr>
-          <p:cNvPr id="8" name="Text 6"/>
-          <p:cNvSpPr/>
-          <p:nvPr/>
-        </p:nvSpPr>
-        <p:spPr>
-          <a:xfrm>
-            <a:off x="457200" y="2743200"/>
-            <a:ext cx="8229600" cy="3200400"/>
-          </a:xfrm>
-          <a:prstGeom prst="rect">
-            <a:avLst/>
-          </a:prstGeom>
-          <a:noFill/>
-          <a:ln/>
-        </p:spPr>
-        <p:txBody>
-          <a:bodyPr wrap="square" rtlCol="0" anchor="t"/>
-          <a:lstStyle/>
-          <a:p>
-            <a:pPr indent="0" marL="0">
-              <a:buNone/>
-            </a:pPr>
-            <a:r>
-              <a:rPr lang="en-US" sz="1600" dirty="0">
-                <a:solidFill>
-                  <a:srgbClr val="555555"/>
-                </a:solidFill>
-              </a:rPr>
-              <a:t>Setup:</a:t>
-            </a:r>
-            <a:endParaRPr lang="en-US" sz="1600" dirty="0"/>
-          </a:p>
-          <a:p>
-            <a:pPr indent="0" marL="0">
-              <a:buNone/>
-            </a:pPr>
-            <a:r>
-              <a:rPr lang="en-US" sz="1600" dirty="0">
-                <a:solidFill>
-                  <a:srgbClr val="555555"/>
-                </a:solidFill>
-              </a:rPr>
-              <a:t>Agree on codeword (e.g., "Rainbow42")</a:t>
-            </a:r>
-            <a:endParaRPr lang="en-US" sz="1600" dirty="0"/>
-          </a:p>
-          <a:p>
-            <a:pPr indent="0" marL="0">
-              <a:buNone/>
-            </a:pPr>
-            <a:r>
-              <a:rPr lang="en-US" sz="1600" dirty="0">
-                <a:solidFill>
-                  <a:srgbClr val="555555"/>
-                </a:solidFill>
-              </a:rPr>
-              <a:t>Rule: Any money request MUST include codeword</a:t>
-            </a:r>
-            <a:endParaRPr lang="en-US" sz="1600" dirty="0"/>
-          </a:p>
-          <a:p>
-            <a:pPr indent="0" marL="0">
-              <a:buNone/>
-            </a:pPr>
-            <a:r>
-              <a:rPr lang="en-US" sz="1600" dirty="0">
-                <a:solidFill>
-                  <a:srgbClr val="555555"/>
-                </a:solidFill>
-              </a:rPr>
-              <a:t>Defeats: Hacked WhatsApp, SMS spoofing, AI voice cloning</a:t>
-            </a:r>
-            <a:endParaRPr lang="en-US" sz="1600" dirty="0"/>
-          </a:p>
-        </p:txBody>
-      </p:sp>
-      <p:sp>
-        <p:nvSpPr>
-          <p:cNvPr id="9" name="Text 7"/>
-          <p:cNvSpPr/>
-          <p:nvPr/>
-        </p:nvSpPr>
-        <p:spPr>
-          <a:xfrm>
-            <a:off x="457200" y="2743200"/>
-            <a:ext cx="8229600" cy="365760"/>
-          </a:xfrm>
-          <a:prstGeom prst="rect">
-            <a:avLst/>
-          </a:prstGeom>
-          <a:noFill/>
-          <a:ln/>
-        </p:spPr>
-        <p:txBody>
-          <a:bodyPr wrap="square" rtlCol="0" anchor="ctr"/>
-          <a:lstStyle/>
-          <a:p>
-            <a:pPr indent="0" marL="0">
-              <a:buNone/>
-            </a:pPr>
-            <a:r>
-              <a:rPr lang="en-US" sz="2000" b="1" dirty="0">
-                <a:solidFill>
-                  <a:srgbClr val="444444"/>
-                </a:solidFill>
-              </a:rPr>
-              <a:t>Monthly Checks</a:t>
-            </a:r>
-            <a:endParaRPr lang="en-US" sz="2000" dirty="0"/>
-          </a:p>
-        </p:txBody>
-      </p:sp>
-      <p:sp>
-        <p:nvSpPr>
-          <p:cNvPr id="10" name="Text 8"/>
-          <p:cNvSpPr/>
-          <p:nvPr/>
-        </p:nvSpPr>
-        <p:spPr>
-          <a:xfrm>
-            <a:off x="457200" y="3200400"/>
-            <a:ext cx="8229600" cy="3200400"/>
-          </a:xfrm>
-          <a:prstGeom prst="rect">
-            <a:avLst/>
-          </a:prstGeom>
-          <a:noFill/>
-          <a:ln/>
-        </p:spPr>
-        <p:txBody>
-          <a:bodyPr wrap="square" rtlCol="0" anchor="t"/>
-          <a:lstStyle/>
-          <a:p>
-            <a:pPr indent="0" marL="0">
-              <a:buNone/>
-            </a:pPr>
-            <a:r>
-              <a:rPr lang="en-US" sz="1600" dirty="0">
-                <a:solidFill>
-                  <a:srgbClr val="555555"/>
-                </a:solidFill>
-              </a:rPr>
-              <a:t>Regular Tasks:</a:t>
-            </a:r>
-            <a:endParaRPr lang="en-US" sz="1600" dirty="0"/>
-          </a:p>
-          <a:p>
-            <a:r>
-              <a:rPr lang="en-US" sz="1600" dirty="0">
-                <a:solidFill>
-                  <a:srgbClr val="555555"/>
-                </a:solidFill>
-              </a:rPr>
-              <a:t>[ ] Review bank statements</a:t>
-            </a:r>
-            <a:endParaRPr lang="en-US" sz="1600" dirty="0"/>
-          </a:p>
-          <a:p>
-            <a:r>
-              <a:rPr lang="en-US" sz="1600" dirty="0">
-                <a:solidFill>
-                  <a:srgbClr val="555555"/>
-                </a:solidFill>
-              </a:rPr>
-              <a:t>[ ] Enable transaction alerts</a:t>
-            </a:r>
-            <a:endParaRPr lang="en-US" sz="1600" dirty="0"/>
-          </a:p>
-          <a:p>
-            <a:r>
-              <a:rPr lang="en-US" sz="1600" dirty="0">
-                <a:solidFill>
-                  <a:srgbClr val="555555"/>
-                </a:solidFill>
-              </a:rPr>
-              <a:t>[ ] Check credit report</a:t>
-            </a:r>
-            <a:endParaRPr lang="en-US" sz="1600" dirty="0"/>
-          </a:p>
-        </p:txBody>
-      </p:sp>
-      <p:sp>
-        <p:nvSpPr>
-          <p:cNvPr id="11" name="Text 9"/>
+            <a:pPr marL="0" indent="0">
+              <a:buNone/>
+            </a:pPr>
+            <a:r>
+              <a:rPr lang="en-US" sz="1600" dirty="0">
+                <a:solidFill>
+                  <a:srgbClr val="555555"/>
+                </a:solidFill>
+              </a:rPr>
+              <a:t>Mumbai Mother (₹80K):</a:t>
+            </a:r>
+            <a:endParaRPr lang="en-US" sz="1600" dirty="0"/>
+          </a:p>
+          <a:p>
+            <a:pPr marL="0" indent="0">
+              <a:buNone/>
+            </a:pPr>
+            <a:r>
+              <a:rPr lang="en-US" sz="1600" dirty="0">
+                <a:solidFill>
+                  <a:srgbClr val="555555"/>
+                </a:solidFill>
+              </a:rPr>
+              <a:t>Call from "son" - voice EXACTLY matched. "Arrested in Dubai, need bail." Son was safe at home.</a:t>
+            </a:r>
+            <a:endParaRPr lang="en-US" sz="1600" dirty="0"/>
+          </a:p>
+          <a:p>
+            <a:pPr marL="0" indent="0">
+              <a:buNone/>
+            </a:pPr>
+            <a:r>
+              <a:rPr lang="en-US" sz="1600" dirty="0">
+                <a:solidFill>
+                  <a:srgbClr val="555555"/>
+                </a:solidFill>
+              </a:rPr>
+              <a:t>Delhi Officer (₹74K):</a:t>
+            </a:r>
+            <a:endParaRPr lang="en-US" sz="1600" dirty="0"/>
+          </a:p>
+          <a:p>
+            <a:pPr marL="0" indent="0">
+              <a:buNone/>
+            </a:pPr>
+            <a:r>
+              <a:rPr lang="en-US" sz="1600" dirty="0">
+                <a:solidFill>
+                  <a:srgbClr val="555555"/>
+                </a:solidFill>
+              </a:rPr>
+              <a:t>VIDEO call showing "niece" - perfect match. Real niece at work, knew nothing.</a:t>
+            </a:r>
+            <a:endParaRPr lang="en-US" sz="1600" dirty="0"/>
+          </a:p>
+          <a:p>
+            <a:pPr marL="0" indent="0">
+              <a:buNone/>
+            </a:pPr>
+            <a:r>
+              <a:rPr lang="en-US" sz="1600" dirty="0">
+                <a:solidFill>
+                  <a:srgbClr val="555555"/>
+                </a:solidFill>
+              </a:rPr>
+              <a:t>Celebrity Deepfakes:</a:t>
+            </a:r>
+            <a:endParaRPr lang="en-US" sz="1600" dirty="0"/>
+          </a:p>
+          <a:p>
+            <a:pPr marL="0" indent="0">
+              <a:buNone/>
+            </a:pPr>
+            <a:r>
+              <a:rPr lang="en-US" sz="1600" dirty="0">
+                <a:solidFill>
+                  <a:srgbClr val="555555"/>
+                </a:solidFill>
+              </a:rPr>
+              <a:t>Fake Mukesh Ambani, Virat Kohli promoting scam apps</a:t>
+            </a:r>
+            <a:endParaRPr lang="en-US" sz="1600" dirty="0"/>
+          </a:p>
+          <a:p>
+            <a:pPr marL="0" indent="0">
+              <a:buNone/>
+            </a:pPr>
+            <a:r>
+              <a:rPr lang="en-US" sz="1600" dirty="0">
+                <a:solidFill>
+                  <a:srgbClr val="555555"/>
+                </a:solidFill>
+              </a:rPr>
+              <a:t>⚠️ The Reality: Video/voice can NO LONGER be trusted alone | 83% of Indians affected by AI voice scams (2023)</a:t>
+            </a:r>
+            <a:endParaRPr lang="en-US" sz="1600" dirty="0"/>
+          </a:p>
+        </p:txBody>
+      </p:sp>
+      <p:sp>
+        <p:nvSpPr>
+          <p:cNvPr id="7" name="Text 5">
+            <a:extLst>
+              <a:ext uri="{FF2B5EF4-FFF2-40B4-BE49-F238E27FC236}">
+                <a16:creationId xmlns:a16="http://schemas.microsoft.com/office/drawing/2014/main" id="{36D33EAE-3BF5-6A13-3AE9-AB4EF3087745}"/>
+              </a:ext>
+            </a:extLst>
+          </p:cNvPr>
           <p:cNvSpPr/>
           <p:nvPr/>
         </p:nvSpPr>
@@ -7285,7 +6933,7 @@
           <a:bodyPr wrap="square" rtlCol="0" anchor="ctr"/>
           <a:lstStyle/>
           <a:p>
-            <a:pPr algn="r" indent="0" marL="0">
+            <a:pPr marL="0" indent="0" algn="r">
               <a:buNone/>
             </a:pPr>
             <a:r>
@@ -7294,13 +6942,18 @@
                   <a:srgbClr val="999999"/>
                 </a:solidFill>
               </a:rPr>
-              <a:t>18</a:t>
+              <a:t>19</a:t>
             </a:r>
             <a:endParaRPr lang="en-US" sz="1200" dirty="0"/>
           </a:p>
         </p:txBody>
       </p:sp>
     </p:spTree>
+    <p:extLst>
+      <p:ext uri="{BB962C8B-B14F-4D97-AF65-F5344CB8AC3E}">
+        <p14:creationId xmlns:p14="http://schemas.microsoft.com/office/powerpoint/2010/main" val="4006653715"/>
+      </p:ext>
+    </p:extLst>
   </p:cSld>
   <p:clrMapOvr>
     <a:masterClrMapping/>
@@ -7346,7 +6999,7 @@
           <a:bodyPr wrap="square" rtlCol="0" anchor="ctr"/>
           <a:lstStyle/>
           <a:p>
-            <a:pPr indent="0" marL="0">
+            <a:pPr marL="0" indent="0">
               <a:buNone/>
             </a:pPr>
             <a:r>
@@ -7382,7 +7035,7 @@
           <a:bodyPr wrap="square" rtlCol="0" anchor="ctr"/>
           <a:lstStyle/>
           <a:p>
-            <a:pPr algn="r" indent="0" marL="0">
+            <a:pPr marL="0" indent="0" algn="r">
               <a:buNone/>
             </a:pPr>
             <a:r>
@@ -7443,7 +7096,7 @@
           <a:bodyPr wrap="square" rtlCol="0" anchor="ctr"/>
           <a:lstStyle/>
           <a:p>
-            <a:pPr indent="0" marL="0">
+            <a:pPr marL="0" indent="0">
               <a:buNone/>
             </a:pPr>
             <a:r>
@@ -7479,7 +7132,7 @@
           <a:bodyPr wrap="square" rtlCol="0" anchor="ctr"/>
           <a:lstStyle/>
           <a:p>
-            <a:pPr indent="0" marL="0">
+            <a:pPr marL="0" indent="0">
               <a:buNone/>
             </a:pPr>
             <a:r>
@@ -7515,7 +7168,7 @@
           <a:bodyPr wrap="square" rtlCol="0" anchor="t"/>
           <a:lstStyle/>
           <a:p>
-            <a:pPr indent="0" marL="0">
+            <a:pPr marL="0" indent="0">
               <a:buNone/>
             </a:pPr>
             <a:r>
@@ -7529,7 +7182,7 @@
             <a:endParaRPr lang="en-US" sz="1600" dirty="0"/>
           </a:p>
           <a:p>
-            <a:pPr indent="0" marL="0">
+            <a:pPr marL="0" indent="0">
               <a:buNone/>
             </a:pPr>
             <a:r>
@@ -7565,7 +7218,7 @@
           <a:bodyPr wrap="square" rtlCol="0" anchor="ctr"/>
           <a:lstStyle/>
           <a:p>
-            <a:pPr indent="0" marL="0">
+            <a:pPr marL="0" indent="0">
               <a:buNone/>
             </a:pPr>
             <a:r>
@@ -7601,7 +7254,7 @@
           <a:bodyPr wrap="square" rtlCol="0" anchor="t"/>
           <a:lstStyle/>
           <a:p>
-            <a:pPr indent="0" marL="0">
+            <a:pPr marL="0" indent="0">
               <a:buNone/>
             </a:pPr>
             <a:r>
@@ -7615,7 +7268,7 @@
             <a:endParaRPr lang="en-US" sz="1600" dirty="0"/>
           </a:p>
           <a:p>
-            <a:pPr indent="0" marL="0">
+            <a:pPr marL="0" indent="0">
               <a:buNone/>
             </a:pPr>
             <a:r>
@@ -7629,7 +7282,7 @@
             <a:endParaRPr lang="en-US" sz="1600" dirty="0"/>
           </a:p>
           <a:p>
-            <a:pPr indent="0" marL="0">
+            <a:pPr marL="0" indent="0">
               <a:buNone/>
             </a:pPr>
             <a:r>
@@ -7643,7 +7296,7 @@
             <a:endParaRPr lang="en-US" sz="1600" dirty="0"/>
           </a:p>
           <a:p>
-            <a:pPr indent="0" marL="0">
+            <a:pPr marL="0" indent="0">
               <a:buNone/>
             </a:pPr>
             <a:r>
@@ -7657,7 +7310,7 @@
             <a:endParaRPr lang="en-US" sz="1600" dirty="0"/>
           </a:p>
           <a:p>
-            <a:pPr indent="0" marL="0">
+            <a:pPr marL="0" indent="0">
               <a:buNone/>
             </a:pPr>
             <a:r>
@@ -7671,7 +7324,7 @@
             <a:endParaRPr lang="en-US" sz="1600" dirty="0"/>
           </a:p>
           <a:p>
-            <a:pPr indent="0" marL="0">
+            <a:pPr marL="0" indent="0">
               <a:buNone/>
             </a:pPr>
             <a:r>
@@ -7685,7 +7338,7 @@
             <a:endParaRPr lang="en-US" sz="1600" dirty="0"/>
           </a:p>
           <a:p>
-            <a:pPr indent="0" marL="0">
+            <a:pPr marL="0" indent="0">
               <a:buNone/>
             </a:pPr>
             <a:r>
@@ -7721,7 +7374,7 @@
           <a:bodyPr wrap="square" rtlCol="0" anchor="ctr"/>
           <a:lstStyle/>
           <a:p>
-            <a:pPr algn="r" indent="0" marL="0">
+            <a:pPr marL="0" indent="0" algn="r">
               <a:buNone/>
             </a:pPr>
             <a:r>
@@ -7745,6 +7398,522 @@
 </file>
 
 <file path=ppt/slides/slide21.xml><?xml version="1.0" encoding="utf-8"?>
+<p:sld xmlns:a="http://schemas.openxmlformats.org/drawingml/2006/main" xmlns:r="http://schemas.openxmlformats.org/officeDocument/2006/relationships" xmlns:p="http://schemas.openxmlformats.org/presentationml/2006/main">
+  <p:cSld name="Slide 19">
+    <p:spTree>
+      <p:nvGrpSpPr>
+        <p:cNvPr id="1" name=""/>
+        <p:cNvGrpSpPr/>
+        <p:nvPr/>
+      </p:nvGrpSpPr>
+      <p:grpSpPr>
+        <a:xfrm>
+          <a:off x="0" y="0"/>
+          <a:ext cx="0" cy="0"/>
+          <a:chOff x="0" y="0"/>
+          <a:chExt cx="0" cy="0"/>
+        </a:xfrm>
+      </p:grpSpPr>
+      <p:sp>
+        <p:nvSpPr>
+          <p:cNvPr id="2" name="Text 0"/>
+          <p:cNvSpPr/>
+          <p:nvPr/>
+        </p:nvSpPr>
+        <p:spPr>
+          <a:xfrm>
+            <a:off x="457200" y="457200"/>
+            <a:ext cx="8229600" cy="685800"/>
+          </a:xfrm>
+          <a:prstGeom prst="rect">
+            <a:avLst/>
+          </a:prstGeom>
+          <a:noFill/>
+          <a:ln/>
+        </p:spPr>
+        <p:txBody>
+          <a:bodyPr wrap="square" rtlCol="0" anchor="ctr"/>
+          <a:lstStyle/>
+          <a:p>
+            <a:pPr marL="0" indent="0">
+              <a:buNone/>
+            </a:pPr>
+            <a:r>
+              <a:rPr lang="en-US" sz="2800" b="1" dirty="0">
+                <a:solidFill>
+                  <a:srgbClr val="363636"/>
+                </a:solidFill>
+              </a:rPr>
+              <a:t>Advanced Protection</a:t>
+            </a:r>
+            <a:endParaRPr lang="en-US" sz="2800" dirty="0"/>
+          </a:p>
+        </p:txBody>
+      </p:sp>
+      <p:sp>
+        <p:nvSpPr>
+          <p:cNvPr id="3" name="Text 1"/>
+          <p:cNvSpPr/>
+          <p:nvPr/>
+        </p:nvSpPr>
+        <p:spPr>
+          <a:xfrm>
+            <a:off x="457200" y="1371600"/>
+            <a:ext cx="8229600" cy="365760"/>
+          </a:xfrm>
+          <a:prstGeom prst="rect">
+            <a:avLst/>
+          </a:prstGeom>
+          <a:noFill/>
+          <a:ln/>
+        </p:spPr>
+        <p:txBody>
+          <a:bodyPr wrap="square" rtlCol="0" anchor="ctr"/>
+          <a:lstStyle/>
+          <a:p>
+            <a:pPr marL="0" indent="0">
+              <a:buNone/>
+            </a:pPr>
+            <a:r>
+              <a:rPr lang="en-US" sz="2000" b="1" dirty="0">
+                <a:solidFill>
+                  <a:srgbClr val="444444"/>
+                </a:solidFill>
+              </a:rPr>
+              <a:t>Separate Bank Accounts</a:t>
+            </a:r>
+            <a:endParaRPr lang="en-US" sz="2000" dirty="0"/>
+          </a:p>
+        </p:txBody>
+      </p:sp>
+      <p:sp>
+        <p:nvSpPr>
+          <p:cNvPr id="4" name="Text 2"/>
+          <p:cNvSpPr/>
+          <p:nvPr/>
+        </p:nvSpPr>
+        <p:spPr>
+          <a:xfrm>
+            <a:off x="457200" y="1828800"/>
+            <a:ext cx="8229600" cy="3200400"/>
+          </a:xfrm>
+          <a:prstGeom prst="rect">
+            <a:avLst/>
+          </a:prstGeom>
+          <a:noFill/>
+          <a:ln/>
+        </p:spPr>
+        <p:txBody>
+          <a:bodyPr wrap="square" rtlCol="0" anchor="t"/>
+          <a:lstStyle/>
+          <a:p>
+            <a:pPr marL="0" indent="0">
+              <a:buNone/>
+            </a:pPr>
+            <a:r>
+              <a:rPr lang="en-US" sz="1600" dirty="0">
+                <a:solidFill>
+                  <a:srgbClr val="555555"/>
+                </a:solidFill>
+              </a:rPr>
+              <a:t>Strategy:</a:t>
+            </a:r>
+            <a:endParaRPr lang="en-US" sz="1600" dirty="0"/>
+          </a:p>
+          <a:p>
+            <a:pPr marL="0" indent="0">
+              <a:buNone/>
+            </a:pPr>
+            <a:r>
+              <a:rPr lang="en-US" sz="1600" dirty="0">
+                <a:solidFill>
+                  <a:srgbClr val="555555"/>
+                </a:solidFill>
+              </a:rPr>
+              <a:t>Main (₹5L) - minimal activity | Secondary (₹20K) - UPI/shopping</a:t>
+            </a:r>
+            <a:endParaRPr lang="en-US" sz="1600" dirty="0"/>
+          </a:p>
+          <a:p>
+            <a:pPr marL="0" indent="0">
+              <a:buNone/>
+            </a:pPr>
+            <a:r>
+              <a:rPr lang="en-US" sz="1600" dirty="0">
+                <a:solidFill>
+                  <a:srgbClr val="555555"/>
+                </a:solidFill>
+              </a:rPr>
+              <a:t>Benefit: If compromised, only ₹20K at risk</a:t>
+            </a:r>
+            <a:endParaRPr lang="en-US" sz="1600" dirty="0"/>
+          </a:p>
+        </p:txBody>
+      </p:sp>
+      <p:sp>
+        <p:nvSpPr>
+          <p:cNvPr id="5" name="Text 3"/>
+          <p:cNvSpPr/>
+          <p:nvPr/>
+        </p:nvSpPr>
+        <p:spPr>
+          <a:xfrm>
+            <a:off x="3986331" y="1025843"/>
+            <a:ext cx="8229600" cy="365760"/>
+          </a:xfrm>
+          <a:prstGeom prst="rect">
+            <a:avLst/>
+          </a:prstGeom>
+          <a:noFill/>
+          <a:ln/>
+        </p:spPr>
+        <p:txBody>
+          <a:bodyPr wrap="square" rtlCol="0" anchor="ctr"/>
+          <a:lstStyle/>
+          <a:p>
+            <a:pPr marL="0" indent="0">
+              <a:buNone/>
+            </a:pPr>
+            <a:r>
+              <a:rPr lang="en-US" sz="2000" b="1" dirty="0">
+                <a:solidFill>
+                  <a:srgbClr val="444444"/>
+                </a:solidFill>
+              </a:rPr>
+              <a:t>Set Transaction Limits</a:t>
+            </a:r>
+            <a:endParaRPr lang="en-US" sz="2000" dirty="0"/>
+          </a:p>
+        </p:txBody>
+      </p:sp>
+      <p:sp>
+        <p:nvSpPr>
+          <p:cNvPr id="6" name="Text 4"/>
+          <p:cNvSpPr/>
+          <p:nvPr/>
+        </p:nvSpPr>
+        <p:spPr>
+          <a:xfrm>
+            <a:off x="759481" y="3986331"/>
+            <a:ext cx="8229600" cy="3200400"/>
+          </a:xfrm>
+          <a:prstGeom prst="rect">
+            <a:avLst/>
+          </a:prstGeom>
+          <a:noFill/>
+          <a:ln/>
+        </p:spPr>
+        <p:txBody>
+          <a:bodyPr wrap="square" rtlCol="0" anchor="t"/>
+          <a:lstStyle/>
+          <a:p>
+            <a:pPr marL="0" indent="0">
+              <a:buNone/>
+            </a:pPr>
+            <a:r>
+              <a:rPr lang="en-US" sz="1600" dirty="0">
+                <a:solidFill>
+                  <a:srgbClr val="555555"/>
+                </a:solidFill>
+              </a:rPr>
+              <a:t>Settings:</a:t>
+            </a:r>
+            <a:endParaRPr lang="en-US" sz="1600" dirty="0"/>
+          </a:p>
+          <a:p>
+            <a:pPr marL="0" indent="0">
+              <a:buNone/>
+            </a:pPr>
+            <a:r>
+              <a:rPr lang="en-US" sz="1600" dirty="0">
+                <a:solidFill>
+                  <a:srgbClr val="555555"/>
+                </a:solidFill>
+              </a:rPr>
+              <a:t>UPI limit: ₹5-10K (not ₹1L) | Card: ₹10-20K</a:t>
+            </a:r>
+            <a:endParaRPr lang="en-US" sz="1600" dirty="0"/>
+          </a:p>
+          <a:p>
+            <a:pPr marL="0" indent="0">
+              <a:buNone/>
+            </a:pPr>
+            <a:r>
+              <a:rPr lang="en-US" sz="1600" dirty="0">
+                <a:solidFill>
+                  <a:srgbClr val="555555"/>
+                </a:solidFill>
+              </a:rPr>
+              <a:t>How: Banking app → Settings → Limits</a:t>
+            </a:r>
+            <a:endParaRPr lang="en-US" sz="1600" dirty="0"/>
+          </a:p>
+        </p:txBody>
+      </p:sp>
+      <p:sp>
+        <p:nvSpPr>
+          <p:cNvPr id="7" name="Text 5"/>
+          <p:cNvSpPr/>
+          <p:nvPr/>
+        </p:nvSpPr>
+        <p:spPr>
+          <a:xfrm>
+            <a:off x="5966271" y="1600200"/>
+            <a:ext cx="8229600" cy="365760"/>
+          </a:xfrm>
+          <a:prstGeom prst="rect">
+            <a:avLst/>
+          </a:prstGeom>
+          <a:noFill/>
+          <a:ln/>
+        </p:spPr>
+        <p:txBody>
+          <a:bodyPr wrap="square" rtlCol="0" anchor="ctr"/>
+          <a:lstStyle/>
+          <a:p>
+            <a:pPr marL="0" indent="0">
+              <a:buNone/>
+            </a:pPr>
+            <a:r>
+              <a:rPr lang="en-US" sz="2000" b="1" dirty="0">
+                <a:solidFill>
+                  <a:srgbClr val="444444"/>
+                </a:solidFill>
+              </a:rPr>
+              <a:t>Family Secret Phrase</a:t>
+            </a:r>
+            <a:endParaRPr lang="en-US" sz="2000" dirty="0"/>
+          </a:p>
+        </p:txBody>
+      </p:sp>
+      <p:sp>
+        <p:nvSpPr>
+          <p:cNvPr id="8" name="Text 6"/>
+          <p:cNvSpPr/>
+          <p:nvPr/>
+        </p:nvSpPr>
+        <p:spPr>
+          <a:xfrm>
+            <a:off x="457200" y="2743200"/>
+            <a:ext cx="8229600" cy="3200400"/>
+          </a:xfrm>
+          <a:prstGeom prst="rect">
+            <a:avLst/>
+          </a:prstGeom>
+          <a:noFill/>
+          <a:ln/>
+        </p:spPr>
+        <p:txBody>
+          <a:bodyPr wrap="square" rtlCol="0" anchor="t"/>
+          <a:lstStyle/>
+          <a:p>
+            <a:pPr marL="0" indent="0">
+              <a:buNone/>
+            </a:pPr>
+            <a:r>
+              <a:rPr lang="en-US" sz="1600" dirty="0">
+                <a:solidFill>
+                  <a:srgbClr val="555555"/>
+                </a:solidFill>
+              </a:rPr>
+              <a:t>Setup:</a:t>
+            </a:r>
+            <a:endParaRPr lang="en-US" sz="1600" dirty="0"/>
+          </a:p>
+          <a:p>
+            <a:pPr marL="0" indent="0">
+              <a:buNone/>
+            </a:pPr>
+            <a:r>
+              <a:rPr lang="en-US" sz="1600" dirty="0">
+                <a:solidFill>
+                  <a:srgbClr val="555555"/>
+                </a:solidFill>
+              </a:rPr>
+              <a:t>Agree on codeword (e.g., "Rainbow42")</a:t>
+            </a:r>
+            <a:endParaRPr lang="en-US" sz="1600" dirty="0"/>
+          </a:p>
+          <a:p>
+            <a:pPr marL="0" indent="0">
+              <a:buNone/>
+            </a:pPr>
+            <a:r>
+              <a:rPr lang="en-US" sz="1600" dirty="0">
+                <a:solidFill>
+                  <a:srgbClr val="555555"/>
+                </a:solidFill>
+              </a:rPr>
+              <a:t>Rule: Any money request MUST include codeword</a:t>
+            </a:r>
+            <a:endParaRPr lang="en-US" sz="1600" dirty="0"/>
+          </a:p>
+          <a:p>
+            <a:pPr marL="0" indent="0">
+              <a:buNone/>
+            </a:pPr>
+            <a:r>
+              <a:rPr lang="en-US" sz="1600" dirty="0">
+                <a:solidFill>
+                  <a:srgbClr val="555555"/>
+                </a:solidFill>
+              </a:rPr>
+              <a:t>Defeats: Hacked WhatsApp, SMS spoofing, AI voice cloning</a:t>
+            </a:r>
+            <a:endParaRPr lang="en-US" sz="1600" dirty="0"/>
+          </a:p>
+        </p:txBody>
+      </p:sp>
+      <p:sp>
+        <p:nvSpPr>
+          <p:cNvPr id="9" name="Text 7"/>
+          <p:cNvSpPr/>
+          <p:nvPr/>
+        </p:nvSpPr>
+        <p:spPr>
+          <a:xfrm>
+            <a:off x="6124968" y="4474845"/>
+            <a:ext cx="8229600" cy="365760"/>
+          </a:xfrm>
+          <a:prstGeom prst="rect">
+            <a:avLst/>
+          </a:prstGeom>
+          <a:noFill/>
+          <a:ln/>
+        </p:spPr>
+        <p:txBody>
+          <a:bodyPr wrap="square" rtlCol="0" anchor="ctr"/>
+          <a:lstStyle/>
+          <a:p>
+            <a:pPr marL="0" indent="0">
+              <a:buNone/>
+            </a:pPr>
+            <a:r>
+              <a:rPr lang="en-US" sz="2000" b="1" dirty="0">
+                <a:solidFill>
+                  <a:srgbClr val="444444"/>
+                </a:solidFill>
+              </a:rPr>
+              <a:t>Monthly Checks</a:t>
+            </a:r>
+            <a:endParaRPr lang="en-US" sz="2000" dirty="0"/>
+          </a:p>
+        </p:txBody>
+      </p:sp>
+      <p:sp>
+        <p:nvSpPr>
+          <p:cNvPr id="10" name="Text 8"/>
+          <p:cNvSpPr/>
+          <p:nvPr/>
+        </p:nvSpPr>
+        <p:spPr>
+          <a:xfrm>
+            <a:off x="6570833" y="2606040"/>
+            <a:ext cx="8229600" cy="3200400"/>
+          </a:xfrm>
+          <a:prstGeom prst="rect">
+            <a:avLst/>
+          </a:prstGeom>
+          <a:noFill/>
+          <a:ln/>
+        </p:spPr>
+        <p:txBody>
+          <a:bodyPr wrap="square" rtlCol="0" anchor="t"/>
+          <a:lstStyle/>
+          <a:p>
+            <a:pPr marL="0" indent="0">
+              <a:buNone/>
+            </a:pPr>
+            <a:r>
+              <a:rPr lang="en-US" sz="1600" dirty="0">
+                <a:solidFill>
+                  <a:srgbClr val="555555"/>
+                </a:solidFill>
+              </a:rPr>
+              <a:t>Regular Tasks:</a:t>
+            </a:r>
+            <a:endParaRPr lang="en-US" sz="1600" dirty="0"/>
+          </a:p>
+          <a:p>
+            <a:r>
+              <a:rPr lang="en-US" sz="1600" dirty="0">
+                <a:solidFill>
+                  <a:srgbClr val="555555"/>
+                </a:solidFill>
+              </a:rPr>
+              <a:t>[ ] Review bank statements</a:t>
+            </a:r>
+            <a:endParaRPr lang="en-US" sz="1600" dirty="0"/>
+          </a:p>
+          <a:p>
+            <a:r>
+              <a:rPr lang="en-US" sz="1600" dirty="0">
+                <a:solidFill>
+                  <a:srgbClr val="555555"/>
+                </a:solidFill>
+              </a:rPr>
+              <a:t>[ ] Enable transaction alerts</a:t>
+            </a:r>
+            <a:endParaRPr lang="en-US" sz="1600" dirty="0"/>
+          </a:p>
+          <a:p>
+            <a:r>
+              <a:rPr lang="en-US" sz="1600" dirty="0">
+                <a:solidFill>
+                  <a:srgbClr val="555555"/>
+                </a:solidFill>
+              </a:rPr>
+              <a:t>[ ] Check credit report</a:t>
+            </a:r>
+            <a:endParaRPr lang="en-US" sz="1600" dirty="0"/>
+          </a:p>
+        </p:txBody>
+      </p:sp>
+      <p:sp>
+        <p:nvSpPr>
+          <p:cNvPr id="11" name="Text 9"/>
+          <p:cNvSpPr/>
+          <p:nvPr/>
+        </p:nvSpPr>
+        <p:spPr>
+          <a:xfrm>
+            <a:off x="8686800" y="4886325"/>
+            <a:ext cx="457200" cy="274320"/>
+          </a:xfrm>
+          <a:prstGeom prst="rect">
+            <a:avLst/>
+          </a:prstGeom>
+          <a:noFill/>
+          <a:ln/>
+        </p:spPr>
+        <p:txBody>
+          <a:bodyPr wrap="square" rtlCol="0" anchor="ctr"/>
+          <a:lstStyle/>
+          <a:p>
+            <a:pPr marL="0" indent="0" algn="r">
+              <a:buNone/>
+            </a:pPr>
+            <a:r>
+              <a:rPr lang="en-US" sz="1200" dirty="0">
+                <a:solidFill>
+                  <a:srgbClr val="999999"/>
+                </a:solidFill>
+              </a:rPr>
+              <a:t>18</a:t>
+            </a:r>
+            <a:endParaRPr lang="en-US" sz="1200" dirty="0"/>
+          </a:p>
+        </p:txBody>
+      </p:sp>
+    </p:spTree>
+  </p:cSld>
+  <p:clrMapOvr>
+    <a:masterClrMapping/>
+  </p:clrMapOvr>
+</p:sld>
+</file>
+
+<file path=ppt/slides/slide22.xml><?xml version="1.0" encoding="utf-8"?>
 <p:sld xmlns:a="http://schemas.openxmlformats.org/drawingml/2006/main" xmlns:r="http://schemas.openxmlformats.org/officeDocument/2006/relationships" xmlns:p="http://schemas.openxmlformats.org/presentationml/2006/main">
   <p:cSld name="Slide 21">
     <p:spTree>
@@ -7782,7 +7951,7 @@
           <a:bodyPr wrap="square" rtlCol="0" anchor="ctr"/>
           <a:lstStyle/>
           <a:p>
-            <a:pPr indent="0" marL="0">
+            <a:pPr marL="0" indent="0">
               <a:buNone/>
             </a:pPr>
             <a:r>
@@ -7818,7 +7987,7 @@
           <a:bodyPr wrap="square" rtlCol="0" anchor="ctr"/>
           <a:lstStyle/>
           <a:p>
-            <a:pPr indent="0" marL="0">
+            <a:pPr marL="0" indent="0">
               <a:buNone/>
             </a:pPr>
             <a:r>
@@ -7854,7 +8023,7 @@
           <a:bodyPr wrap="square" rtlCol="0" anchor="t"/>
           <a:lstStyle/>
           <a:p>
-            <a:pPr indent="0" marL="0">
+            <a:pPr marL="0" indent="0">
               <a:buNone/>
             </a:pPr>
             <a:r>
@@ -7868,7 +8037,7 @@
             <a:endParaRPr lang="en-US" sz="1600" dirty="0"/>
           </a:p>
           <a:p>
-            <a:pPr indent="0" marL="0">
+            <a:pPr marL="0" indent="0">
               <a:buNone/>
             </a:pPr>
             <a:r>
@@ -7882,7 +8051,7 @@
             <a:endParaRPr lang="en-US" sz="1600" dirty="0"/>
           </a:p>
           <a:p>
-            <a:pPr indent="0" marL="0">
+            <a:pPr marL="0" indent="0">
               <a:buNone/>
             </a:pPr>
             <a:r>
@@ -7896,7 +8065,7 @@
             <a:endParaRPr lang="en-US" sz="1600" dirty="0"/>
           </a:p>
           <a:p>
-            <a:pPr indent="0" marL="0">
+            <a:pPr marL="0" indent="0">
               <a:buNone/>
             </a:pPr>
             <a:r>
@@ -7910,7 +8079,7 @@
             <a:endParaRPr lang="en-US" sz="1600" dirty="0"/>
           </a:p>
           <a:p>
-            <a:pPr indent="0" marL="0">
+            <a:pPr marL="0" indent="0">
               <a:buNone/>
             </a:pPr>
             <a:r>
@@ -7924,7 +8093,7 @@
             <a:endParaRPr lang="en-US" sz="1600" dirty="0"/>
           </a:p>
           <a:p>
-            <a:pPr indent="0" marL="0">
+            <a:pPr marL="0" indent="0">
               <a:buNone/>
             </a:pPr>
             <a:r>
@@ -7947,7 +8116,7 @@
         </p:nvSpPr>
         <p:spPr>
           <a:xfrm>
-            <a:off x="457200" y="1828800"/>
+            <a:off x="6427250" y="830517"/>
             <a:ext cx="8229600" cy="365760"/>
           </a:xfrm>
           <a:prstGeom prst="rect">
@@ -7960,7 +8129,7 @@
           <a:bodyPr wrap="square" rtlCol="0" anchor="ctr"/>
           <a:lstStyle/>
           <a:p>
-            <a:pPr indent="0" marL="0">
+            <a:pPr marL="0" indent="0">
               <a:buNone/>
             </a:pPr>
             <a:r>
@@ -7983,7 +8152,7 @@
         </p:nvSpPr>
         <p:spPr>
           <a:xfrm>
-            <a:off x="457200" y="2286000"/>
+            <a:off x="5218126" y="3406141"/>
             <a:ext cx="8229600" cy="3200400"/>
           </a:xfrm>
           <a:prstGeom prst="rect">
@@ -7996,7 +8165,7 @@
           <a:bodyPr wrap="square" rtlCol="0" anchor="t"/>
           <a:lstStyle/>
           <a:p>
-            <a:pPr indent="0" marL="0">
+            <a:pPr marL="0" indent="0">
               <a:buNone/>
             </a:pPr>
             <a:r>
@@ -8010,7 +8179,7 @@
             <a:endParaRPr lang="en-US" sz="1600" dirty="0"/>
           </a:p>
           <a:p>
-            <a:pPr indent="0" marL="0">
+            <a:pPr marL="0" indent="0">
               <a:buNone/>
             </a:pPr>
             <a:r>
@@ -8024,7 +8193,7 @@
             <a:endParaRPr lang="en-US" sz="1600" dirty="0"/>
           </a:p>
           <a:p>
-            <a:pPr indent="0" marL="0">
+            <a:pPr marL="0" indent="0">
               <a:buNone/>
             </a:pPr>
             <a:r>
@@ -8038,7 +8207,7 @@
             <a:endParaRPr lang="en-US" sz="1600" dirty="0"/>
           </a:p>
           <a:p>
-            <a:pPr indent="0" marL="0">
+            <a:pPr marL="0" indent="0">
               <a:buNone/>
             </a:pPr>
             <a:r>
@@ -8052,7 +8221,7 @@
             <a:endParaRPr lang="en-US" sz="1600" dirty="0"/>
           </a:p>
           <a:p>
-            <a:pPr indent="0" marL="0">
+            <a:pPr marL="0" indent="0">
               <a:buNone/>
             </a:pPr>
             <a:r>
@@ -8066,7 +8235,7 @@
             <a:endParaRPr lang="en-US" sz="1600" dirty="0"/>
           </a:p>
           <a:p>
-            <a:pPr indent="0" marL="0">
+            <a:pPr marL="0" indent="0">
               <a:buNone/>
             </a:pPr>
             <a:r>
@@ -8080,7 +8249,7 @@
             <a:endParaRPr lang="en-US" sz="1600" dirty="0"/>
           </a:p>
           <a:p>
-            <a:pPr indent="0" marL="0">
+            <a:pPr marL="0" indent="0">
               <a:buNone/>
             </a:pPr>
             <a:r>
@@ -8116,7 +8285,7 @@
           <a:bodyPr wrap="square" rtlCol="0" anchor="ctr"/>
           <a:lstStyle/>
           <a:p>
-            <a:pPr algn="r" indent="0" marL="0">
+            <a:pPr marL="0" indent="0" algn="r">
               <a:buNone/>
             </a:pPr>
             <a:r>
@@ -8126,427 +8295,6 @@
                 </a:solidFill>
               </a:rPr>
               <a:t>20</a:t>
-            </a:r>
-            <a:endParaRPr lang="en-US" sz="1200" dirty="0"/>
-          </a:p>
-        </p:txBody>
-      </p:sp>
-    </p:spTree>
-  </p:cSld>
-  <p:clrMapOvr>
-    <a:masterClrMapping/>
-  </p:clrMapOvr>
-</p:sld>
-</file>
-
-<file path=ppt/slides/slide22.xml><?xml version="1.0" encoding="utf-8"?>
-<p:sld xmlns:a="http://schemas.openxmlformats.org/drawingml/2006/main" xmlns:r="http://schemas.openxmlformats.org/officeDocument/2006/relationships" xmlns:p="http://schemas.openxmlformats.org/presentationml/2006/main">
-  <p:cSld name="Slide 22">
-    <p:spTree>
-      <p:nvGrpSpPr>
-        <p:cNvPr id="1" name=""/>
-        <p:cNvGrpSpPr/>
-        <p:nvPr/>
-      </p:nvGrpSpPr>
-      <p:grpSpPr>
-        <a:xfrm>
-          <a:off x="0" y="0"/>
-          <a:ext cx="0" cy="0"/>
-          <a:chOff x="0" y="0"/>
-          <a:chExt cx="0" cy="0"/>
-        </a:xfrm>
-      </p:grpSpPr>
-      <p:sp>
-        <p:nvSpPr>
-          <p:cNvPr id="2" name="Text 0"/>
-          <p:cNvSpPr/>
-          <p:nvPr/>
-        </p:nvSpPr>
-        <p:spPr>
-          <a:xfrm>
-            <a:off x="457200" y="457200"/>
-            <a:ext cx="8229600" cy="685800"/>
-          </a:xfrm>
-          <a:prstGeom prst="rect">
-            <a:avLst/>
-          </a:prstGeom>
-          <a:noFill/>
-          <a:ln/>
-        </p:spPr>
-        <p:txBody>
-          <a:bodyPr wrap="square" rtlCol="0" anchor="ctr"/>
-          <a:lstStyle/>
-          <a:p>
-            <a:pPr indent="0" marL="0">
-              <a:buNone/>
-            </a:pPr>
-            <a:r>
-              <a:rPr lang="en-US" sz="2800" b="1" dirty="0">
-                <a:solidFill>
-                  <a:srgbClr val="363636"/>
-                </a:solidFill>
-              </a:rPr>
-              <a:t>If You Suspect Fraud</a:t>
-            </a:r>
-            <a:endParaRPr lang="en-US" sz="2800" dirty="0"/>
-          </a:p>
-        </p:txBody>
-      </p:sp>
-      <p:sp>
-        <p:nvSpPr>
-          <p:cNvPr id="3" name="Text 1"/>
-          <p:cNvSpPr/>
-          <p:nvPr/>
-        </p:nvSpPr>
-        <p:spPr>
-          <a:xfrm>
-            <a:off x="457200" y="1371600"/>
-            <a:ext cx="8229600" cy="365760"/>
-          </a:xfrm>
-          <a:prstGeom prst="rect">
-            <a:avLst/>
-          </a:prstGeom>
-          <a:noFill/>
-          <a:ln/>
-        </p:spPr>
-        <p:txBody>
-          <a:bodyPr wrap="square" rtlCol="0" anchor="ctr"/>
-          <a:lstStyle/>
-          <a:p>
-            <a:pPr indent="0" marL="0">
-              <a:buNone/>
-            </a:pPr>
-            <a:r>
-              <a:rPr lang="en-US" sz="2000" b="1" dirty="0">
-                <a:solidFill>
-                  <a:srgbClr val="444444"/>
-                </a:solidFill>
-              </a:rPr>
-              <a:t>Immediate Actions</a:t>
-            </a:r>
-            <a:endParaRPr lang="en-US" sz="2000" dirty="0"/>
-          </a:p>
-        </p:txBody>
-      </p:sp>
-      <p:sp>
-        <p:nvSpPr>
-          <p:cNvPr id="4" name="Text 2"/>
-          <p:cNvSpPr/>
-          <p:nvPr/>
-        </p:nvSpPr>
-        <p:spPr>
-          <a:xfrm>
-            <a:off x="457200" y="1828800"/>
-            <a:ext cx="8229600" cy="3200400"/>
-          </a:xfrm>
-          <a:prstGeom prst="rect">
-            <a:avLst/>
-          </a:prstGeom>
-          <a:noFill/>
-          <a:ln/>
-        </p:spPr>
-        <p:txBody>
-          <a:bodyPr wrap="square" rtlCol="0" anchor="t"/>
-          <a:lstStyle/>
-          <a:p>
-            <a:pPr indent="0" marL="0">
-              <a:buNone/>
-            </a:pPr>
-            <a:r>
-              <a:rPr lang="en-US" sz="1600" dirty="0">
-                <a:solidFill>
-                  <a:srgbClr val="555555"/>
-                </a:solidFill>
-              </a:rPr>
-              <a:t>First Steps:</a:t>
-            </a:r>
-            <a:endParaRPr lang="en-US" sz="1600" dirty="0"/>
-          </a:p>
-          <a:p>
-            <a:pPr indent="0" marL="0">
-              <a:buNone/>
-            </a:pPr>
-            <a:r>
-              <a:rPr lang="en-US" sz="1600" dirty="0">
-                <a:solidFill>
-                  <a:srgbClr val="555555"/>
-                </a:solidFill>
-              </a:rPr>
-              <a:t>1. [ ] Login to bank app (NOT via link) - check balance/transactions</a:t>
-            </a:r>
-            <a:endParaRPr lang="en-US" sz="1600" dirty="0"/>
-          </a:p>
-          <a:p>
-            <a:pPr indent="0" marL="0">
-              <a:buNone/>
-            </a:pPr>
-            <a:r>
-              <a:rPr lang="en-US" sz="1600" dirty="0">
-                <a:solidFill>
-                  <a:srgbClr val="555555"/>
-                </a:solidFill>
-              </a:rPr>
-              <a:t>2. [ ] Disable/reduce limits - Block card OR reduce to ₹100</a:t>
-            </a:r>
-            <a:endParaRPr lang="en-US" sz="1600" dirty="0"/>
-          </a:p>
-          <a:p>
-            <a:pPr indent="0" marL="0">
-              <a:buNone/>
-            </a:pPr>
-            <a:r>
-              <a:rPr lang="en-US" sz="1600" dirty="0">
-                <a:solidFill>
-                  <a:srgbClr val="555555"/>
-                </a:solidFill>
-              </a:rPr>
-              <a:t>3. [ ] Call bank - Number on YOUR card (not from email/Google)</a:t>
-            </a:r>
-            <a:endParaRPr lang="en-US" sz="1600" dirty="0"/>
-          </a:p>
-        </p:txBody>
-      </p:sp>
-      <p:sp>
-        <p:nvSpPr>
-          <p:cNvPr id="5" name="Text 3"/>
-          <p:cNvSpPr/>
-          <p:nvPr/>
-        </p:nvSpPr>
-        <p:spPr>
-          <a:xfrm>
-            <a:off x="457200" y="1828800"/>
-            <a:ext cx="8229600" cy="365760"/>
-          </a:xfrm>
-          <a:prstGeom prst="rect">
-            <a:avLst/>
-          </a:prstGeom>
-          <a:noFill/>
-          <a:ln/>
-        </p:spPr>
-        <p:txBody>
-          <a:bodyPr wrap="square" rtlCol="0" anchor="ctr"/>
-          <a:lstStyle/>
-          <a:p>
-            <a:pPr indent="0" marL="0">
-              <a:buNone/>
-            </a:pPr>
-            <a:r>
-              <a:rPr lang="en-US" sz="2000" b="1" dirty="0">
-                <a:solidFill>
-                  <a:srgbClr val="444444"/>
-                </a:solidFill>
-              </a:rPr>
-              <a:t>Timing = Recovery</a:t>
-            </a:r>
-            <a:endParaRPr lang="en-US" sz="2000" dirty="0"/>
-          </a:p>
-        </p:txBody>
-      </p:sp>
-      <p:sp>
-        <p:nvSpPr>
-          <p:cNvPr id="6" name="Text 4"/>
-          <p:cNvSpPr/>
-          <p:nvPr/>
-        </p:nvSpPr>
-        <p:spPr>
-          <a:xfrm>
-            <a:off x="457200" y="2286000"/>
-            <a:ext cx="8229600" cy="3200400"/>
-          </a:xfrm>
-          <a:prstGeom prst="rect">
-            <a:avLst/>
-          </a:prstGeom>
-          <a:noFill/>
-          <a:ln/>
-        </p:spPr>
-        <p:txBody>
-          <a:bodyPr wrap="square" rtlCol="0" anchor="t"/>
-          <a:lstStyle/>
-          <a:p>
-            <a:pPr indent="0" marL="0">
-              <a:buNone/>
-            </a:pPr>
-            <a:r>
-              <a:rPr lang="en-US" sz="1600" dirty="0">
-                <a:solidFill>
-                  <a:srgbClr val="555555"/>
-                </a:solidFill>
-              </a:rPr>
-              <a:t>Recovery Rates:</a:t>
-            </a:r>
-            <a:endParaRPr lang="en-US" sz="1600" dirty="0"/>
-          </a:p>
-          <a:p>
-            <a:r>
-              <a:rPr lang="en-US" sz="1600" dirty="0">
-                <a:solidFill>
-                  <a:srgbClr val="555555"/>
-                </a:solidFill>
-              </a:rPr>
-              <a:t>Within 1 hour: Card 80-90% | UPI 20-30%</a:t>
-            </a:r>
-            <a:endParaRPr lang="en-US" sz="1600" dirty="0"/>
-          </a:p>
-          <a:p>
-            <a:r>
-              <a:rPr lang="en-US" sz="1600" dirty="0">
-                <a:solidFill>
-                  <a:srgbClr val="555555"/>
-                </a:solidFill>
-              </a:rPr>
-              <a:t>After 24 hours: Card 70% | UPI 5-10%</a:t>
-            </a:r>
-            <a:endParaRPr lang="en-US" sz="1600" dirty="0"/>
-          </a:p>
-          <a:p>
-            <a:r>
-              <a:rPr lang="en-US" sz="1600" dirty="0">
-                <a:solidFill>
-                  <a:srgbClr val="555555"/>
-                </a:solidFill>
-              </a:rPr>
-              <a:t>After 1 week: &lt;5% (money gone)</a:t>
-            </a:r>
-            <a:endParaRPr lang="en-US" sz="1600" dirty="0"/>
-          </a:p>
-        </p:txBody>
-      </p:sp>
-      <p:sp>
-        <p:nvSpPr>
-          <p:cNvPr id="7" name="Text 5"/>
-          <p:cNvSpPr/>
-          <p:nvPr/>
-        </p:nvSpPr>
-        <p:spPr>
-          <a:xfrm>
-            <a:off x="457200" y="2286000"/>
-            <a:ext cx="8229600" cy="365760"/>
-          </a:xfrm>
-          <a:prstGeom prst="rect">
-            <a:avLst/>
-          </a:prstGeom>
-          <a:noFill/>
-          <a:ln/>
-        </p:spPr>
-        <p:txBody>
-          <a:bodyPr wrap="square" rtlCol="0" anchor="ctr"/>
-          <a:lstStyle/>
-          <a:p>
-            <a:pPr indent="0" marL="0">
-              <a:buNone/>
-            </a:pPr>
-            <a:r>
-              <a:rPr lang="en-US" sz="2000" b="1" dirty="0">
-                <a:solidFill>
-                  <a:srgbClr val="444444"/>
-                </a:solidFill>
-              </a:rPr>
-              <a:t>If Money Gone</a:t>
-            </a:r>
-            <a:endParaRPr lang="en-US" sz="2000" dirty="0"/>
-          </a:p>
-        </p:txBody>
-      </p:sp>
-      <p:sp>
-        <p:nvSpPr>
-          <p:cNvPr id="8" name="Text 6"/>
-          <p:cNvSpPr/>
-          <p:nvPr/>
-        </p:nvSpPr>
-        <p:spPr>
-          <a:xfrm>
-            <a:off x="457200" y="2743200"/>
-            <a:ext cx="8229600" cy="3200400"/>
-          </a:xfrm>
-          <a:prstGeom prst="rect">
-            <a:avLst/>
-          </a:prstGeom>
-          <a:noFill/>
-          <a:ln/>
-        </p:spPr>
-        <p:txBody>
-          <a:bodyPr wrap="square" rtlCol="0" anchor="t"/>
-          <a:lstStyle/>
-          <a:p>
-            <a:pPr indent="0" marL="0">
-              <a:buNone/>
-            </a:pPr>
-            <a:r>
-              <a:rPr lang="en-US" sz="1600" dirty="0">
-                <a:solidFill>
-                  <a:srgbClr val="555555"/>
-                </a:solidFill>
-              </a:rPr>
-              <a:t>Critical Steps:</a:t>
-            </a:r>
-            <a:endParaRPr lang="en-US" sz="1600" dirty="0"/>
-          </a:p>
-          <a:p>
-            <a:r>
-              <a:rPr lang="en-US" sz="1600" dirty="0">
-                <a:solidFill>
-                  <a:srgbClr val="555555"/>
-                </a:solidFill>
-              </a:rPr>
-              <a:t>[ ] Within 1 hr: Call bank, report fraud</a:t>
-            </a:r>
-            <a:endParaRPr lang="en-US" sz="1600" dirty="0"/>
-          </a:p>
-          <a:p>
-            <a:r>
-              <a:rPr lang="en-US" sz="1600" dirty="0">
-                <a:solidFill>
-                  <a:srgbClr val="555555"/>
-                </a:solidFill>
-              </a:rPr>
-              <a:t>[ ] Within 24 hrs: cybercrime.gov.in complaint</a:t>
-            </a:r>
-            <a:endParaRPr lang="en-US" sz="1600" dirty="0"/>
-          </a:p>
-          <a:p>
-            <a:r>
-              <a:rPr lang="en-US" sz="1600" dirty="0">
-                <a:solidFill>
-                  <a:srgbClr val="555555"/>
-                </a:solidFill>
-              </a:rPr>
-              <a:t>[ ] Within 48 hrs: Police FIR (needed for claims)</a:t>
-            </a:r>
-            <a:endParaRPr lang="en-US" sz="1600" dirty="0"/>
-          </a:p>
-        </p:txBody>
-      </p:sp>
-      <p:sp>
-        <p:nvSpPr>
-          <p:cNvPr id="9" name="Text 7"/>
-          <p:cNvSpPr/>
-          <p:nvPr/>
-        </p:nvSpPr>
-        <p:spPr>
-          <a:xfrm>
-            <a:off x="8686800" y="4886325"/>
-            <a:ext cx="457200" cy="274320"/>
-          </a:xfrm>
-          <a:prstGeom prst="rect">
-            <a:avLst/>
-          </a:prstGeom>
-          <a:noFill/>
-          <a:ln/>
-        </p:spPr>
-        <p:txBody>
-          <a:bodyPr wrap="square" rtlCol="0" anchor="ctr"/>
-          <a:lstStyle/>
-          <a:p>
-            <a:pPr algn="r" indent="0" marL="0">
-              <a:buNone/>
-            </a:pPr>
-            <a:r>
-              <a:rPr lang="en-US" sz="1200" dirty="0">
-                <a:solidFill>
-                  <a:srgbClr val="999999"/>
-                </a:solidFill>
-              </a:rPr>
-              <a:t>21</a:t>
             </a:r>
             <a:endParaRPr lang="en-US" sz="1200" dirty="0"/>
           </a:p>
@@ -8598,7 +8346,7 @@
           <a:bodyPr wrap="square" rtlCol="0" anchor="ctr"/>
           <a:lstStyle/>
           <a:p>
-            <a:pPr indent="0" marL="0">
+            <a:pPr marL="0" indent="0">
               <a:buNone/>
             </a:pPr>
             <a:r>
@@ -8634,7 +8382,7 @@
           <a:bodyPr wrap="square" rtlCol="0" anchor="ctr"/>
           <a:lstStyle/>
           <a:p>
-            <a:pPr indent="0" marL="0">
+            <a:pPr marL="0" indent="0">
               <a:buNone/>
             </a:pPr>
             <a:r>
@@ -8670,7 +8418,7 @@
           <a:bodyPr wrap="square" rtlCol="0" anchor="t"/>
           <a:lstStyle/>
           <a:p>
-            <a:pPr indent="0" marL="0">
+            <a:pPr marL="0" indent="0">
               <a:buNone/>
             </a:pPr>
             <a:r>
@@ -8684,7 +8432,7 @@
             <a:endParaRPr lang="en-US" sz="1600" dirty="0"/>
           </a:p>
           <a:p>
-            <a:pPr indent="0" marL="0">
+            <a:pPr marL="0" indent="0">
               <a:buNone/>
             </a:pPr>
             <a:r>
@@ -8698,7 +8446,7 @@
             <a:endParaRPr lang="en-US" sz="1600" dirty="0"/>
           </a:p>
           <a:p>
-            <a:pPr indent="0" marL="0">
+            <a:pPr marL="0" indent="0">
               <a:buNone/>
             </a:pPr>
             <a:r>
@@ -8721,7 +8469,7 @@
         </p:nvSpPr>
         <p:spPr>
           <a:xfrm>
-            <a:off x="457200" y="1828800"/>
+            <a:off x="4800600" y="1254443"/>
             <a:ext cx="8229600" cy="365760"/>
           </a:xfrm>
           <a:prstGeom prst="rect">
@@ -8734,7 +8482,7 @@
           <a:bodyPr wrap="square" rtlCol="0" anchor="ctr"/>
           <a:lstStyle/>
           <a:p>
-            <a:pPr indent="0" marL="0">
+            <a:pPr marL="0" indent="0">
               <a:buNone/>
             </a:pPr>
             <a:r>
@@ -8757,7 +8505,7 @@
         </p:nvSpPr>
         <p:spPr>
           <a:xfrm>
-            <a:off x="457200" y="2286000"/>
+            <a:off x="5407051" y="2571750"/>
             <a:ext cx="8229600" cy="3200400"/>
           </a:xfrm>
           <a:prstGeom prst="rect">
@@ -8770,7 +8518,7 @@
           <a:bodyPr wrap="square" rtlCol="0" anchor="t"/>
           <a:lstStyle/>
           <a:p>
-            <a:pPr indent="0" marL="0">
+            <a:pPr marL="0" indent="0">
               <a:buNone/>
             </a:pPr>
             <a:r>
@@ -8784,7 +8532,7 @@
             <a:endParaRPr lang="en-US" sz="1600" dirty="0"/>
           </a:p>
           <a:p>
-            <a:pPr indent="0" marL="0">
+            <a:pPr marL="0" indent="0">
               <a:buNone/>
             </a:pPr>
             <a:r>
@@ -8798,7 +8546,7 @@
             <a:endParaRPr lang="en-US" sz="1600" dirty="0"/>
           </a:p>
           <a:p>
-            <a:pPr indent="0" marL="0">
+            <a:pPr marL="0" indent="0">
               <a:buNone/>
             </a:pPr>
             <a:r>
@@ -8821,7 +8569,7 @@
         </p:nvSpPr>
         <p:spPr>
           <a:xfrm>
-            <a:off x="457200" y="2286000"/>
+            <a:off x="4800600" y="4429125"/>
             <a:ext cx="8229600" cy="365760"/>
           </a:xfrm>
           <a:prstGeom prst="rect">
@@ -8834,7 +8582,7 @@
           <a:bodyPr wrap="square" rtlCol="0" anchor="ctr"/>
           <a:lstStyle/>
           <a:p>
-            <a:pPr indent="0" marL="0">
+            <a:pPr marL="0" indent="0">
               <a:buNone/>
             </a:pPr>
             <a:r>
@@ -8870,16 +8618,16 @@
           <a:bodyPr wrap="square" rtlCol="0" anchor="t"/>
           <a:lstStyle/>
           <a:p>
-            <a:pPr indent="0" marL="0">
-              <a:buNone/>
-            </a:pPr>
-            <a:r>
-              <a:rPr lang="en-US" sz="1600" dirty="0">
-                <a:solidFill>
-                  <a:srgbClr val="555555"/>
-                </a:solidFill>
-              </a:rPr>
-              <a:t>📞 155260</a:t>
+            <a:pPr marL="0" indent="0">
+              <a:buNone/>
+            </a:pPr>
+            <a:r>
+              <a:rPr lang="en-US" sz="1600" dirty="0">
+                <a:solidFill>
+                  <a:srgbClr val="555555"/>
+                </a:solidFill>
+              </a:rPr>
+              <a:t>📞 1930</a:t>
             </a:r>
             <a:endParaRPr lang="en-US" sz="1600" dirty="0"/>
           </a:p>
@@ -8917,16 +8665,16 @@
             <a:endParaRPr lang="en-US" sz="1600" dirty="0"/>
           </a:p>
           <a:p>
-            <a:pPr indent="0" marL="0">
-              <a:buNone/>
-            </a:pPr>
-            <a:r>
-              <a:rPr lang="en-US" sz="1600" dirty="0">
-                <a:solidFill>
-                  <a:srgbClr val="555555"/>
-                </a:solidFill>
-              </a:rPr>
-              <a:t>ACTION: Save 155260 NOW as "Cyber Fraud Helpline"</a:t>
+            <a:pPr marL="0" indent="0">
+              <a:buNone/>
+            </a:pPr>
+            <a:r>
+              <a:rPr lang="en-US" sz="1600" dirty="0">
+                <a:solidFill>
+                  <a:srgbClr val="555555"/>
+                </a:solidFill>
+              </a:rPr>
+              <a:t>ACTION: Save 1930 NOW as "Cyber Fraud Helpline"</a:t>
             </a:r>
             <a:endParaRPr lang="en-US" sz="1600" dirty="0"/>
           </a:p>
@@ -8953,7 +8701,7 @@
           <a:bodyPr wrap="square" rtlCol="0" anchor="ctr"/>
           <a:lstStyle/>
           <a:p>
-            <a:pPr algn="r" indent="0" marL="0">
+            <a:pPr marL="0" indent="0" algn="r">
               <a:buNone/>
             </a:pPr>
             <a:r>
@@ -9014,7 +8762,7 @@
           <a:bodyPr wrap="square" rtlCol="0" anchor="ctr"/>
           <a:lstStyle/>
           <a:p>
-            <a:pPr indent="0" marL="0">
+            <a:pPr marL="0" indent="0">
               <a:buNone/>
             </a:pPr>
             <a:r>
@@ -9050,7 +8798,7 @@
           <a:bodyPr wrap="square" rtlCol="0" anchor="ctr"/>
           <a:lstStyle/>
           <a:p>
-            <a:pPr indent="0" marL="0">
+            <a:pPr marL="0" indent="0">
               <a:buNone/>
             </a:pPr>
             <a:r>
@@ -9086,7 +8834,7 @@
           <a:bodyPr wrap="square" rtlCol="0" anchor="t"/>
           <a:lstStyle/>
           <a:p>
-            <a:pPr indent="0" marL="0">
+            <a:pPr marL="0" indent="0">
               <a:buNone/>
             </a:pPr>
             <a:r>
@@ -9144,7 +8892,7 @@
             <a:endParaRPr lang="en-US" sz="1600" dirty="0"/>
           </a:p>
           <a:p>
-            <a:pPr indent="0" marL="0">
+            <a:pPr marL="0" indent="0">
               <a:buNone/>
             </a:pPr>
             <a:r>
@@ -9167,7 +8915,7 @@
         </p:nvSpPr>
         <p:spPr>
           <a:xfrm>
-            <a:off x="457200" y="1828800"/>
+            <a:off x="4726919" y="1305878"/>
             <a:ext cx="8229600" cy="365760"/>
           </a:xfrm>
           <a:prstGeom prst="rect">
@@ -9180,7 +8928,7 @@
           <a:bodyPr wrap="square" rtlCol="0" anchor="ctr"/>
           <a:lstStyle/>
           <a:p>
-            <a:pPr indent="0" marL="0">
+            <a:pPr marL="0" indent="0">
               <a:buNone/>
             </a:pPr>
             <a:r>
@@ -9203,7 +8951,7 @@
         </p:nvSpPr>
         <p:spPr>
           <a:xfrm>
-            <a:off x="457200" y="2286000"/>
+            <a:off x="457200" y="3657600"/>
             <a:ext cx="8229600" cy="3200400"/>
           </a:xfrm>
           <a:prstGeom prst="rect">
@@ -9216,7 +8964,7 @@
           <a:bodyPr wrap="square" rtlCol="0" anchor="t"/>
           <a:lstStyle/>
           <a:p>
-            <a:pPr indent="0" marL="0">
+            <a:pPr marL="0" indent="0">
               <a:buNone/>
             </a:pPr>
             <a:r>
@@ -9283,7 +9031,7 @@
         </p:nvSpPr>
         <p:spPr>
           <a:xfrm>
-            <a:off x="457200" y="2286000"/>
+            <a:off x="4800600" y="4017645"/>
             <a:ext cx="8229600" cy="365760"/>
           </a:xfrm>
           <a:prstGeom prst="rect">
@@ -9296,7 +9044,7 @@
           <a:bodyPr wrap="square" rtlCol="0" anchor="ctr"/>
           <a:lstStyle/>
           <a:p>
-            <a:pPr indent="0" marL="0">
+            <a:pPr marL="0" indent="0">
               <a:buNone/>
             </a:pPr>
             <a:r>
@@ -9319,7 +9067,7 @@
         </p:nvSpPr>
         <p:spPr>
           <a:xfrm>
-            <a:off x="457200" y="2743200"/>
+            <a:off x="5837801" y="2286000"/>
             <a:ext cx="8229600" cy="3200400"/>
           </a:xfrm>
           <a:prstGeom prst="rect">
@@ -9332,7 +9080,7 @@
           <a:bodyPr wrap="square" rtlCol="0" anchor="t"/>
           <a:lstStyle/>
           <a:p>
-            <a:pPr indent="0" marL="0">
+            <a:pPr marL="0" indent="0">
               <a:buNone/>
             </a:pPr>
             <a:r>
@@ -9352,7 +9100,7 @@
                   <a:srgbClr val="555555"/>
                 </a:solidFill>
               </a:rPr>
-              <a:t>[ ] 155260 - Cyber Fraud Helpline</a:t>
+              <a:t>[ ] 1930 - Cyber Fraud Helpline</a:t>
             </a:r>
             <a:endParaRPr lang="en-US" sz="1600" dirty="0"/>
           </a:p>
@@ -9401,7 +9149,7 @@
           <a:bodyPr wrap="square" rtlCol="0" anchor="ctr"/>
           <a:lstStyle/>
           <a:p>
-            <a:pPr algn="r" indent="0" marL="0">
+            <a:pPr marL="0" indent="0" algn="r">
               <a:buNone/>
             </a:pPr>
             <a:r>
@@ -9425,6 +9173,427 @@
 </file>
 
 <file path=ppt/slides/slide25.xml><?xml version="1.0" encoding="utf-8"?>
+<p:sld xmlns:a="http://schemas.openxmlformats.org/drawingml/2006/main" xmlns:r="http://schemas.openxmlformats.org/officeDocument/2006/relationships" xmlns:p="http://schemas.openxmlformats.org/presentationml/2006/main">
+  <p:cSld name="Slide 22">
+    <p:spTree>
+      <p:nvGrpSpPr>
+        <p:cNvPr id="1" name=""/>
+        <p:cNvGrpSpPr/>
+        <p:nvPr/>
+      </p:nvGrpSpPr>
+      <p:grpSpPr>
+        <a:xfrm>
+          <a:off x="0" y="0"/>
+          <a:ext cx="0" cy="0"/>
+          <a:chOff x="0" y="0"/>
+          <a:chExt cx="0" cy="0"/>
+        </a:xfrm>
+      </p:grpSpPr>
+      <p:sp>
+        <p:nvSpPr>
+          <p:cNvPr id="2" name="Text 0"/>
+          <p:cNvSpPr/>
+          <p:nvPr/>
+        </p:nvSpPr>
+        <p:spPr>
+          <a:xfrm>
+            <a:off x="457200" y="457200"/>
+            <a:ext cx="8229600" cy="685800"/>
+          </a:xfrm>
+          <a:prstGeom prst="rect">
+            <a:avLst/>
+          </a:prstGeom>
+          <a:noFill/>
+          <a:ln/>
+        </p:spPr>
+        <p:txBody>
+          <a:bodyPr wrap="square" rtlCol="0" anchor="ctr"/>
+          <a:lstStyle/>
+          <a:p>
+            <a:pPr marL="0" indent="0">
+              <a:buNone/>
+            </a:pPr>
+            <a:r>
+              <a:rPr lang="en-US" sz="2800" b="1" dirty="0">
+                <a:solidFill>
+                  <a:srgbClr val="363636"/>
+                </a:solidFill>
+              </a:rPr>
+              <a:t>If You Suspect Fraud</a:t>
+            </a:r>
+            <a:endParaRPr lang="en-US" sz="2800" dirty="0"/>
+          </a:p>
+        </p:txBody>
+      </p:sp>
+      <p:sp>
+        <p:nvSpPr>
+          <p:cNvPr id="3" name="Text 1"/>
+          <p:cNvSpPr/>
+          <p:nvPr/>
+        </p:nvSpPr>
+        <p:spPr>
+          <a:xfrm>
+            <a:off x="457200" y="1371600"/>
+            <a:ext cx="8229600" cy="365760"/>
+          </a:xfrm>
+          <a:prstGeom prst="rect">
+            <a:avLst/>
+          </a:prstGeom>
+          <a:noFill/>
+          <a:ln/>
+        </p:spPr>
+        <p:txBody>
+          <a:bodyPr wrap="square" rtlCol="0" anchor="ctr"/>
+          <a:lstStyle/>
+          <a:p>
+            <a:pPr marL="0" indent="0">
+              <a:buNone/>
+            </a:pPr>
+            <a:r>
+              <a:rPr lang="en-US" sz="2000" b="1" dirty="0">
+                <a:solidFill>
+                  <a:srgbClr val="444444"/>
+                </a:solidFill>
+              </a:rPr>
+              <a:t>Immediate Actions</a:t>
+            </a:r>
+            <a:endParaRPr lang="en-US" sz="2000" dirty="0"/>
+          </a:p>
+        </p:txBody>
+      </p:sp>
+      <p:sp>
+        <p:nvSpPr>
+          <p:cNvPr id="4" name="Text 2"/>
+          <p:cNvSpPr/>
+          <p:nvPr/>
+        </p:nvSpPr>
+        <p:spPr>
+          <a:xfrm>
+            <a:off x="457200" y="1828800"/>
+            <a:ext cx="8229600" cy="3200400"/>
+          </a:xfrm>
+          <a:prstGeom prst="rect">
+            <a:avLst/>
+          </a:prstGeom>
+          <a:noFill/>
+          <a:ln/>
+        </p:spPr>
+        <p:txBody>
+          <a:bodyPr wrap="square" rtlCol="0" anchor="t"/>
+          <a:lstStyle/>
+          <a:p>
+            <a:pPr marL="0" indent="0">
+              <a:buNone/>
+            </a:pPr>
+            <a:r>
+              <a:rPr lang="en-US" sz="1600" dirty="0">
+                <a:solidFill>
+                  <a:srgbClr val="555555"/>
+                </a:solidFill>
+              </a:rPr>
+              <a:t>First Steps:</a:t>
+            </a:r>
+            <a:endParaRPr lang="en-US" sz="1600" dirty="0"/>
+          </a:p>
+          <a:p>
+            <a:pPr marL="0" indent="0">
+              <a:buNone/>
+            </a:pPr>
+            <a:r>
+              <a:rPr lang="en-US" sz="1600" dirty="0">
+                <a:solidFill>
+                  <a:srgbClr val="555555"/>
+                </a:solidFill>
+              </a:rPr>
+              <a:t>1. [ ] Login to bank app (NOT via link) - check balance/transactions</a:t>
+            </a:r>
+            <a:endParaRPr lang="en-US" sz="1600" dirty="0"/>
+          </a:p>
+          <a:p>
+            <a:pPr marL="0" indent="0">
+              <a:buNone/>
+            </a:pPr>
+            <a:r>
+              <a:rPr lang="en-US" sz="1600" dirty="0">
+                <a:solidFill>
+                  <a:srgbClr val="555555"/>
+                </a:solidFill>
+              </a:rPr>
+              <a:t>2. [ ] Disable/reduce limits - Block card OR reduce to ₹100</a:t>
+            </a:r>
+            <a:endParaRPr lang="en-US" sz="1600" dirty="0"/>
+          </a:p>
+          <a:p>
+            <a:pPr marL="0" indent="0">
+              <a:buNone/>
+            </a:pPr>
+            <a:r>
+              <a:rPr lang="en-US" sz="1600" dirty="0">
+                <a:solidFill>
+                  <a:srgbClr val="555555"/>
+                </a:solidFill>
+              </a:rPr>
+              <a:t>3. [ ] Call bank - Number on YOUR card (not from email/Google)</a:t>
+            </a:r>
+            <a:endParaRPr lang="en-US" sz="1600" dirty="0"/>
+          </a:p>
+        </p:txBody>
+      </p:sp>
+      <p:sp>
+        <p:nvSpPr>
+          <p:cNvPr id="5" name="Text 3"/>
+          <p:cNvSpPr/>
+          <p:nvPr/>
+        </p:nvSpPr>
+        <p:spPr>
+          <a:xfrm>
+            <a:off x="6041842" y="4200525"/>
+            <a:ext cx="8229600" cy="365760"/>
+          </a:xfrm>
+          <a:prstGeom prst="rect">
+            <a:avLst/>
+          </a:prstGeom>
+          <a:noFill/>
+          <a:ln/>
+        </p:spPr>
+        <p:txBody>
+          <a:bodyPr wrap="square" rtlCol="0" anchor="ctr"/>
+          <a:lstStyle/>
+          <a:p>
+            <a:pPr marL="0" indent="0">
+              <a:buNone/>
+            </a:pPr>
+            <a:r>
+              <a:rPr lang="en-US" sz="2000" b="1" dirty="0">
+                <a:solidFill>
+                  <a:srgbClr val="444444"/>
+                </a:solidFill>
+              </a:rPr>
+              <a:t>Timing = Recovery</a:t>
+            </a:r>
+            <a:endParaRPr lang="en-US" sz="2000" dirty="0"/>
+          </a:p>
+        </p:txBody>
+      </p:sp>
+      <p:sp>
+        <p:nvSpPr>
+          <p:cNvPr id="6" name="Text 4"/>
+          <p:cNvSpPr/>
+          <p:nvPr/>
+        </p:nvSpPr>
+        <p:spPr>
+          <a:xfrm>
+            <a:off x="6359237" y="2739421"/>
+            <a:ext cx="8229600" cy="3200400"/>
+          </a:xfrm>
+          <a:prstGeom prst="rect">
+            <a:avLst/>
+          </a:prstGeom>
+          <a:noFill/>
+          <a:ln/>
+        </p:spPr>
+        <p:txBody>
+          <a:bodyPr wrap="square" rtlCol="0" anchor="t"/>
+          <a:lstStyle/>
+          <a:p>
+            <a:pPr marL="0" indent="0">
+              <a:buNone/>
+            </a:pPr>
+            <a:r>
+              <a:rPr lang="en-US" sz="1600" dirty="0">
+                <a:solidFill>
+                  <a:srgbClr val="555555"/>
+                </a:solidFill>
+              </a:rPr>
+              <a:t>Recovery Rates:</a:t>
+            </a:r>
+            <a:endParaRPr lang="en-US" sz="1600" dirty="0"/>
+          </a:p>
+          <a:p>
+            <a:r>
+              <a:rPr lang="en-US" sz="1600" dirty="0">
+                <a:solidFill>
+                  <a:srgbClr val="555555"/>
+                </a:solidFill>
+              </a:rPr>
+              <a:t>Within 1 hour: Card 80-90% | UPI 20-30%</a:t>
+            </a:r>
+            <a:endParaRPr lang="en-US" sz="1600" dirty="0"/>
+          </a:p>
+          <a:p>
+            <a:r>
+              <a:rPr lang="en-US" sz="1600" dirty="0">
+                <a:solidFill>
+                  <a:srgbClr val="555555"/>
+                </a:solidFill>
+              </a:rPr>
+              <a:t>After 24 hours: Card 70% | UPI 5-10%</a:t>
+            </a:r>
+            <a:endParaRPr lang="en-US" sz="1600" dirty="0"/>
+          </a:p>
+          <a:p>
+            <a:r>
+              <a:rPr lang="en-US" sz="1600" dirty="0">
+                <a:solidFill>
+                  <a:srgbClr val="555555"/>
+                </a:solidFill>
+              </a:rPr>
+              <a:t>After 1 week: &lt;5% (money gone)</a:t>
+            </a:r>
+            <a:endParaRPr lang="en-US" sz="1600" dirty="0"/>
+          </a:p>
+        </p:txBody>
+      </p:sp>
+      <p:sp>
+        <p:nvSpPr>
+          <p:cNvPr id="7" name="Text 5"/>
+          <p:cNvSpPr/>
+          <p:nvPr/>
+        </p:nvSpPr>
+        <p:spPr>
+          <a:xfrm>
+            <a:off x="6359237" y="803879"/>
+            <a:ext cx="8229600" cy="365760"/>
+          </a:xfrm>
+          <a:prstGeom prst="rect">
+            <a:avLst/>
+          </a:prstGeom>
+          <a:noFill/>
+          <a:ln/>
+        </p:spPr>
+        <p:txBody>
+          <a:bodyPr wrap="square" rtlCol="0" anchor="ctr"/>
+          <a:lstStyle/>
+          <a:p>
+            <a:pPr marL="0" indent="0">
+              <a:buNone/>
+            </a:pPr>
+            <a:r>
+              <a:rPr lang="en-US" sz="2000" b="1" dirty="0">
+                <a:solidFill>
+                  <a:srgbClr val="444444"/>
+                </a:solidFill>
+              </a:rPr>
+              <a:t>If Money Gone</a:t>
+            </a:r>
+            <a:endParaRPr lang="en-US" sz="2000" dirty="0"/>
+          </a:p>
+        </p:txBody>
+      </p:sp>
+      <p:sp>
+        <p:nvSpPr>
+          <p:cNvPr id="8" name="Text 6"/>
+          <p:cNvSpPr/>
+          <p:nvPr/>
+        </p:nvSpPr>
+        <p:spPr>
+          <a:xfrm>
+            <a:off x="457200" y="4027894"/>
+            <a:ext cx="8229600" cy="3200400"/>
+          </a:xfrm>
+          <a:prstGeom prst="rect">
+            <a:avLst/>
+          </a:prstGeom>
+          <a:noFill/>
+          <a:ln/>
+        </p:spPr>
+        <p:txBody>
+          <a:bodyPr wrap="square" rtlCol="0" anchor="t"/>
+          <a:lstStyle/>
+          <a:p>
+            <a:pPr marL="0" indent="0">
+              <a:buNone/>
+            </a:pPr>
+            <a:r>
+              <a:rPr lang="en-US" sz="1600" dirty="0">
+                <a:solidFill>
+                  <a:srgbClr val="555555"/>
+                </a:solidFill>
+              </a:rPr>
+              <a:t>Critical Steps:</a:t>
+            </a:r>
+            <a:endParaRPr lang="en-US" sz="1600" dirty="0"/>
+          </a:p>
+          <a:p>
+            <a:r>
+              <a:rPr lang="en-US" sz="1600" dirty="0">
+                <a:solidFill>
+                  <a:srgbClr val="555555"/>
+                </a:solidFill>
+              </a:rPr>
+              <a:t>[ ] Within 1 hr: Call bank, report fraud</a:t>
+            </a:r>
+            <a:endParaRPr lang="en-US" sz="1600" dirty="0"/>
+          </a:p>
+          <a:p>
+            <a:r>
+              <a:rPr lang="en-US" sz="1600" dirty="0">
+                <a:solidFill>
+                  <a:srgbClr val="555555"/>
+                </a:solidFill>
+              </a:rPr>
+              <a:t>[ ] Within 24 hrs: cybercrime.gov.in complaint</a:t>
+            </a:r>
+            <a:endParaRPr lang="en-US" sz="1600" dirty="0"/>
+          </a:p>
+          <a:p>
+            <a:r>
+              <a:rPr lang="en-US" sz="1600" dirty="0">
+                <a:solidFill>
+                  <a:srgbClr val="555555"/>
+                </a:solidFill>
+              </a:rPr>
+              <a:t>[ ] Within 48 hrs: Police FIR (needed for claims)</a:t>
+            </a:r>
+            <a:endParaRPr lang="en-US" sz="1600" dirty="0"/>
+          </a:p>
+        </p:txBody>
+      </p:sp>
+      <p:sp>
+        <p:nvSpPr>
+          <p:cNvPr id="9" name="Text 7"/>
+          <p:cNvSpPr/>
+          <p:nvPr/>
+        </p:nvSpPr>
+        <p:spPr>
+          <a:xfrm>
+            <a:off x="8686800" y="4886325"/>
+            <a:ext cx="457200" cy="274320"/>
+          </a:xfrm>
+          <a:prstGeom prst="rect">
+            <a:avLst/>
+          </a:prstGeom>
+          <a:noFill/>
+          <a:ln/>
+        </p:spPr>
+        <p:txBody>
+          <a:bodyPr wrap="square" rtlCol="0" anchor="ctr"/>
+          <a:lstStyle/>
+          <a:p>
+            <a:pPr marL="0" indent="0" algn="r">
+              <a:buNone/>
+            </a:pPr>
+            <a:r>
+              <a:rPr lang="en-US" sz="1200" dirty="0">
+                <a:solidFill>
+                  <a:srgbClr val="999999"/>
+                </a:solidFill>
+              </a:rPr>
+              <a:t>21</a:t>
+            </a:r>
+            <a:endParaRPr lang="en-US" sz="1200" dirty="0"/>
+          </a:p>
+        </p:txBody>
+      </p:sp>
+    </p:spTree>
+  </p:cSld>
+  <p:clrMapOvr>
+    <a:masterClrMapping/>
+  </p:clrMapOvr>
+</p:sld>
+</file>
+
+<file path=ppt/slides/slide26.xml><?xml version="1.0" encoding="utf-8"?>
 <p:sld xmlns:a="http://schemas.openxmlformats.org/drawingml/2006/main" xmlns:r="http://schemas.openxmlformats.org/officeDocument/2006/relationships" xmlns:p="http://schemas.openxmlformats.org/presentationml/2006/main">
   <p:cSld name="Slide 25">
     <p:spTree>
@@ -9462,7 +9631,7 @@
           <a:bodyPr wrap="square" rtlCol="0" anchor="ctr"/>
           <a:lstStyle/>
           <a:p>
-            <a:pPr indent="0" marL="0">
+            <a:pPr marL="0" indent="0">
               <a:buNone/>
             </a:pPr>
             <a:r>
@@ -9498,7 +9667,7 @@
           <a:bodyPr wrap="square" rtlCol="0" anchor="ctr"/>
           <a:lstStyle/>
           <a:p>
-            <a:pPr indent="0" marL="0">
+            <a:pPr marL="0" indent="0">
               <a:buNone/>
             </a:pPr>
             <a:r>
@@ -9534,21 +9703,21 @@
           <a:bodyPr wrap="square" rtlCol="0" anchor="t"/>
           <a:lstStyle/>
           <a:p>
-            <a:pPr indent="0" marL="0">
-              <a:buNone/>
-            </a:pPr>
-            <a:r>
-              <a:rPr lang="en-US" sz="1600" dirty="0">
-                <a:solidFill>
-                  <a:srgbClr val="555555"/>
-                </a:solidFill>
-              </a:rPr>
-              <a:t>📞 155260 - National Cyber Crime Helpline</a:t>
-            </a:r>
-            <a:endParaRPr lang="en-US" sz="1600" dirty="0"/>
-          </a:p>
-          <a:p>
-            <a:pPr indent="0" marL="0">
+            <a:pPr marL="0" indent="0">
+              <a:buNone/>
+            </a:pPr>
+            <a:r>
+              <a:rPr lang="en-US" sz="1600" dirty="0">
+                <a:solidFill>
+                  <a:srgbClr val="555555"/>
+                </a:solidFill>
+              </a:rPr>
+              <a:t>📞 1930 - National Cyber Crime Helpline</a:t>
+            </a:r>
+            <a:endParaRPr lang="en-US" sz="1600" dirty="0"/>
+          </a:p>
+          <a:p>
+            <a:pPr marL="0" indent="0">
               <a:buNone/>
             </a:pPr>
             <a:r>
@@ -9571,7 +9740,7 @@
         </p:nvSpPr>
         <p:spPr>
           <a:xfrm>
-            <a:off x="457200" y="1828800"/>
+            <a:off x="5709332" y="688658"/>
             <a:ext cx="8229600" cy="365760"/>
           </a:xfrm>
           <a:prstGeom prst="rect">
@@ -9584,7 +9753,7 @@
           <a:bodyPr wrap="square" rtlCol="0" anchor="ctr"/>
           <a:lstStyle/>
           <a:p>
-            <a:pPr indent="0" marL="0">
+            <a:pPr marL="0" indent="0">
               <a:buNone/>
             </a:pPr>
             <a:r>
@@ -9620,7 +9789,7 @@
           <a:bodyPr wrap="square" rtlCol="0" anchor="t"/>
           <a:lstStyle/>
           <a:p>
-            <a:pPr indent="0" marL="0">
+            <a:pPr marL="0" indent="0">
               <a:buNone/>
             </a:pPr>
             <a:r>
@@ -9634,7 +9803,7 @@
             <a:endParaRPr lang="en-US" sz="1600" dirty="0"/>
           </a:p>
           <a:p>
-            <a:pPr indent="0" marL="0">
+            <a:pPr marL="0" indent="0">
               <a:buNone/>
             </a:pPr>
             <a:r>
@@ -9657,7 +9826,7 @@
         </p:nvSpPr>
         <p:spPr>
           <a:xfrm>
-            <a:off x="457200" y="2286000"/>
+            <a:off x="6691746" y="1777365"/>
             <a:ext cx="8229600" cy="365760"/>
           </a:xfrm>
           <a:prstGeom prst="rect">
@@ -9670,7 +9839,7 @@
           <a:bodyPr wrap="square" rtlCol="0" anchor="ctr"/>
           <a:lstStyle/>
           <a:p>
-            <a:pPr indent="0" marL="0">
+            <a:pPr marL="0" indent="0">
               <a:buNone/>
             </a:pPr>
             <a:r>
@@ -9693,7 +9862,7 @@
         </p:nvSpPr>
         <p:spPr>
           <a:xfrm>
-            <a:off x="457200" y="2743200"/>
+            <a:off x="540328" y="3086100"/>
             <a:ext cx="8229600" cy="3200400"/>
           </a:xfrm>
           <a:prstGeom prst="rect">
@@ -9706,7 +9875,7 @@
           <a:bodyPr wrap="square" rtlCol="0" anchor="t"/>
           <a:lstStyle/>
           <a:p>
-            <a:pPr indent="0" marL="0">
+            <a:pPr marL="0" indent="0">
               <a:buNone/>
             </a:pPr>
             <a:r>
@@ -9720,7 +9889,7 @@
             <a:endParaRPr lang="en-US" sz="1600" dirty="0"/>
           </a:p>
           <a:p>
-            <a:pPr indent="0" marL="0">
+            <a:pPr marL="0" indent="0">
               <a:buNone/>
             </a:pPr>
             <a:r>
@@ -9743,7 +9912,7 @@
         </p:nvSpPr>
         <p:spPr>
           <a:xfrm>
-            <a:off x="457200" y="2743200"/>
+            <a:off x="6056955" y="3697605"/>
             <a:ext cx="8229600" cy="365760"/>
           </a:xfrm>
           <a:prstGeom prst="rect">
@@ -9756,7 +9925,7 @@
           <a:bodyPr wrap="square" rtlCol="0" anchor="ctr"/>
           <a:lstStyle/>
           <a:p>
-            <a:pPr indent="0" marL="0">
+            <a:pPr marL="0" indent="0">
               <a:buNone/>
             </a:pPr>
             <a:r>
@@ -9768,97 +9937,6 @@
               <a:t>Verification Resources</a:t>
             </a:r>
             <a:endParaRPr lang="en-US" sz="2000" dirty="0"/>
-          </a:p>
-        </p:txBody>
-      </p:sp>
-      <p:sp>
-        <p:nvSpPr>
-          <p:cNvPr id="10" name="Text 8"/>
-          <p:cNvSpPr/>
-          <p:nvPr/>
-        </p:nvSpPr>
-        <p:spPr>
-          <a:xfrm>
-            <a:off x="457200" y="3200400"/>
-            <a:ext cx="8229600" cy="3200400"/>
-          </a:xfrm>
-          <a:prstGeom prst="rect">
-            <a:avLst/>
-          </a:prstGeom>
-          <a:noFill/>
-          <a:ln/>
-        </p:spPr>
-        <p:txBody>
-          <a:bodyPr wrap="square" rtlCol="0" anchor="t"/>
-          <a:lstStyle/>
-          <a:p>
-            <a:pPr indent="0" marL="0">
-              <a:buNone/>
-            </a:pPr>
-            <a:r>
-              <a:rPr lang="en-US" sz="1600" dirty="0">
-                <a:solidFill>
-                  <a:srgbClr val="555555"/>
-                </a:solidFill>
-              </a:rPr>
-              <a:t>🔍 Important Links:</a:t>
-            </a:r>
-            <a:endParaRPr lang="en-US" sz="1600" dirty="0"/>
-          </a:p>
-          <a:p>
-            <a:r>
-              <a:rPr lang="en-US" sz="1600" dirty="0">
-                <a:solidFill>
-                  <a:srgbClr val="555555"/>
-                </a:solidFill>
-              </a:rPr>
-              <a:t>sebi.gov.in - Verify investments</a:t>
-            </a:r>
-            <a:endParaRPr lang="en-US" sz="1600" dirty="0"/>
-          </a:p>
-          <a:p>
-            <a:r>
-              <a:rPr lang="en-US" sz="1600" dirty="0">
-                <a:solidFill>
-                  <a:srgbClr val="555555"/>
-                </a:solidFill>
-              </a:rPr>
-              <a:t>cibil.com - Free annual credit report</a:t>
-            </a:r>
-            <a:endParaRPr lang="en-US" sz="1600" dirty="0"/>
-          </a:p>
-          <a:p>
-            <a:r>
-              <a:rPr lang="en-US" sz="1600" dirty="0">
-                <a:solidFill>
-                  <a:srgbClr val="555555"/>
-                </a:solidFill>
-              </a:rPr>
-              <a:t>sancharsaathi.gov.in - Check/block SIMs</a:t>
-            </a:r>
-            <a:endParaRPr lang="en-US" sz="1600" dirty="0"/>
-          </a:p>
-          <a:p>
-            <a:r>
-              <a:rPr lang="en-US" sz="1600" dirty="0">
-                <a:solidFill>
-                  <a:srgbClr val="555555"/>
-                </a:solidFill>
-              </a:rPr>
-              <a:t>deepware.ai - Detect video deepfakes</a:t>
-            </a:r>
-            <a:endParaRPr lang="en-US" sz="1600" dirty="0"/>
-          </a:p>
-          <a:p>
-            <a:r>
-              <a:rPr lang="en-US" sz="1600" dirty="0">
-                <a:solidFill>
-                  <a:srgbClr val="555555"/>
-                </a:solidFill>
-              </a:rPr>
-              <a:t>resemble.ai - Detect audio deepfakes</a:t>
-            </a:r>
-            <a:endParaRPr lang="en-US" sz="1600" dirty="0"/>
           </a:p>
         </p:txBody>
       </p:sp>
@@ -9883,7 +9961,7 @@
           <a:bodyPr wrap="square" rtlCol="0" anchor="ctr"/>
           <a:lstStyle/>
           <a:p>
-            <a:pPr algn="r" indent="0" marL="0">
+            <a:pPr marL="0" indent="0" algn="r">
               <a:buNone/>
             </a:pPr>
             <a:r>
@@ -9906,7 +9984,7 @@
 </p:sld>
 </file>
 
-<file path=ppt/slides/slide26.xml><?xml version="1.0" encoding="utf-8"?>
+<file path=ppt/slides/slide27.xml><?xml version="1.0" encoding="utf-8"?>
 <p:sld xmlns:a="http://schemas.openxmlformats.org/drawingml/2006/main" xmlns:r="http://schemas.openxmlformats.org/officeDocument/2006/relationships" xmlns:p="http://schemas.openxmlformats.org/presentationml/2006/main">
   <p:cSld name="Slide 26">
     <p:spTree>
@@ -9944,7 +10022,7 @@
           <a:bodyPr wrap="square" rtlCol="0" anchor="ctr"/>
           <a:lstStyle/>
           <a:p>
-            <a:pPr indent="0" marL="0">
+            <a:pPr marL="0" indent="0">
               <a:buNone/>
             </a:pPr>
             <a:r>
@@ -9967,7 +10045,7 @@
         </p:nvSpPr>
         <p:spPr>
           <a:xfrm>
-            <a:off x="457200" y="1371600"/>
+            <a:off x="2089517" y="1005840"/>
             <a:ext cx="8229600" cy="365760"/>
           </a:xfrm>
           <a:prstGeom prst="rect">
@@ -9980,7 +10058,7 @@
           <a:bodyPr wrap="square" rtlCol="0" anchor="ctr"/>
           <a:lstStyle/>
           <a:p>
-            <a:pPr indent="0" marL="0">
+            <a:pPr marL="0" indent="0">
               <a:buNone/>
             </a:pPr>
             <a:r>
@@ -10016,7 +10094,7 @@
           <a:bodyPr wrap="square" rtlCol="0" anchor="t"/>
           <a:lstStyle/>
           <a:p>
-            <a:pPr indent="0" marL="0">
+            <a:pPr marL="0" indent="0">
               <a:buNone/>
             </a:pPr>
             <a:r>
@@ -10058,7 +10136,7 @@
                   <a:srgbClr val="555555"/>
                 </a:solidFill>
               </a:rPr>
-              <a:t>[ ] Save 155260 in contacts</a:t>
+              <a:t>[ ] Save 1930 in contacts</a:t>
             </a:r>
             <a:endParaRPr lang="en-US" sz="1600" dirty="0"/>
           </a:p>
@@ -10094,7 +10172,7 @@
         </p:nvSpPr>
         <p:spPr>
           <a:xfrm>
-            <a:off x="457200" y="1828800"/>
+            <a:off x="6306337" y="1950468"/>
             <a:ext cx="8229600" cy="365760"/>
           </a:xfrm>
           <a:prstGeom prst="rect">
@@ -10107,7 +10185,7 @@
           <a:bodyPr wrap="square" rtlCol="0" anchor="ctr"/>
           <a:lstStyle/>
           <a:p>
-            <a:pPr indent="0" marL="0">
+            <a:pPr marL="0" indent="0">
               <a:buNone/>
             </a:pPr>
             <a:r>
@@ -10130,7 +10208,7 @@
         </p:nvSpPr>
         <p:spPr>
           <a:xfrm>
-            <a:off x="457200" y="2286000"/>
+            <a:off x="5951157" y="2694080"/>
             <a:ext cx="8229600" cy="3200400"/>
           </a:xfrm>
           <a:prstGeom prst="rect">
@@ -10143,7 +10221,7 @@
           <a:bodyPr wrap="square" rtlCol="0" anchor="t"/>
           <a:lstStyle/>
           <a:p>
-            <a:pPr indent="0" marL="0">
+            <a:pPr marL="0" indent="0">
               <a:buNone/>
             </a:pPr>
             <a:r>
@@ -10201,7 +10279,7 @@
             <a:endParaRPr lang="en-US" sz="1600" dirty="0"/>
           </a:p>
           <a:p>
-            <a:pPr indent="0" marL="0">
+            <a:pPr marL="0" indent="0">
               <a:buNone/>
             </a:pPr>
             <a:r>
@@ -10215,7 +10293,7 @@
             <a:endParaRPr lang="en-US" sz="1600" dirty="0"/>
           </a:p>
           <a:p>
-            <a:pPr indent="0" marL="0">
+            <a:pPr marL="0" indent="0">
               <a:buNone/>
             </a:pPr>
             <a:r>
@@ -10229,7 +10307,7 @@
             <a:endParaRPr lang="en-US" sz="1600" dirty="0"/>
           </a:p>
           <a:p>
-            <a:pPr indent="0" marL="0">
+            <a:pPr marL="0" indent="0">
               <a:buNone/>
             </a:pPr>
             <a:r>
@@ -10243,7 +10321,7 @@
             <a:endParaRPr lang="en-US" sz="1600" dirty="0"/>
           </a:p>
           <a:p>
-            <a:pPr indent="0" marL="0">
+            <a:pPr marL="0" indent="0">
               <a:buNone/>
             </a:pPr>
             <a:r>
@@ -10279,7 +10357,7 @@
           <a:bodyPr wrap="square" rtlCol="0" anchor="ctr"/>
           <a:lstStyle/>
           <a:p>
-            <a:pPr algn="r" indent="0" marL="0">
+            <a:pPr marL="0" indent="0" algn="r">
               <a:buNone/>
             </a:pPr>
             <a:r>
@@ -10302,7 +10380,7 @@
 </p:sld>
 </file>
 
-<file path=ppt/slides/slide27.xml><?xml version="1.0" encoding="utf-8"?>
+<file path=ppt/slides/slide28.xml><?xml version="1.0" encoding="utf-8"?>
 <p:sld xmlns:a="http://schemas.openxmlformats.org/drawingml/2006/main" xmlns:r="http://schemas.openxmlformats.org/officeDocument/2006/relationships" xmlns:p="http://schemas.openxmlformats.org/presentationml/2006/main">
   <p:cSld name="Slide 27">
     <p:spTree>
@@ -10340,7 +10418,7 @@
           <a:bodyPr wrap="square" rtlCol="0" anchor="ctr"/>
           <a:lstStyle/>
           <a:p>
-            <a:pPr indent="0" marL="0">
+            <a:pPr marL="0" indent="0">
               <a:buNone/>
             </a:pPr>
             <a:r>
@@ -10376,7 +10454,7 @@
           <a:bodyPr wrap="square" rtlCol="0" anchor="ctr"/>
           <a:lstStyle/>
           <a:p>
-            <a:pPr indent="0" marL="0">
+            <a:pPr marL="0" indent="0">
               <a:buNone/>
             </a:pPr>
             <a:r>
@@ -10385,7 +10463,7 @@
                   <a:srgbClr val="444444"/>
                 </a:solidFill>
               </a:rPr>
-              <a:t>Rules That Prevent 95% of Scams</a:t>
+              <a:t>Rules That Prevent 99% of Scams</a:t>
             </a:r>
             <a:endParaRPr lang="en-US" sz="2000" dirty="0"/>
           </a:p>
@@ -10412,7 +10490,7 @@
           <a:bodyPr wrap="square" rtlCol="0" anchor="t"/>
           <a:lstStyle/>
           <a:p>
-            <a:pPr indent="0" marL="0">
+            <a:pPr marL="0" indent="0">
               <a:buNone/>
             </a:pPr>
             <a:r>
@@ -10426,7 +10504,7 @@
             <a:endParaRPr lang="en-US" sz="1600" dirty="0"/>
           </a:p>
           <a:p>
-            <a:pPr indent="0" marL="0">
+            <a:pPr marL="0" indent="0">
               <a:buNone/>
             </a:pPr>
             <a:r>
@@ -10440,7 +10518,7 @@
             <a:endParaRPr lang="en-US" sz="1600" dirty="0"/>
           </a:p>
           <a:p>
-            <a:pPr indent="0" marL="0">
+            <a:pPr marL="0" indent="0">
               <a:buNone/>
             </a:pPr>
             <a:r>
@@ -10454,7 +10532,7 @@
             <a:endParaRPr lang="en-US" sz="1600" dirty="0"/>
           </a:p>
           <a:p>
-            <a:pPr indent="0" marL="0">
+            <a:pPr marL="0" indent="0">
               <a:buNone/>
             </a:pPr>
             <a:r>
@@ -10468,7 +10546,7 @@
             <a:endParaRPr lang="en-US" sz="1600" dirty="0"/>
           </a:p>
           <a:p>
-            <a:pPr indent="0" marL="0">
+            <a:pPr marL="0" indent="0">
               <a:buNone/>
             </a:pPr>
             <a:r>
@@ -10482,35 +10560,35 @@
             <a:endParaRPr lang="en-US" sz="1600" dirty="0"/>
           </a:p>
           <a:p>
-            <a:pPr indent="0" marL="0">
-              <a:buNone/>
-            </a:pPr>
-            <a:r>
-              <a:rPr lang="en-US" sz="1600" dirty="0">
-                <a:solidFill>
-                  <a:srgbClr val="555555"/>
-                </a:solidFill>
-              </a:rPr>
-              <a:t>6. Check SEBI.gov.in before ANY investment</a:t>
-            </a:r>
-            <a:endParaRPr lang="en-US" sz="1600" dirty="0"/>
-          </a:p>
-          <a:p>
-            <a:pPr indent="0" marL="0">
-              <a:buNone/>
-            </a:pPr>
-            <a:r>
-              <a:rPr lang="en-US" sz="1600" dirty="0">
-                <a:solidFill>
-                  <a:srgbClr val="555555"/>
-                </a:solidFill>
-              </a:rPr>
-              <a:t>7. Don't click links in emails/SMS</a:t>
-            </a:r>
-            <a:endParaRPr lang="en-US" sz="1600" dirty="0"/>
-          </a:p>
-          <a:p>
-            <a:pPr indent="0" marL="0">
+            <a:pPr marL="0" indent="0">
+              <a:buNone/>
+            </a:pPr>
+            <a:r>
+              <a:rPr lang="en-US" sz="1600" dirty="0">
+                <a:solidFill>
+                  <a:srgbClr val="555555"/>
+                </a:solidFill>
+              </a:rPr>
+              <a:t>6. Don't click links in emails/SMS</a:t>
+            </a:r>
+            <a:endParaRPr lang="en-US" sz="1600" dirty="0"/>
+          </a:p>
+          <a:p>
+            <a:pPr marL="0" indent="0">
+              <a:buNone/>
+            </a:pPr>
+            <a:r>
+              <a:rPr lang="en-US" sz="1600" dirty="0">
+                <a:solidFill>
+                  <a:srgbClr val="555555"/>
+                </a:solidFill>
+              </a:rPr>
+              <a:t>7. REPEAT: Don't click links in emails/SMS</a:t>
+            </a:r>
+            <a:endParaRPr lang="en-US" sz="1600" dirty="0"/>
+          </a:p>
+          <a:p>
+            <a:pPr marL="0" indent="0">
               <a:buNone/>
             </a:pPr>
             <a:r>
@@ -10524,7 +10602,7 @@
             <a:endParaRPr lang="en-US" sz="1600" dirty="0"/>
           </a:p>
           <a:p>
-            <a:pPr indent="0" marL="0">
+            <a:pPr marL="0" indent="0">
               <a:buNone/>
             </a:pPr>
             <a:r>
@@ -10538,7 +10616,7 @@
             <a:endParaRPr lang="en-US" sz="1600" dirty="0"/>
           </a:p>
           <a:p>
-            <a:pPr indent="0" marL="0">
+            <a:pPr marL="0" indent="0">
               <a:buNone/>
             </a:pPr>
             <a:r>
@@ -10552,7 +10630,7 @@
             <a:endParaRPr lang="en-US" sz="1600" dirty="0"/>
           </a:p>
           <a:p>
-            <a:pPr indent="0" marL="0">
+            <a:pPr marL="0" indent="0">
               <a:buNone/>
             </a:pPr>
             <a:r>
@@ -10566,7 +10644,7 @@
             <a:endParaRPr lang="en-US" sz="1600" dirty="0"/>
           </a:p>
           <a:p>
-            <a:pPr indent="0" marL="0">
+            <a:pPr marL="0" indent="0">
               <a:buNone/>
             </a:pPr>
             <a:r>
@@ -10580,16 +10658,16 @@
             <a:endParaRPr lang="en-US" sz="1600" dirty="0"/>
           </a:p>
           <a:p>
-            <a:pPr indent="0" marL="0">
-              <a:buNone/>
-            </a:pPr>
-            <a:r>
-              <a:rPr lang="en-US" sz="1600" dirty="0">
-                <a:solidFill>
-                  <a:srgbClr val="555555"/>
-                </a:solidFill>
-              </a:rPr>
-              <a:t>These 12 rules prevent 95% of scams</a:t>
+            <a:pPr marL="0" indent="0">
+              <a:buNone/>
+            </a:pPr>
+            <a:r>
+              <a:rPr lang="en-US" sz="1600" dirty="0">
+                <a:solidFill>
+                  <a:srgbClr val="555555"/>
+                </a:solidFill>
+              </a:rPr>
+              <a:t>These 12 rules prevent 99% of scams</a:t>
             </a:r>
             <a:endParaRPr lang="en-US" sz="1600" dirty="0"/>
           </a:p>
@@ -10616,7 +10694,7 @@
           <a:bodyPr wrap="square" rtlCol="0" anchor="ctr"/>
           <a:lstStyle/>
           <a:p>
-            <a:pPr algn="r" indent="0" marL="0">
+            <a:pPr marL="0" indent="0" algn="r">
               <a:buNone/>
             </a:pPr>
             <a:r>
@@ -10639,7 +10717,7 @@
 </p:sld>
 </file>
 
-<file path=ppt/slides/slide28.xml><?xml version="1.0" encoding="utf-8"?>
+<file path=ppt/slides/slide29.xml><?xml version="1.0" encoding="utf-8"?>
 <p:sld xmlns:a="http://schemas.openxmlformats.org/drawingml/2006/main" xmlns:r="http://schemas.openxmlformats.org/officeDocument/2006/relationships" xmlns:p="http://schemas.openxmlformats.org/presentationml/2006/main">
   <p:cSld name="Slide 28">
     <p:spTree>
@@ -10677,7 +10755,7 @@
           <a:bodyPr wrap="square" rtlCol="0" anchor="ctr"/>
           <a:lstStyle/>
           <a:p>
-            <a:pPr indent="0" marL="0">
+            <a:pPr marL="0" indent="0">
               <a:buNone/>
             </a:pPr>
             <a:r>
@@ -10713,7 +10791,7 @@
           <a:bodyPr wrap="square" rtlCol="0" anchor="ctr"/>
           <a:lstStyle/>
           <a:p>
-            <a:pPr indent="0" marL="0">
+            <a:pPr marL="0" indent="0">
               <a:buNone/>
             </a:pPr>
             <a:r>
@@ -10749,7 +10827,7 @@
           <a:bodyPr wrap="square" rtlCol="0" anchor="t"/>
           <a:lstStyle/>
           <a:p>
-            <a:pPr indent="0" marL="0">
+            <a:pPr marL="0" indent="0">
               <a:buNone/>
             </a:pPr>
             <a:r>
@@ -10763,7 +10841,7 @@
             <a:endParaRPr lang="en-US" sz="1600" dirty="0"/>
           </a:p>
           <a:p>
-            <a:pPr indent="0" marL="0">
+            <a:pPr marL="0" indent="0">
               <a:buNone/>
             </a:pPr>
             <a:r>
@@ -10777,7 +10855,7 @@
             <a:endParaRPr lang="en-US" sz="1600" dirty="0"/>
           </a:p>
           <a:p>
-            <a:pPr indent="0" marL="0">
+            <a:pPr marL="0" indent="0">
               <a:buNone/>
             </a:pPr>
             <a:r>
@@ -10791,7 +10869,7 @@
             <a:endParaRPr lang="en-US" sz="1600" dirty="0"/>
           </a:p>
           <a:p>
-            <a:pPr indent="0" marL="0">
+            <a:pPr marL="0" indent="0">
               <a:buNone/>
             </a:pPr>
             <a:r>
@@ -10805,7 +10883,7 @@
             <a:endParaRPr lang="en-US" sz="1600" dirty="0"/>
           </a:p>
           <a:p>
-            <a:pPr indent="0" marL="0">
+            <a:pPr marL="0" indent="0">
               <a:buNone/>
             </a:pPr>
             <a:r>
@@ -10819,7 +10897,7 @@
             <a:endParaRPr lang="en-US" sz="1600" dirty="0"/>
           </a:p>
           <a:p>
-            <a:pPr indent="0" marL="0">
+            <a:pPr marL="0" indent="0">
               <a:buNone/>
             </a:pPr>
             <a:r>
@@ -10855,7 +10933,7 @@
           <a:bodyPr wrap="square" rtlCol="0" anchor="ctr"/>
           <a:lstStyle/>
           <a:p>
-            <a:pPr indent="0" marL="0">
+            <a:pPr marL="0" indent="0">
               <a:buNone/>
             </a:pPr>
             <a:r>
@@ -10891,7 +10969,7 @@
           <a:bodyPr wrap="square" rtlCol="0" anchor="t"/>
           <a:lstStyle/>
           <a:p>
-            <a:pPr indent="0" marL="0">
+            <a:pPr marL="0" indent="0">
               <a:buNone/>
             </a:pPr>
             <a:r>
@@ -10905,7 +10983,7 @@
             <a:endParaRPr lang="en-US" sz="1600" dirty="0"/>
           </a:p>
           <a:p>
-            <a:pPr indent="0" marL="0">
+            <a:pPr marL="0" indent="0">
               <a:buNone/>
             </a:pPr>
             <a:r>
@@ -10919,7 +10997,7 @@
             <a:endParaRPr lang="en-US" sz="1600" dirty="0"/>
           </a:p>
           <a:p>
-            <a:pPr indent="0" marL="0">
+            <a:pPr marL="0" indent="0">
               <a:buNone/>
             </a:pPr>
             <a:r>
@@ -10933,7 +11011,7 @@
             <a:endParaRPr lang="en-US" sz="1600" dirty="0"/>
           </a:p>
           <a:p>
-            <a:pPr indent="0" marL="0">
+            <a:pPr marL="0" indent="0">
               <a:buNone/>
             </a:pPr>
             <a:r>
@@ -10947,7 +11025,7 @@
             <a:endParaRPr lang="en-US" sz="1600" dirty="0"/>
           </a:p>
           <a:p>
-            <a:pPr indent="0" marL="0">
+            <a:pPr marL="0" indent="0">
               <a:buNone/>
             </a:pPr>
             <a:r>
@@ -10961,7 +11039,7 @@
             <a:endParaRPr lang="en-US" sz="1600" dirty="0"/>
           </a:p>
           <a:p>
-            <a:pPr indent="0" marL="0">
+            <a:pPr marL="0" indent="0">
               <a:buNone/>
             </a:pPr>
             <a:r>
@@ -10975,7 +11053,7 @@
             <a:endParaRPr lang="en-US" sz="1600" dirty="0"/>
           </a:p>
           <a:p>
-            <a:pPr indent="0" marL="0">
+            <a:pPr marL="0" indent="0">
               <a:buNone/>
             </a:pPr>
             <a:r>
@@ -10989,7 +11067,7 @@
             <a:endParaRPr lang="en-US" sz="1600" dirty="0"/>
           </a:p>
           <a:p>
-            <a:pPr indent="0" marL="0">
+            <a:pPr marL="0" indent="0">
               <a:buNone/>
             </a:pPr>
             <a:r>
@@ -11003,7 +11081,7 @@
             <a:endParaRPr lang="en-US" sz="1600" dirty="0"/>
           </a:p>
           <a:p>
-            <a:pPr indent="0" marL="0">
+            <a:pPr marL="0" indent="0">
               <a:buNone/>
             </a:pPr>
             <a:r>
@@ -11017,7 +11095,7 @@
             <a:endParaRPr lang="en-US" sz="1600" dirty="0"/>
           </a:p>
           <a:p>
-            <a:pPr indent="0" marL="0">
+            <a:pPr marL="0" indent="0">
               <a:buNone/>
             </a:pPr>
             <a:r>
@@ -11053,7 +11131,7 @@
           <a:bodyPr wrap="square" rtlCol="0" anchor="ctr"/>
           <a:lstStyle/>
           <a:p>
-            <a:pPr algn="r" indent="0" marL="0">
+            <a:pPr marL="0" indent="0" algn="r">
               <a:buNone/>
             </a:pPr>
             <a:r>
@@ -11114,7 +11192,7 @@
           <a:bodyPr wrap="square" rtlCol="0" anchor="ctr"/>
           <a:lstStyle/>
           <a:p>
-            <a:pPr indent="0" marL="0">
+            <a:pPr marL="0" indent="0">
               <a:buNone/>
             </a:pPr>
             <a:r>
@@ -11150,7 +11228,7 @@
           <a:bodyPr wrap="square" rtlCol="0" anchor="ctr"/>
           <a:lstStyle/>
           <a:p>
-            <a:pPr indent="0" marL="0">
+            <a:pPr marL="0" indent="0">
               <a:buNone/>
             </a:pPr>
             <a:r>
@@ -11186,7 +11264,7 @@
           <a:bodyPr wrap="square" rtlCol="0" anchor="t"/>
           <a:lstStyle/>
           <a:p>
-            <a:pPr indent="0" marL="0">
+            <a:pPr marL="0" indent="0">
               <a:buNone/>
             </a:pPr>
             <a:r>
@@ -11253,7 +11331,7 @@
         </p:nvSpPr>
         <p:spPr>
           <a:xfrm>
-            <a:off x="457200" y="1828800"/>
+            <a:off x="4099686" y="1783080"/>
             <a:ext cx="8229600" cy="365760"/>
           </a:xfrm>
           <a:prstGeom prst="rect">
@@ -11266,7 +11344,7 @@
           <a:bodyPr wrap="square" rtlCol="0" anchor="ctr"/>
           <a:lstStyle/>
           <a:p>
-            <a:pPr indent="0" marL="0">
+            <a:pPr marL="0" indent="0">
               <a:buNone/>
             </a:pPr>
             <a:r>
@@ -11289,7 +11367,7 @@
         </p:nvSpPr>
         <p:spPr>
           <a:xfrm>
-            <a:off x="457200" y="2286000"/>
+            <a:off x="4719362" y="2377440"/>
             <a:ext cx="8229600" cy="3200400"/>
           </a:xfrm>
           <a:prstGeom prst="rect">
@@ -11379,7 +11457,7 @@
             <a:endParaRPr lang="en-US" sz="1600" dirty="0"/>
           </a:p>
           <a:p>
-            <a:pPr indent="0" marL="0">
+            <a:pPr marL="0" indent="0">
               <a:buNone/>
             </a:pPr>
             <a:r>
@@ -11393,7 +11471,7 @@
             <a:endParaRPr lang="en-US" sz="1600" dirty="0"/>
           </a:p>
           <a:p>
-            <a:pPr indent="0" marL="0">
+            <a:pPr marL="0" indent="0">
               <a:buNone/>
             </a:pPr>
             <a:r>
@@ -11429,7 +11507,7 @@
           <a:bodyPr wrap="square" rtlCol="0" anchor="ctr"/>
           <a:lstStyle/>
           <a:p>
-            <a:pPr algn="r" indent="0" marL="0">
+            <a:pPr marL="0" indent="0" algn="r">
               <a:buNone/>
             </a:pPr>
             <a:r>
@@ -11490,7 +11568,7 @@
           <a:bodyPr wrap="square" rtlCol="0" anchor="ctr"/>
           <a:lstStyle/>
           <a:p>
-            <a:pPr indent="0" marL="0">
+            <a:pPr marL="0" indent="0">
               <a:buNone/>
             </a:pPr>
             <a:r>
@@ -11526,7 +11604,7 @@
           <a:bodyPr wrap="square" rtlCol="0" anchor="ctr"/>
           <a:lstStyle/>
           <a:p>
-            <a:pPr indent="0" marL="0">
+            <a:pPr marL="0" indent="0">
               <a:buNone/>
             </a:pPr>
             <a:r>
@@ -11562,7 +11640,7 @@
           <a:bodyPr wrap="square" rtlCol="0" anchor="t"/>
           <a:lstStyle/>
           <a:p>
-            <a:pPr indent="0" marL="0">
+            <a:pPr marL="0" indent="0">
               <a:buNone/>
             </a:pPr>
             <a:r>
@@ -11629,7 +11707,7 @@
         </p:nvSpPr>
         <p:spPr>
           <a:xfrm>
-            <a:off x="457200" y="1828800"/>
+            <a:off x="3517795" y="1254443"/>
             <a:ext cx="8229600" cy="365760"/>
           </a:xfrm>
           <a:prstGeom prst="rect">
@@ -11642,7 +11720,7 @@
           <a:bodyPr wrap="square" rtlCol="0" anchor="ctr"/>
           <a:lstStyle/>
           <a:p>
-            <a:pPr indent="0" marL="0">
+            <a:pPr marL="0" indent="0">
               <a:buNone/>
             </a:pPr>
             <a:r>
@@ -11665,7 +11743,7 @@
         </p:nvSpPr>
         <p:spPr>
           <a:xfrm>
-            <a:off x="457200" y="2286000"/>
+            <a:off x="5399495" y="3423285"/>
             <a:ext cx="8229600" cy="3200400"/>
           </a:xfrm>
           <a:prstGeom prst="rect">
@@ -11678,7 +11756,7 @@
           <a:bodyPr wrap="square" rtlCol="0" anchor="t"/>
           <a:lstStyle/>
           <a:p>
-            <a:pPr indent="0" marL="0">
+            <a:pPr marL="0" indent="0">
               <a:buNone/>
             </a:pPr>
             <a:r>
@@ -11734,7 +11812,7 @@
         </p:nvSpPr>
         <p:spPr>
           <a:xfrm>
-            <a:off x="457200" y="2286000"/>
+            <a:off x="3457339" y="1645920"/>
             <a:ext cx="8229600" cy="365760"/>
           </a:xfrm>
           <a:prstGeom prst="rect">
@@ -11747,7 +11825,7 @@
           <a:bodyPr wrap="square" rtlCol="0" anchor="ctr"/>
           <a:lstStyle/>
           <a:p>
-            <a:pPr indent="0" marL="0">
+            <a:pPr marL="0" indent="0">
               <a:buNone/>
             </a:pPr>
             <a:r>
@@ -11770,7 +11848,7 @@
         </p:nvSpPr>
         <p:spPr>
           <a:xfrm>
-            <a:off x="457200" y="2743200"/>
+            <a:off x="685800" y="3560445"/>
             <a:ext cx="8229600" cy="3200400"/>
           </a:xfrm>
           <a:prstGeom prst="rect">
@@ -11783,7 +11861,7 @@
           <a:bodyPr wrap="square" rtlCol="0" anchor="t"/>
           <a:lstStyle/>
           <a:p>
-            <a:pPr indent="0" marL="0">
+            <a:pPr marL="0" indent="0">
               <a:buNone/>
             </a:pPr>
             <a:r>
@@ -11863,7 +11941,7 @@
           <a:bodyPr wrap="square" rtlCol="0" anchor="ctr"/>
           <a:lstStyle/>
           <a:p>
-            <a:pPr algn="r" indent="0" marL="0">
+            <a:pPr marL="0" indent="0" algn="r">
               <a:buNone/>
             </a:pPr>
             <a:r>
@@ -11924,7 +12002,7 @@
           <a:bodyPr wrap="square" rtlCol="0" anchor="ctr"/>
           <a:lstStyle/>
           <a:p>
-            <a:pPr indent="0" marL="0">
+            <a:pPr marL="0" indent="0">
               <a:buNone/>
             </a:pPr>
             <a:r>
@@ -11960,7 +12038,7 @@
           <a:bodyPr wrap="square" rtlCol="0" anchor="ctr"/>
           <a:lstStyle/>
           <a:p>
-            <a:pPr indent="0" marL="0">
+            <a:pPr marL="0" indent="0">
               <a:buNone/>
             </a:pPr>
             <a:r>
@@ -11996,7 +12074,7 @@
           <a:bodyPr wrap="square" rtlCol="0" anchor="t"/>
           <a:lstStyle/>
           <a:p>
-            <a:pPr indent="0" marL="0">
+            <a:pPr marL="0" indent="0">
               <a:buNone/>
             </a:pPr>
             <a:r>
@@ -12043,7 +12121,7 @@
             <a:endParaRPr lang="en-US" sz="1600" dirty="0"/>
           </a:p>
           <a:p>
-            <a:pPr indent="0" marL="0">
+            <a:pPr marL="0" indent="0">
               <a:buNone/>
             </a:pPr>
             <a:r>
@@ -12066,7 +12144,7 @@
         </p:nvSpPr>
         <p:spPr>
           <a:xfrm>
-            <a:off x="457200" y="1828800"/>
+            <a:off x="6102298" y="1344041"/>
             <a:ext cx="8229600" cy="365760"/>
           </a:xfrm>
           <a:prstGeom prst="rect">
@@ -12079,7 +12157,7 @@
           <a:bodyPr wrap="square" rtlCol="0" anchor="ctr"/>
           <a:lstStyle/>
           <a:p>
-            <a:pPr indent="0" marL="0">
+            <a:pPr marL="0" indent="0">
               <a:buNone/>
             </a:pPr>
             <a:r>
@@ -12102,7 +12180,7 @@
         </p:nvSpPr>
         <p:spPr>
           <a:xfrm>
-            <a:off x="457200" y="2286000"/>
+            <a:off x="5475064" y="3429000"/>
             <a:ext cx="8229600" cy="3200400"/>
           </a:xfrm>
           <a:prstGeom prst="rect">
@@ -12115,7 +12193,7 @@
           <a:bodyPr wrap="square" rtlCol="0" anchor="t"/>
           <a:lstStyle/>
           <a:p>
-            <a:pPr indent="0" marL="0">
+            <a:pPr marL="0" indent="0">
               <a:buNone/>
             </a:pPr>
             <a:r>
@@ -12173,7 +12251,7 @@
             <a:endParaRPr lang="en-US" sz="1600" dirty="0"/>
           </a:p>
           <a:p>
-            <a:pPr indent="0" marL="0">
+            <a:pPr marL="0" indent="0">
               <a:buNone/>
             </a:pPr>
             <a:r>
@@ -12209,7 +12287,7 @@
           <a:bodyPr wrap="square" rtlCol="0" anchor="ctr"/>
           <a:lstStyle/>
           <a:p>
-            <a:pPr algn="r" indent="0" marL="0">
+            <a:pPr marL="0" indent="0" algn="r">
               <a:buNone/>
             </a:pPr>
             <a:r>
@@ -12270,7 +12348,7 @@
           <a:bodyPr wrap="square" rtlCol="0" anchor="ctr"/>
           <a:lstStyle/>
           <a:p>
-            <a:pPr indent="0" marL="0">
+            <a:pPr marL="0" indent="0">
               <a:buNone/>
             </a:pPr>
             <a:r>
@@ -12306,7 +12384,7 @@
           <a:bodyPr wrap="square" rtlCol="0" anchor="ctr"/>
           <a:lstStyle/>
           <a:p>
-            <a:pPr indent="0" marL="0">
+            <a:pPr marL="0" indent="0">
               <a:buNone/>
             </a:pPr>
             <a:r>
@@ -12342,7 +12420,7 @@
           <a:bodyPr wrap="square" rtlCol="0" anchor="t"/>
           <a:lstStyle/>
           <a:p>
-            <a:pPr indent="0" marL="0">
+            <a:pPr marL="0" indent="0">
               <a:buNone/>
             </a:pPr>
             <a:r>
@@ -12356,7 +12434,7 @@
             <a:endParaRPr lang="en-US" sz="1600" dirty="0"/>
           </a:p>
           <a:p>
-            <a:pPr indent="0" marL="0">
+            <a:pPr marL="0" indent="0">
               <a:buNone/>
             </a:pPr>
             <a:r>
@@ -12370,7 +12448,7 @@
             <a:endParaRPr lang="en-US" sz="1600" dirty="0"/>
           </a:p>
           <a:p>
-            <a:pPr indent="0" marL="0">
+            <a:pPr marL="0" indent="0">
               <a:buNone/>
             </a:pPr>
             <a:r>
@@ -12384,7 +12462,7 @@
             <a:endParaRPr lang="en-US" sz="1600" dirty="0"/>
           </a:p>
           <a:p>
-            <a:pPr indent="0" marL="0">
+            <a:pPr marL="0" indent="0">
               <a:buNone/>
             </a:pPr>
             <a:r>
@@ -12398,7 +12476,7 @@
             <a:endParaRPr lang="en-US" sz="1600" dirty="0"/>
           </a:p>
           <a:p>
-            <a:pPr indent="0" marL="0">
+            <a:pPr marL="0" indent="0">
               <a:buNone/>
             </a:pPr>
             <a:r>
@@ -12412,7 +12490,7 @@
             <a:endParaRPr lang="en-US" sz="1600" dirty="0"/>
           </a:p>
           <a:p>
-            <a:pPr indent="0" marL="0">
+            <a:pPr marL="0" indent="0">
               <a:buNone/>
             </a:pPr>
             <a:r>
@@ -12426,7 +12504,7 @@
             <a:endParaRPr lang="en-US" sz="1600" dirty="0"/>
           </a:p>
           <a:p>
-            <a:pPr indent="0" marL="0">
+            <a:pPr marL="0" indent="0">
               <a:buNone/>
             </a:pPr>
             <a:r>
@@ -12440,7 +12518,7 @@
             <a:endParaRPr lang="en-US" sz="1600" dirty="0"/>
           </a:p>
           <a:p>
-            <a:pPr indent="0" marL="0">
+            <a:pPr marL="0" indent="0">
               <a:buNone/>
             </a:pPr>
             <a:r>
@@ -12454,7 +12532,7 @@
             <a:endParaRPr lang="en-US" sz="1600" dirty="0"/>
           </a:p>
           <a:p>
-            <a:pPr indent="0" marL="0">
+            <a:pPr marL="0" indent="0">
               <a:buNone/>
             </a:pPr>
             <a:r>
@@ -12490,7 +12568,7 @@
           <a:bodyPr wrap="square" rtlCol="0" anchor="ctr"/>
           <a:lstStyle/>
           <a:p>
-            <a:pPr algn="r" indent="0" marL="0">
+            <a:pPr marL="0" indent="0" algn="r">
               <a:buNone/>
             </a:pPr>
             <a:r>
@@ -12551,7 +12629,7 @@
           <a:bodyPr wrap="square" rtlCol="0" anchor="ctr"/>
           <a:lstStyle/>
           <a:p>
-            <a:pPr indent="0" marL="0">
+            <a:pPr marL="0" indent="0">
               <a:buNone/>
             </a:pPr>
             <a:r>
@@ -12587,7 +12665,7 @@
           <a:bodyPr wrap="square" rtlCol="0" anchor="ctr"/>
           <a:lstStyle/>
           <a:p>
-            <a:pPr indent="0" marL="0">
+            <a:pPr marL="0" indent="0">
               <a:buNone/>
             </a:pPr>
             <a:r>
@@ -12623,21 +12701,29 @@
           <a:bodyPr wrap="square" rtlCol="0" anchor="t"/>
           <a:lstStyle/>
           <a:p>
-            <a:pPr indent="0" marL="0">
-              <a:buNone/>
-            </a:pPr>
-            <a:r>
-              <a:rPr lang="en-US" sz="1600" dirty="0">
-                <a:solidFill>
-                  <a:srgbClr val="555555"/>
-                </a:solidFill>
-              </a:rPr>
-              <a:t>From: noreply@hdfc-bank.co.in (fake!)</a:t>
-            </a:r>
-            <a:endParaRPr lang="en-US" sz="1600" dirty="0"/>
-          </a:p>
-          <a:p>
-            <a:pPr indent="0" marL="0">
+            <a:pPr marL="0" indent="0">
+              <a:buNone/>
+            </a:pPr>
+            <a:r>
+              <a:rPr lang="en-US" sz="1600" dirty="0">
+                <a:solidFill>
+                  <a:srgbClr val="555555"/>
+                </a:solidFill>
+              </a:rPr>
+              <a:t>From: </a:t>
+            </a:r>
+            <a:r>
+              <a:rPr lang="en-US" sz="1600" dirty="0" err="1">
+                <a:solidFill>
+                  <a:srgbClr val="555555"/>
+                </a:solidFill>
+              </a:rPr>
+              <a:t>noreply@hdfc-bank.co.in</a:t>
+            </a:r>
+            <a:endParaRPr lang="en-US" sz="1600" dirty="0"/>
+          </a:p>
+          <a:p>
+            <a:pPr marL="0" indent="0">
               <a:buNone/>
             </a:pPr>
             <a:r>
@@ -12651,21 +12737,52 @@
             <a:endParaRPr lang="en-US" sz="1600" dirty="0"/>
           </a:p>
           <a:p>
-            <a:pPr indent="0" marL="0">
-              <a:buNone/>
-            </a:pPr>
-            <a:r>
-              <a:rPr lang="en-US" sz="1600" dirty="0">
-                <a:solidFill>
-                  <a:srgbClr val="555555"/>
-                </a:solidFill>
-              </a:rPr>
-              <a:t>Body: "Click here to verify within 24 hours..."</a:t>
-            </a:r>
-            <a:endParaRPr lang="en-US" sz="1600" dirty="0"/>
-          </a:p>
-          <a:p>
-            <a:pPr indent="0" marL="0">
+            <a:pPr marL="0" indent="0">
+              <a:buNone/>
+            </a:pPr>
+            <a:r>
+              <a:rPr lang="en-US" sz="1600" dirty="0">
+                <a:solidFill>
+                  <a:srgbClr val="555555"/>
+                </a:solidFill>
+              </a:rPr>
+              <a:t>Body: ”</a:t>
+            </a:r>
+          </a:p>
+          <a:p>
+            <a:pPr marL="0" indent="0">
+              <a:buNone/>
+            </a:pPr>
+            <a:r>
+              <a:rPr lang="en-US" sz="1600" dirty="0">
+                <a:solidFill>
+                  <a:srgbClr val="555555"/>
+                </a:solidFill>
+              </a:rPr>
+              <a:t>Dear Customer.</a:t>
+            </a:r>
+          </a:p>
+          <a:p>
+            <a:pPr marL="0" indent="0">
+              <a:buNone/>
+            </a:pPr>
+            <a:r>
+              <a:rPr lang="en-US" sz="1600" dirty="0">
+                <a:solidFill>
+                  <a:srgbClr val="555555"/>
+                </a:solidFill>
+              </a:rPr>
+              <a:t>Click here to verify within 24 hours...”</a:t>
+            </a:r>
+          </a:p>
+          <a:p>
+            <a:pPr marL="0" indent="0">
+              <a:buNone/>
+            </a:pPr>
+            <a:endParaRPr lang="en-US" sz="1600" dirty="0"/>
+          </a:p>
+          <a:p>
+            <a:pPr marL="0" indent="0">
               <a:buNone/>
             </a:pPr>
             <a:r>
@@ -12685,7 +12802,23 @@
                   <a:srgbClr val="555555"/>
                 </a:solidFill>
               </a:rPr>
-              <a:t>Fake domain (real: hdfcbank.bank.in)</a:t>
+              <a:t>Fake domain (real: </a:t>
+            </a:r>
+            <a:r>
+              <a:rPr lang="en-US" sz="1600" dirty="0" err="1">
+                <a:solidFill>
+                  <a:srgbClr val="555555"/>
+                </a:solidFill>
+              </a:rPr>
+              <a:t>hdfc.bank.in</a:t>
+            </a:r>
+            <a:r>
+              <a:rPr lang="en-US" sz="1600" dirty="0">
+                <a:solidFill>
+                  <a:srgbClr val="555555"/>
+                </a:solidFill>
+              </a:rPr>
+              <a:t>)</a:t>
             </a:r>
             <a:endParaRPr lang="en-US" sz="1600" dirty="0"/>
           </a:p>
@@ -12732,7 +12865,7 @@
         </p:nvSpPr>
         <p:spPr>
           <a:xfrm>
-            <a:off x="457200" y="1828800"/>
+            <a:off x="4908288" y="800100"/>
             <a:ext cx="8229600" cy="365760"/>
           </a:xfrm>
           <a:prstGeom prst="rect">
@@ -12745,7 +12878,7 @@
           <a:bodyPr wrap="square" rtlCol="0" anchor="ctr"/>
           <a:lstStyle/>
           <a:p>
-            <a:pPr indent="0" marL="0">
+            <a:pPr marL="0" indent="0">
               <a:buNone/>
             </a:pPr>
             <a:r>
@@ -12768,7 +12901,7 @@
         </p:nvSpPr>
         <p:spPr>
           <a:xfrm>
-            <a:off x="457200" y="2286000"/>
+            <a:off x="5097214" y="2180202"/>
             <a:ext cx="8229600" cy="3200400"/>
           </a:xfrm>
           <a:prstGeom prst="rect">
@@ -12781,7 +12914,7 @@
           <a:bodyPr wrap="square" rtlCol="0" anchor="t"/>
           <a:lstStyle/>
           <a:p>
-            <a:pPr indent="0" marL="0">
+            <a:pPr marL="0" indent="0">
               <a:buNone/>
             </a:pPr>
             <a:r>
@@ -12861,7 +12994,7 @@
           <a:bodyPr wrap="square" rtlCol="0" anchor="ctr"/>
           <a:lstStyle/>
           <a:p>
-            <a:pPr algn="r" indent="0" marL="0">
+            <a:pPr marL="0" indent="0" algn="r">
               <a:buNone/>
             </a:pPr>
             <a:r>
@@ -12922,7 +13055,7 @@
           <a:bodyPr wrap="square" rtlCol="0" anchor="ctr"/>
           <a:lstStyle/>
           <a:p>
-            <a:pPr indent="0" marL="0">
+            <a:pPr marL="0" indent="0">
               <a:buNone/>
             </a:pPr>
             <a:r>
@@ -12958,7 +13091,7 @@
           <a:bodyPr wrap="square" rtlCol="0" anchor="ctr"/>
           <a:lstStyle/>
           <a:p>
-            <a:pPr indent="0" marL="0">
+            <a:pPr marL="0" indent="0">
               <a:buNone/>
             </a:pPr>
             <a:r>
@@ -12981,7 +13114,7 @@
         </p:nvSpPr>
         <p:spPr>
           <a:xfrm>
-            <a:off x="457200" y="1828800"/>
+            <a:off x="4572000" y="340043"/>
             <a:ext cx="8229600" cy="3200400"/>
           </a:xfrm>
           <a:prstGeom prst="rect">
@@ -12994,7 +13127,7 @@
           <a:bodyPr wrap="square" rtlCol="0" anchor="t"/>
           <a:lstStyle/>
           <a:p>
-            <a:pPr indent="0" marL="0">
+            <a:pPr marL="0" indent="0">
               <a:buNone/>
             </a:pPr>
             <a:r>
@@ -13008,7 +13141,7 @@
             <a:endParaRPr lang="en-US" sz="1600" dirty="0"/>
           </a:p>
           <a:p>
-            <a:pPr indent="0" marL="0">
+            <a:pPr marL="0" indent="0">
               <a:buNone/>
             </a:pPr>
             <a:r>
@@ -13022,7 +13155,7 @@
             <a:endParaRPr lang="en-US" sz="1600" dirty="0"/>
           </a:p>
           <a:p>
-            <a:pPr indent="0" marL="0">
+            <a:pPr marL="0" indent="0">
               <a:buNone/>
             </a:pPr>
             <a:r>
@@ -13036,7 +13169,7 @@
             <a:endParaRPr lang="en-US" sz="1600" dirty="0"/>
           </a:p>
           <a:p>
-            <a:pPr indent="0" marL="0">
+            <a:pPr marL="0" indent="0">
               <a:buNone/>
             </a:pPr>
             <a:r>
@@ -13050,7 +13183,7 @@
             <a:endParaRPr lang="en-US" sz="1600" dirty="0"/>
           </a:p>
           <a:p>
-            <a:pPr indent="0" marL="0">
+            <a:pPr marL="0" indent="0">
               <a:buNone/>
             </a:pPr>
             <a:r>
@@ -13064,7 +13197,7 @@
             <a:endParaRPr lang="en-US" sz="1600" dirty="0"/>
           </a:p>
           <a:p>
-            <a:pPr indent="0" marL="0">
+            <a:pPr marL="0" indent="0">
               <a:buNone/>
             </a:pPr>
             <a:r>
@@ -13100,7 +13233,7 @@
           <a:bodyPr wrap="square" rtlCol="0" anchor="ctr"/>
           <a:lstStyle/>
           <a:p>
-            <a:pPr indent="0" marL="0">
+            <a:pPr marL="0" indent="0">
               <a:buNone/>
             </a:pPr>
             <a:r>
@@ -13136,7 +13269,7 @@
           <a:bodyPr wrap="square" rtlCol="0" anchor="t"/>
           <a:lstStyle/>
           <a:p>
-            <a:pPr indent="0" marL="0">
+            <a:pPr marL="0" indent="0">
               <a:buNone/>
             </a:pPr>
             <a:r>
@@ -13216,7 +13349,7 @@
           <a:bodyPr wrap="square" rtlCol="0" anchor="ctr"/>
           <a:lstStyle/>
           <a:p>
-            <a:pPr algn="r" indent="0" marL="0">
+            <a:pPr marL="0" indent="0" algn="r">
               <a:buNone/>
             </a:pPr>
             <a:r>
@@ -13277,7 +13410,7 @@
           <a:bodyPr wrap="square" rtlCol="0" anchor="ctr"/>
           <a:lstStyle/>
           <a:p>
-            <a:pPr indent="0" marL="0">
+            <a:pPr marL="0" indent="0">
               <a:buNone/>
             </a:pPr>
             <a:r>
@@ -13313,7 +13446,7 @@
           <a:bodyPr wrap="square" rtlCol="0" anchor="ctr"/>
           <a:lstStyle/>
           <a:p>
-            <a:pPr indent="0" marL="0">
+            <a:pPr marL="0" indent="0">
               <a:buNone/>
             </a:pPr>
             <a:r>
@@ -13349,7 +13482,7 @@
           <a:bodyPr wrap="square" rtlCol="0" anchor="t"/>
           <a:lstStyle/>
           <a:p>
-            <a:pPr indent="0" marL="0">
+            <a:pPr marL="0" indent="0">
               <a:buNone/>
             </a:pPr>
             <a:r>
@@ -13363,7 +13496,7 @@
             <a:endParaRPr lang="en-US" sz="1600" dirty="0"/>
           </a:p>
           <a:p>
-            <a:pPr indent="0" marL="0">
+            <a:pPr marL="0" indent="0">
               <a:buNone/>
             </a:pPr>
             <a:r>
@@ -13377,7 +13510,7 @@
             <a:endParaRPr lang="en-US" sz="1600" dirty="0"/>
           </a:p>
           <a:p>
-            <a:pPr indent="0" marL="0">
+            <a:pPr marL="0" indent="0">
               <a:buNone/>
             </a:pPr>
             <a:r>
@@ -13400,7 +13533,7 @@
         </p:nvSpPr>
         <p:spPr>
           <a:xfrm>
-            <a:off x="457200" y="1828800"/>
+            <a:off x="5339038" y="640080"/>
             <a:ext cx="8229600" cy="365760"/>
           </a:xfrm>
           <a:prstGeom prst="rect">
@@ -13413,7 +13546,7 @@
           <a:bodyPr wrap="square" rtlCol="0" anchor="ctr"/>
           <a:lstStyle/>
           <a:p>
-            <a:pPr indent="0" marL="0">
+            <a:pPr marL="0" indent="0">
               <a:buNone/>
             </a:pPr>
             <a:r>
@@ -13436,7 +13569,7 @@
         </p:nvSpPr>
         <p:spPr>
           <a:xfrm>
-            <a:off x="457200" y="2286000"/>
+            <a:off x="2301113" y="2903220"/>
             <a:ext cx="8229600" cy="3200400"/>
           </a:xfrm>
           <a:prstGeom prst="rect">
@@ -13449,7 +13582,7 @@
           <a:bodyPr wrap="square" rtlCol="0" anchor="t"/>
           <a:lstStyle/>
           <a:p>
-            <a:pPr indent="0" marL="0">
+            <a:pPr marL="0" indent="0">
               <a:buNone/>
             </a:pPr>
             <a:r>
@@ -13463,7 +13596,7 @@
             <a:endParaRPr lang="en-US" sz="1600" dirty="0"/>
           </a:p>
           <a:p>
-            <a:pPr indent="0" marL="0">
+            <a:pPr marL="0" indent="0">
               <a:buNone/>
             </a:pPr>
             <a:r>
@@ -13477,7 +13610,7 @@
             <a:endParaRPr lang="en-US" sz="1600" dirty="0"/>
           </a:p>
           <a:p>
-            <a:pPr indent="0" marL="0">
+            <a:pPr marL="0" indent="0">
               <a:buNone/>
             </a:pPr>
             <a:r>
@@ -13524,7 +13657,7 @@
             <a:endParaRPr lang="en-US" sz="1600" dirty="0"/>
           </a:p>
           <a:p>
-            <a:pPr indent="0" marL="0">
+            <a:pPr marL="0" indent="0">
               <a:buNone/>
             </a:pPr>
             <a:r>
@@ -13560,7 +13693,7 @@
           <a:bodyPr wrap="square" rtlCol="0" anchor="ctr"/>
           <a:lstStyle/>
           <a:p>
-            <a:pPr algn="r" indent="0" marL="0">
+            <a:pPr marL="0" indent="0" algn="r">
               <a:buNone/>
             </a:pPr>
             <a:r>
@@ -13876,4 +14009,319 @@
     </a:ext>
   </a:extLst>
 </a:theme>
+</file>
+
+<file path=ppt/theme/theme2.xml><?xml version="1.0" encoding="utf-8"?>
+<a:theme xmlns:a="http://schemas.openxmlformats.org/drawingml/2006/main" name="Office Theme">
+  <a:themeElements>
+    <a:clrScheme name="Office">
+      <a:dk1>
+        <a:sysClr val="windowText" lastClr="000000"/>
+      </a:dk1>
+      <a:lt1>
+        <a:sysClr val="window" lastClr="FFFFFF"/>
+      </a:lt1>
+      <a:dk2>
+        <a:srgbClr val="0E2841"/>
+      </a:dk2>
+      <a:lt2>
+        <a:srgbClr val="E8E8E8"/>
+      </a:lt2>
+      <a:accent1>
+        <a:srgbClr val="156082"/>
+      </a:accent1>
+      <a:accent2>
+        <a:srgbClr val="E97132"/>
+      </a:accent2>
+      <a:accent3>
+        <a:srgbClr val="196B24"/>
+      </a:accent3>
+      <a:accent4>
+        <a:srgbClr val="0F9ED5"/>
+      </a:accent4>
+      <a:accent5>
+        <a:srgbClr val="A02B93"/>
+      </a:accent5>
+      <a:accent6>
+        <a:srgbClr val="4EA72E"/>
+      </a:accent6>
+      <a:hlink>
+        <a:srgbClr val="467886"/>
+      </a:hlink>
+      <a:folHlink>
+        <a:srgbClr val="96607D"/>
+      </a:folHlink>
+    </a:clrScheme>
+    <a:fontScheme name="Office">
+      <a:majorFont>
+        <a:latin typeface="Aptos Display" panose="02110004020202020204"/>
+        <a:ea typeface=""/>
+        <a:cs typeface=""/>
+        <a:font script="Jpan" typeface="游ゴシック Light"/>
+        <a:font script="Hang" typeface="맑은 고딕"/>
+        <a:font script="Hans" typeface="等线 Light"/>
+        <a:font script="Hant" typeface="新細明體"/>
+        <a:font script="Arab" typeface="Times New Roman"/>
+        <a:font script="Hebr" typeface="Times New Roman"/>
+        <a:font script="Thai" typeface="Angsana New"/>
+        <a:font script="Ethi" typeface="Nyala"/>
+        <a:font script="Beng" typeface="Vrinda"/>
+        <a:font script="Gujr" typeface="Shruti"/>
+        <a:font script="Khmr" typeface="MoolBoran"/>
+        <a:font script="Knda" typeface="Tunga"/>
+        <a:font script="Guru" typeface="Raavi"/>
+        <a:font script="Cans" typeface="Euphemia"/>
+        <a:font script="Cher" typeface="Plantagenet Cherokee"/>
+        <a:font script="Yiii" typeface="Microsoft Yi Baiti"/>
+        <a:font script="Tibt" typeface="Microsoft Himalaya"/>
+        <a:font script="Thaa" typeface="MV Boli"/>
+        <a:font script="Deva" typeface="Mangal"/>
+        <a:font script="Telu" typeface="Gautami"/>
+        <a:font script="Taml" typeface="Latha"/>
+        <a:font script="Syrc" typeface="Estrangelo Edessa"/>
+        <a:font script="Orya" typeface="Kalinga"/>
+        <a:font script="Mlym" typeface="Kartika"/>
+        <a:font script="Laoo" typeface="DokChampa"/>
+        <a:font script="Sinh" typeface="Iskoola Pota"/>
+        <a:font script="Mong" typeface="Mongolian Baiti"/>
+        <a:font script="Viet" typeface="Times New Roman"/>
+        <a:font script="Uigh" typeface="Microsoft Uighur"/>
+        <a:font script="Geor" typeface="Sylfaen"/>
+        <a:font script="Armn" typeface="Arial"/>
+        <a:font script="Bugi" typeface="Leelawadee UI"/>
+        <a:font script="Bopo" typeface="Microsoft JhengHei"/>
+        <a:font script="Java" typeface="Javanese Text"/>
+        <a:font script="Lisu" typeface="Segoe UI"/>
+        <a:font script="Mymr" typeface="Myanmar Text"/>
+        <a:font script="Nkoo" typeface="Ebrima"/>
+        <a:font script="Olck" typeface="Nirmala UI"/>
+        <a:font script="Osma" typeface="Ebrima"/>
+        <a:font script="Phag" typeface="Phagspa"/>
+        <a:font script="Syrn" typeface="Estrangelo Edessa"/>
+        <a:font script="Syrj" typeface="Estrangelo Edessa"/>
+        <a:font script="Syre" typeface="Estrangelo Edessa"/>
+        <a:font script="Sora" typeface="Nirmala UI"/>
+        <a:font script="Tale" typeface="Microsoft Tai Le"/>
+        <a:font script="Talu" typeface="Microsoft New Tai Lue"/>
+        <a:font script="Tfng" typeface="Ebrima"/>
+      </a:majorFont>
+      <a:minorFont>
+        <a:latin typeface="Aptos" panose="02110004020202020204"/>
+        <a:ea typeface=""/>
+        <a:cs typeface=""/>
+        <a:font script="Jpan" typeface="游ゴシック"/>
+        <a:font script="Hang" typeface="맑은 고딕"/>
+        <a:font script="Hans" typeface="等线"/>
+        <a:font script="Hant" typeface="新細明體"/>
+        <a:font script="Arab" typeface="Arial"/>
+        <a:font script="Hebr" typeface="Arial"/>
+        <a:font script="Thai" typeface="Cordia New"/>
+        <a:font script="Ethi" typeface="Nyala"/>
+        <a:font script="Beng" typeface="Vrinda"/>
+        <a:font script="Gujr" typeface="Shruti"/>
+        <a:font script="Khmr" typeface="DaunPenh"/>
+        <a:font script="Knda" typeface="Tunga"/>
+        <a:font script="Guru" typeface="Raavi"/>
+        <a:font script="Cans" typeface="Euphemia"/>
+        <a:font script="Cher" typeface="Plantagenet Cherokee"/>
+        <a:font script="Yiii" typeface="Microsoft Yi Baiti"/>
+        <a:font script="Tibt" typeface="Microsoft Himalaya"/>
+        <a:font script="Thaa" typeface="MV Boli"/>
+        <a:font script="Deva" typeface="Mangal"/>
+        <a:font script="Telu" typeface="Gautami"/>
+        <a:font script="Taml" typeface="Latha"/>
+        <a:font script="Syrc" typeface="Estrangelo Edessa"/>
+        <a:font script="Orya" typeface="Kalinga"/>
+        <a:font script="Mlym" typeface="Kartika"/>
+        <a:font script="Laoo" typeface="DokChampa"/>
+        <a:font script="Sinh" typeface="Iskoola Pota"/>
+        <a:font script="Mong" typeface="Mongolian Baiti"/>
+        <a:font script="Viet" typeface="Arial"/>
+        <a:font script="Uigh" typeface="Microsoft Uighur"/>
+        <a:font script="Geor" typeface="Sylfaen"/>
+        <a:font script="Armn" typeface="Arial"/>
+        <a:font script="Bugi" typeface="Leelawadee UI"/>
+        <a:font script="Bopo" typeface="Microsoft JhengHei"/>
+        <a:font script="Java" typeface="Javanese Text"/>
+        <a:font script="Lisu" typeface="Segoe UI"/>
+        <a:font script="Mymr" typeface="Myanmar Text"/>
+        <a:font script="Nkoo" typeface="Ebrima"/>
+        <a:font script="Olck" typeface="Nirmala UI"/>
+        <a:font script="Osma" typeface="Ebrima"/>
+        <a:font script="Phag" typeface="Phagspa"/>
+        <a:font script="Syrn" typeface="Estrangelo Edessa"/>
+        <a:font script="Syrj" typeface="Estrangelo Edessa"/>
+        <a:font script="Syre" typeface="Estrangelo Edessa"/>
+        <a:font script="Sora" typeface="Nirmala UI"/>
+        <a:font script="Tale" typeface="Microsoft Tai Le"/>
+        <a:font script="Talu" typeface="Microsoft New Tai Lue"/>
+        <a:font script="Tfng" typeface="Ebrima"/>
+      </a:minorFont>
+    </a:fontScheme>
+    <a:fmtScheme name="Office">
+      <a:fillStyleLst>
+        <a:solidFill>
+          <a:schemeClr val="phClr"/>
+        </a:solidFill>
+        <a:gradFill rotWithShape="1">
+          <a:gsLst>
+            <a:gs pos="0">
+              <a:schemeClr val="phClr">
+                <a:lumMod val="110000"/>
+                <a:satMod val="105000"/>
+                <a:tint val="67000"/>
+              </a:schemeClr>
+            </a:gs>
+            <a:gs pos="50000">
+              <a:schemeClr val="phClr">
+                <a:lumMod val="105000"/>
+                <a:satMod val="103000"/>
+                <a:tint val="73000"/>
+              </a:schemeClr>
+            </a:gs>
+            <a:gs pos="100000">
+              <a:schemeClr val="phClr">
+                <a:lumMod val="105000"/>
+                <a:satMod val="109000"/>
+                <a:tint val="81000"/>
+              </a:schemeClr>
+            </a:gs>
+          </a:gsLst>
+          <a:lin ang="5400000" scaled="0"/>
+        </a:gradFill>
+        <a:gradFill rotWithShape="1">
+          <a:gsLst>
+            <a:gs pos="0">
+              <a:schemeClr val="phClr">
+                <a:satMod val="103000"/>
+                <a:lumMod val="102000"/>
+                <a:tint val="94000"/>
+              </a:schemeClr>
+            </a:gs>
+            <a:gs pos="50000">
+              <a:schemeClr val="phClr">
+                <a:satMod val="110000"/>
+                <a:lumMod val="100000"/>
+                <a:shade val="100000"/>
+              </a:schemeClr>
+            </a:gs>
+            <a:gs pos="100000">
+              <a:schemeClr val="phClr">
+                <a:lumMod val="99000"/>
+                <a:satMod val="120000"/>
+                <a:shade val="78000"/>
+              </a:schemeClr>
+            </a:gs>
+          </a:gsLst>
+          <a:lin ang="5400000" scaled="0"/>
+        </a:gradFill>
+      </a:fillStyleLst>
+      <a:lnStyleLst>
+        <a:ln w="12700" cap="flat" cmpd="sng" algn="ctr">
+          <a:solidFill>
+            <a:schemeClr val="phClr"/>
+          </a:solidFill>
+          <a:prstDash val="solid"/>
+          <a:miter lim="800000"/>
+        </a:ln>
+        <a:ln w="19050" cap="flat" cmpd="sng" algn="ctr">
+          <a:solidFill>
+            <a:schemeClr val="phClr"/>
+          </a:solidFill>
+          <a:prstDash val="solid"/>
+          <a:miter lim="800000"/>
+        </a:ln>
+        <a:ln w="25400" cap="flat" cmpd="sng" algn="ctr">
+          <a:solidFill>
+            <a:schemeClr val="phClr"/>
+          </a:solidFill>
+          <a:prstDash val="solid"/>
+          <a:miter lim="800000"/>
+        </a:ln>
+      </a:lnStyleLst>
+      <a:effectStyleLst>
+        <a:effectStyle>
+          <a:effectLst/>
+        </a:effectStyle>
+        <a:effectStyle>
+          <a:effectLst/>
+        </a:effectStyle>
+        <a:effectStyle>
+          <a:effectLst>
+            <a:outerShdw blurRad="57150" dist="19050" dir="5400000" algn="ctr" rotWithShape="0">
+              <a:srgbClr val="000000">
+                <a:alpha val="63000"/>
+              </a:srgbClr>
+            </a:outerShdw>
+          </a:effectLst>
+        </a:effectStyle>
+      </a:effectStyleLst>
+      <a:bgFillStyleLst>
+        <a:solidFill>
+          <a:schemeClr val="phClr"/>
+        </a:solidFill>
+        <a:solidFill>
+          <a:schemeClr val="phClr">
+            <a:tint val="95000"/>
+            <a:satMod val="170000"/>
+          </a:schemeClr>
+        </a:solidFill>
+        <a:gradFill rotWithShape="1">
+          <a:gsLst>
+            <a:gs pos="0">
+              <a:schemeClr val="phClr">
+                <a:tint val="93000"/>
+                <a:satMod val="150000"/>
+                <a:shade val="98000"/>
+                <a:lumMod val="102000"/>
+              </a:schemeClr>
+            </a:gs>
+            <a:gs pos="50000">
+              <a:schemeClr val="phClr">
+                <a:tint val="98000"/>
+                <a:satMod val="130000"/>
+                <a:shade val="90000"/>
+                <a:lumMod val="103000"/>
+              </a:schemeClr>
+            </a:gs>
+            <a:gs pos="100000">
+              <a:schemeClr val="phClr">
+                <a:shade val="63000"/>
+                <a:satMod val="120000"/>
+              </a:schemeClr>
+            </a:gs>
+          </a:gsLst>
+          <a:lin ang="5400000" scaled="0"/>
+        </a:gradFill>
+      </a:bgFillStyleLst>
+    </a:fmtScheme>
+  </a:themeElements>
+  <a:objectDefaults>
+    <a:lnDef>
+      <a:spPr/>
+      <a:bodyPr/>
+      <a:lstStyle/>
+      <a:style>
+        <a:lnRef idx="2">
+          <a:schemeClr val="accent1"/>
+        </a:lnRef>
+        <a:fillRef idx="0">
+          <a:schemeClr val="accent1"/>
+        </a:fillRef>
+        <a:effectRef idx="1">
+          <a:schemeClr val="accent1"/>
+        </a:effectRef>
+        <a:fontRef idx="minor">
+          <a:schemeClr val="tx1"/>
+        </a:fontRef>
+      </a:style>
+    </a:lnDef>
+  </a:objectDefaults>
+  <a:extraClrSchemeLst/>
+  <a:extLst>
+    <a:ext uri="{05A4C25C-085E-4340-85A3-A5531E510DB2}">
+      <thm15:themeFamily xmlns:thm15="http://schemas.microsoft.com/office/thememl/2012/main" name="Office Theme" id="{2E142A2C-CD16-42D6-873A-C26D2A0506FA}" vid="{1BDDFF52-6CD6-40A5-AB3C-68EB2F1E4D0A}"/>
+    </a:ext>
+  </a:extLst>
+</a:theme>
 </file>